--- a/outputs/Longchamp_analysis.pptx
+++ b/outputs/Longchamp_analysis.pptx
@@ -12,6 +12,9 @@
     <p:sldId id="260" r:id="rId11"/>
     <p:sldId id="261" r:id="rId12"/>
     <p:sldId id="262" r:id="rId13"/>
+    <p:sldId id="263" r:id="rId14"/>
+    <p:sldId id="264" r:id="rId15"/>
+    <p:sldId id="265" r:id="rId16"/>
   </p:sldIdLst>
   <p:sldSz cx="12191695" cy="6858000" type="screen4x3"/>
   <p:notesSz cx="6858000" cy="9144000"/>
@@ -3245,7 +3248,7 @@
                 </a:solidFill>
                 <a:latin typeface="Calibri"/>
               </a:rPr>
-              <a:t>Generated April 24, 2026 | Luxury Goods</a:t>
+              <a:t>Generated April 27, 2026 | Luxury Goods &amp; Fashion</a:t>
             </a:r>
           </a:p>
         </p:txBody>
@@ -3279,7 +3282,7 @@
                 </a:solidFill>
                 <a:latin typeface="Calibri"/>
               </a:rPr>
-              <a:t>Longchamp is a French family-owned luxury goods company known for its high-quality leather goods, especially its iconic Pliage line of handbags. Founded in 1948, the company has grown into an international brand with a strong presence in over 80 countries.</a:t>
+              <a:t>A French luxury leather goods company known for its handbags, luggage, and accessories, founded in 1948.</a:t>
             </a:r>
           </a:p>
         </p:txBody>
@@ -3313,7 +3316,7 @@
                 </a:solidFill>
                 <a:latin typeface="Calibri"/>
               </a:rPr>
-              <a:t>Recommendation: HOLD | Target: 1550000000 | Upside/Downside: +3.3% | Current: 1500000000_estimate_EUR</a:t>
+              <a:t>Recommendation: HOLD | Target: 3411.7 | Upside/Downside: N/A | Current: N/A</a:t>
             </a:r>
           </a:p>
         </p:txBody>
@@ -3326,7 +3329,7 @@
 </p:sld>
 </file>
 
-<file path=ppt/slides/slide2.xml><?xml version="1.0" encoding="utf-8"?>
+<file path=ppt/slides/slide10.xml><?xml version="1.0" encoding="utf-8"?>
 <p:sld xmlns:a="http://schemas.openxmlformats.org/drawingml/2006/main" xmlns:p="http://schemas.openxmlformats.org/presentationml/2006/main" xmlns:r="http://schemas.openxmlformats.org/officeDocument/2006/relationships">
   <p:cSld>
     <p:spTree>
@@ -3452,7 +3455,7 @@
                 </a:solidFill>
                 <a:latin typeface="Calibri"/>
               </a:rPr>
-              <a:t>Company Overview</a:t>
+              <a:t>Catalysts &amp; Risks</a:t>
             </a:r>
           </a:p>
         </p:txBody>
@@ -3486,7 +3489,7 @@
                 </a:solidFill>
                 <a:latin typeface="Calibri"/>
               </a:rPr>
-              <a:t>Business Model</a:t>
+              <a:t>Catalysts</a:t>
             </a:r>
           </a:p>
           <a:p>
@@ -3505,7 +3508,7 @@
               </a:defRPr>
             </a:pPr>
             <a:r>
-              <a:t>Longchamp operates a vertically integrated business model, designing, manufacturing, and distributing its products globally. The company generates revenue through direct-to-consumer sales via its own retail stores and e-commerce platform, as well as through wholesale partnerships with department stores and specialty retailers. A significant portion of Longchamp's income comes from its best-selling Pliage line, which is priced in the mid-to-high luxury segment. The brand also licenses its name for select accessories and apparel, further diversifying its revenue streams. Longchamp reinvests heavily in brand marketing, store design, and product innovation to maintain its premium positioning and customer loyalty.</a:t>
+              <a:t>Upcoming Q4 2024 earnings and strategic update, which could clarify China recovery trends, DTC growth, and margin trajectory, providing visibility on 2025 guidance.</a:t>
             </a:r>
           </a:p>
           <a:p>
@@ -3524,7 +3527,7 @@
               </a:defRPr>
             </a:pPr>
             <a:r>
-              <a:t>Founded: 1948</a:t>
+              <a:t>Potential launch of a premium leather sneaker line or high-profile collaboration (e.g., with a luxury designer or artist), which could rejuvenate brand perception and drive traffic across channels.</a:t>
             </a:r>
           </a:p>
           <a:p>
@@ -3543,7 +3546,41 @@
               </a:defRPr>
             </a:pPr>
             <a:r>
-              <a:t>HQ: Paris, France</a:t>
+              <a:t>Announcement of a minority stake sale or strategic partnership (e.g., with a private equity firm or luxury conglomerate), which could signal a path to public listing or accelerated expansion.</a:t>
+            </a:r>
+          </a:p>
+        </p:txBody>
+      </p:sp>
+      <p:sp>
+        <p:nvSpPr>
+          <p:cNvPr id="6" name="TextBox 5"/>
+          <p:cNvSpPr txBox="1"/>
+          <p:nvPr/>
+        </p:nvSpPr>
+        <p:spPr>
+          <a:xfrm>
+            <a:off x="6400800" y="1645920"/>
+            <a:ext cx="5486400" cy="4754880"/>
+          </a:xfrm>
+          <a:prstGeom prst="rect">
+            <a:avLst/>
+          </a:prstGeom>
+          <a:noFill/>
+        </p:spPr>
+        <p:txBody>
+          <a:bodyPr wrap="none">
+            <a:spAutoFit/>
+          </a:bodyPr>
+          <a:lstStyle/>
+          <a:p>
+            <a:r>
+              <a:rPr b="1" sz="2000">
+                <a:solidFill>
+                  <a:srgbClr val="333333"/>
+                </a:solidFill>
+                <a:latin typeface="Calibri"/>
+              </a:rPr>
+              <a:t>Key Risks</a:t>
             </a:r>
           </a:p>
           <a:p>
@@ -3562,136 +3599,7 @@
               </a:defRPr>
             </a:pPr>
             <a:r>
-              <a:t>Employees: approximately 3,500</a:t>
-            </a:r>
-          </a:p>
-          <a:p>
-            <a:pPr>
-              <a:spcBef>
-                <a:spcPts val="200"/>
-              </a:spcBef>
-              <a:spcAft>
-                <a:spcPts val="200"/>
-              </a:spcAft>
-              <a:defRPr sz="1400">
-                <a:solidFill>
-                  <a:srgbClr val="333333"/>
-                </a:solidFill>
-                <a:latin typeface="Calibri"/>
-              </a:defRPr>
-            </a:pPr>
-            <a:r>
-              <a:t>Ticker: N/A</a:t>
-            </a:r>
-          </a:p>
-        </p:txBody>
-      </p:sp>
-      <p:sp>
-        <p:nvSpPr>
-          <p:cNvPr id="6" name="TextBox 5"/>
-          <p:cNvSpPr txBox="1"/>
-          <p:nvPr/>
-        </p:nvSpPr>
-        <p:spPr>
-          <a:xfrm>
-            <a:off x="6400800" y="1645920"/>
-            <a:ext cx="5486400" cy="4754880"/>
-          </a:xfrm>
-          <a:prstGeom prst="rect">
-            <a:avLst/>
-          </a:prstGeom>
-          <a:noFill/>
-        </p:spPr>
-        <p:txBody>
-          <a:bodyPr wrap="none">
-            <a:spAutoFit/>
-          </a:bodyPr>
-          <a:lstStyle/>
-          <a:p>
-            <a:r>
-              <a:rPr b="1" sz="2000">
-                <a:solidFill>
-                  <a:srgbClr val="333333"/>
-                </a:solidFill>
-                <a:latin typeface="Calibri"/>
-              </a:rPr>
-              <a:t>Competitive Advantages</a:t>
-            </a:r>
-          </a:p>
-          <a:p>
-            <a:pPr>
-              <a:spcBef>
-                <a:spcPts val="200"/>
-              </a:spcBef>
-              <a:spcAft>
-                <a:spcPts val="200"/>
-              </a:spcAft>
-              <a:defRPr sz="1400">
-                <a:solidFill>
-                  <a:srgbClr val="333333"/>
-                </a:solidFill>
-                <a:latin typeface="Calibri"/>
-              </a:defRPr>
-            </a:pPr>
-            <a:r>
-              <a:t>Strong brand heritage and family ownership, enabling long-term strategic decisions</a:t>
-            </a:r>
-          </a:p>
-          <a:p>
-            <a:pPr>
-              <a:spcBef>
-                <a:spcPts val="200"/>
-              </a:spcBef>
-              <a:spcAft>
-                <a:spcPts val="200"/>
-              </a:spcAft>
-              <a:defRPr sz="1400">
-                <a:solidFill>
-                  <a:srgbClr val="333333"/>
-                </a:solidFill>
-                <a:latin typeface="Calibri"/>
-              </a:defRPr>
-            </a:pPr>
-            <a:r>
-              <a:t>Iconic and recognizable product designs, especially the Pliage handbag line</a:t>
-            </a:r>
-          </a:p>
-          <a:p>
-            <a:pPr>
-              <a:spcBef>
-                <a:spcPts val="200"/>
-              </a:spcBef>
-              <a:spcAft>
-                <a:spcPts val="200"/>
-              </a:spcAft>
-              <a:defRPr sz="1400">
-                <a:solidFill>
-                  <a:srgbClr val="333333"/>
-                </a:solidFill>
-                <a:latin typeface="Calibri"/>
-              </a:defRPr>
-            </a:pPr>
-            <a:r>
-              <a:t>Vertically integrated supply chain, ensuring quality control and cost efficiency</a:t>
-            </a:r>
-          </a:p>
-          <a:p>
-            <a:pPr>
-              <a:spcBef>
-                <a:spcPts val="200"/>
-              </a:spcBef>
-              <a:spcAft>
-                <a:spcPts val="200"/>
-              </a:spcAft>
-              <a:defRPr sz="1400">
-                <a:solidFill>
-                  <a:srgbClr val="333333"/>
-                </a:solidFill>
-                <a:latin typeface="Calibri"/>
-              </a:defRPr>
-            </a:pPr>
-            <a:r>
-              <a:t>Global retail network with a focus on owned stores for brand control and customer experience</a:t>
+              <a:t>No risks provided.</a:t>
             </a:r>
           </a:p>
         </p:txBody>
@@ -3704,7 +3612,7 @@
 </p:sld>
 </file>
 
-<file path=ppt/slides/slide3.xml><?xml version="1.0" encoding="utf-8"?>
+<file path=ppt/slides/slide2.xml><?xml version="1.0" encoding="utf-8"?>
 <p:sld xmlns:a="http://schemas.openxmlformats.org/drawingml/2006/main" xmlns:p="http://schemas.openxmlformats.org/presentationml/2006/main" xmlns:r="http://schemas.openxmlformats.org/officeDocument/2006/relationships">
   <p:cSld>
     <p:spTree>
@@ -3830,7 +3738,7 @@
                 </a:solidFill>
                 <a:latin typeface="Calibri"/>
               </a:rPr>
-              <a:t>Market &amp; Competition</a:t>
+              <a:t>Company Overview</a:t>
             </a:r>
           </a:p>
         </p:txBody>
@@ -3864,7 +3772,7 @@
                 </a:solidFill>
                 <a:latin typeface="Calibri"/>
               </a:rPr>
-              <a:t>Market Sizing</a:t>
+              <a:t>Business Model</a:t>
             </a:r>
           </a:p>
           <a:p>
@@ -3883,7 +3791,7 @@
               </a:defRPr>
             </a:pPr>
             <a:r>
-              <a:t>TAM: Approximately $350B (global luxury goods market, 2024 estimate)</a:t>
+              <a:t>Sells high-end leather products, accessories, and ready-to-wear items through owned retail stores, e-commerce, and wholesale partnerships.</a:t>
             </a:r>
           </a:p>
           <a:p>
@@ -3902,7 +3810,7 @@
               </a:defRPr>
             </a:pPr>
             <a:r>
-              <a:t>Growth (CAGR): 6-8% CAGR (2024-2027, McKinsey &amp; Company)</a:t>
+              <a:t>Founded: N/A</a:t>
             </a:r>
           </a:p>
           <a:p>
@@ -3921,7 +3829,7 @@
               </a:defRPr>
             </a:pPr>
             <a:r>
-              <a:t>Segment: Luxury leather goods, handbags, and accessories</a:t>
+              <a:t>HQ: N/A</a:t>
             </a:r>
           </a:p>
           <a:p>
@@ -3940,41 +3848,7 @@
               </a:defRPr>
             </a:pPr>
             <a:r>
-              <a:t>Company share: 1-2% (estimated for Longchamp in luxury leather goods)</a:t>
-            </a:r>
-          </a:p>
-        </p:txBody>
-      </p:sp>
-      <p:sp>
-        <p:nvSpPr>
-          <p:cNvPr id="6" name="TextBox 5"/>
-          <p:cNvSpPr txBox="1"/>
-          <p:nvPr/>
-        </p:nvSpPr>
-        <p:spPr>
-          <a:xfrm>
-            <a:off x="6400800" y="1645920"/>
-            <a:ext cx="5486400" cy="4754880"/>
-          </a:xfrm>
-          <a:prstGeom prst="rect">
-            <a:avLst/>
-          </a:prstGeom>
-          <a:noFill/>
-        </p:spPr>
-        <p:txBody>
-          <a:bodyPr wrap="none">
-            <a:spAutoFit/>
-          </a:bodyPr>
-          <a:lstStyle/>
-          <a:p>
-            <a:r>
-              <a:rPr b="1" sz="2000">
-                <a:solidFill>
-                  <a:srgbClr val="333333"/>
-                </a:solidFill>
-                <a:latin typeface="Calibri"/>
-              </a:rPr>
-              <a:t>Trends &amp; Competitors</a:t>
+              <a:t>Employees: N/A</a:t>
             </a:r>
           </a:p>
           <a:p>
@@ -3993,7 +3867,41 @@
               </a:defRPr>
             </a:pPr>
             <a:r>
-              <a:t>Sustainability and ethical sourcing gaining importance</a:t>
+              <a:t>Ticker: N/A</a:t>
+            </a:r>
+          </a:p>
+        </p:txBody>
+      </p:sp>
+      <p:sp>
+        <p:nvSpPr>
+          <p:cNvPr id="6" name="TextBox 5"/>
+          <p:cNvSpPr txBox="1"/>
+          <p:nvPr/>
+        </p:nvSpPr>
+        <p:spPr>
+          <a:xfrm>
+            <a:off x="6400800" y="1645920"/>
+            <a:ext cx="5486400" cy="4754880"/>
+          </a:xfrm>
+          <a:prstGeom prst="rect">
+            <a:avLst/>
+          </a:prstGeom>
+          <a:noFill/>
+        </p:spPr>
+        <p:txBody>
+          <a:bodyPr wrap="none">
+            <a:spAutoFit/>
+          </a:bodyPr>
+          <a:lstStyle/>
+          <a:p>
+            <a:r>
+              <a:rPr b="1" sz="2000">
+                <a:solidFill>
+                  <a:srgbClr val="333333"/>
+                </a:solidFill>
+                <a:latin typeface="Calibri"/>
+              </a:rPr>
+              <a:t>Competitive Advantages</a:t>
             </a:r>
           </a:p>
           <a:p>
@@ -4012,235 +3920,7 @@
               </a:defRPr>
             </a:pPr>
             <a:r>
-              <a:t>Digital transformation and e-commerce growth</a:t>
-            </a:r>
-          </a:p>
-          <a:p>
-            <a:pPr>
-              <a:spcBef>
-                <a:spcPts val="200"/>
-              </a:spcBef>
-              <a:spcAft>
-                <a:spcPts val="200"/>
-              </a:spcAft>
-              <a:defRPr sz="1400">
-                <a:solidFill>
-                  <a:srgbClr val="333333"/>
-                </a:solidFill>
-                <a:latin typeface="Calibri"/>
-              </a:defRPr>
-            </a:pPr>
-            <a:r>
-              <a:t>Rise of 'quiet luxury' and understated branding</a:t>
-            </a:r>
-          </a:p>
-          <a:p>
-            <a:pPr>
-              <a:spcBef>
-                <a:spcPts val="200"/>
-              </a:spcBef>
-              <a:spcAft>
-                <a:spcPts val="200"/>
-              </a:spcAft>
-              <a:defRPr sz="1400">
-                <a:solidFill>
-                  <a:srgbClr val="333333"/>
-                </a:solidFill>
-                <a:latin typeface="Calibri"/>
-              </a:defRPr>
-            </a:pPr>
-            <a:r>
-              <a:t>Increased demand for vintage and pre-owned luxury goods</a:t>
-            </a:r>
-          </a:p>
-          <a:p>
-            <a:pPr>
-              <a:spcBef>
-                <a:spcPts val="200"/>
-              </a:spcBef>
-              <a:spcAft>
-                <a:spcPts val="200"/>
-              </a:spcAft>
-              <a:defRPr sz="1400">
-                <a:solidFill>
-                  <a:srgbClr val="333333"/>
-                </a:solidFill>
-                <a:latin typeface="Calibri"/>
-              </a:defRPr>
-            </a:pPr>
-            <a:r>
-              <a:t>Personalization and customization of luxury products</a:t>
-            </a:r>
-          </a:p>
-          <a:p>
-            <a:pPr>
-              <a:spcBef>
-                <a:spcPts val="200"/>
-              </a:spcBef>
-              <a:spcAft>
-                <a:spcPts val="200"/>
-              </a:spcAft>
-              <a:defRPr sz="1400">
-                <a:solidFill>
-                  <a:srgbClr val="333333"/>
-                </a:solidFill>
-                <a:latin typeface="Calibri"/>
-              </a:defRPr>
-            </a:pPr>
-            <a:r>
-              <a:t>Top competitors:</a:t>
-            </a:r>
-          </a:p>
-          <a:p>
-            <a:pPr>
-              <a:spcBef>
-                <a:spcPts val="200"/>
-              </a:spcBef>
-              <a:spcAft>
-                <a:spcPts val="200"/>
-              </a:spcAft>
-              <a:defRPr sz="1400">
-                <a:solidFill>
-                  <a:srgbClr val="333333"/>
-                </a:solidFill>
-                <a:latin typeface="Calibri"/>
-              </a:defRPr>
-            </a:pPr>
-            <a:r>
-              <a:t>Louis Vuitton (15-18%)</a:t>
-            </a:r>
-          </a:p>
-          <a:p>
-            <a:pPr>
-              <a:spcBef>
-                <a:spcPts val="200"/>
-              </a:spcBef>
-              <a:spcAft>
-                <a:spcPts val="200"/>
-              </a:spcAft>
-              <a:defRPr sz="1400">
-                <a:solidFill>
-                  <a:srgbClr val="333333"/>
-                </a:solidFill>
-                <a:latin typeface="Calibri"/>
-              </a:defRPr>
-            </a:pPr>
-            <a:r>
-              <a:t>Hermès (10-12%)</a:t>
-            </a:r>
-          </a:p>
-          <a:p>
-            <a:pPr>
-              <a:spcBef>
-                <a:spcPts val="200"/>
-              </a:spcBef>
-              <a:spcAft>
-                <a:spcPts val="200"/>
-              </a:spcAft>
-              <a:defRPr sz="1400">
-                <a:solidFill>
-                  <a:srgbClr val="333333"/>
-                </a:solidFill>
-                <a:latin typeface="Calibri"/>
-              </a:defRPr>
-            </a:pPr>
-            <a:r>
-              <a:t>Gucci (8-10%)</a:t>
-            </a:r>
-          </a:p>
-          <a:p>
-            <a:pPr>
-              <a:spcBef>
-                <a:spcPts val="200"/>
-              </a:spcBef>
-              <a:spcAft>
-                <a:spcPts val="200"/>
-              </a:spcAft>
-              <a:defRPr sz="1400">
-                <a:solidFill>
-                  <a:srgbClr val="333333"/>
-                </a:solidFill>
-                <a:latin typeface="Calibri"/>
-              </a:defRPr>
-            </a:pPr>
-            <a:r>
-              <a:t>Chanel (7-9%)</a:t>
-            </a:r>
-          </a:p>
-          <a:p>
-            <a:pPr>
-              <a:spcBef>
-                <a:spcPts val="200"/>
-              </a:spcBef>
-              <a:spcAft>
-                <a:spcPts val="200"/>
-              </a:spcAft>
-              <a:defRPr sz="1400">
-                <a:solidFill>
-                  <a:srgbClr val="333333"/>
-                </a:solidFill>
-                <a:latin typeface="Calibri"/>
-              </a:defRPr>
-            </a:pPr>
-            <a:r>
-              <a:t>Coach (4-6%)</a:t>
-            </a:r>
-          </a:p>
-          <a:p>
-            <a:pPr>
-              <a:spcBef>
-                <a:spcPts val="200"/>
-              </a:spcBef>
-              <a:spcAft>
-                <a:spcPts val="200"/>
-              </a:spcAft>
-              <a:defRPr sz="1400">
-                <a:solidFill>
-                  <a:srgbClr val="333333"/>
-                </a:solidFill>
-                <a:latin typeface="Calibri"/>
-              </a:defRPr>
-            </a:pPr>
-            <a:r>
-              <a:t>Prada (4-6%)</a:t>
-            </a:r>
-          </a:p>
-          <a:p>
-            <a:pPr>
-              <a:spcBef>
-                <a:spcPts val="200"/>
-              </a:spcBef>
-              <a:spcAft>
-                <a:spcPts val="200"/>
-              </a:spcAft>
-              <a:defRPr sz="1400">
-                <a:solidFill>
-                  <a:srgbClr val="333333"/>
-                </a:solidFill>
-                <a:latin typeface="Calibri"/>
-              </a:defRPr>
-            </a:pPr>
-            <a:r>
-              <a:t>Michael Kors (3-5%)</a:t>
-            </a:r>
-          </a:p>
-          <a:p>
-            <a:pPr>
-              <a:spcBef>
-                <a:spcPts val="200"/>
-              </a:spcBef>
-              <a:spcAft>
-                <a:spcPts val="200"/>
-              </a:spcAft>
-              <a:defRPr sz="1400">
-                <a:solidFill>
-                  <a:srgbClr val="333333"/>
-                </a:solidFill>
-                <a:latin typeface="Calibri"/>
-              </a:defRPr>
-            </a:pPr>
-            <a:r>
-              <a:t>Furla (2-4%)</a:t>
+              <a:t>No advantages provided.</a:t>
             </a:r>
           </a:p>
         </p:txBody>
@@ -4253,7 +3933,7 @@
 </p:sld>
 </file>
 
-<file path=ppt/slides/slide4.xml><?xml version="1.0" encoding="utf-8"?>
+<file path=ppt/slides/slide3.xml><?xml version="1.0" encoding="utf-8"?>
 <p:sld xmlns:a="http://schemas.openxmlformats.org/drawingml/2006/main" xmlns:p="http://schemas.openxmlformats.org/presentationml/2006/main" xmlns:r="http://schemas.openxmlformats.org/officeDocument/2006/relationships">
   <p:cSld>
     <p:spTree>
@@ -4379,7 +4059,7 @@
                 </a:solidFill>
                 <a:latin typeface="Calibri"/>
               </a:rPr>
-              <a:t>Financial Snapshot</a:t>
+              <a:t>Market &amp; Competition</a:t>
             </a:r>
           </a:p>
         </p:txBody>
@@ -4392,8 +4072,8 @@
         </p:nvSpPr>
         <p:spPr>
           <a:xfrm>
-            <a:off x="685800" y="1280160"/>
-            <a:ext cx="5669280" cy="457200"/>
+            <a:off x="685800" y="1645920"/>
+            <a:ext cx="5486400" cy="4754880"/>
           </a:xfrm>
           <a:prstGeom prst="rect">
             <a:avLst/>
@@ -4413,447 +4093,97 @@
                 </a:solidFill>
                 <a:latin typeface="Calibri"/>
               </a:rPr>
-              <a:t>Key Financials</a:t>
-            </a:r>
-          </a:p>
-        </p:txBody>
-      </p:sp>
-      <p:graphicFrame>
-        <p:nvGraphicFramePr>
-          <p:cNvPr id="6" name="Table 5"/>
-          <p:cNvGraphicFramePr>
-            <a:graphicFrameLocks noGrp="1"/>
-          </p:cNvGraphicFramePr>
-          <p:nvPr/>
-        </p:nvGraphicFramePr>
-        <p:xfrm>
-          <a:off x="685800" y="1737360"/>
-          <a:ext cx="5669280" cy="4754880"/>
-        </p:xfrm>
-        <a:graphic>
-          <a:graphicData uri="http://schemas.openxmlformats.org/drawingml/2006/table">
-            <a:tbl>
-              <a:tblPr firstRow="1" bandRow="1">
-                <a:tableStyleId>{5C22544A-7EE6-4342-B048-85BDC9FD1C3A}</a:tableStyleId>
-              </a:tblPr>
-              <a:tblGrid>
-                <a:gridCol w="2834640"/>
-                <a:gridCol w="2834640"/>
-              </a:tblGrid>
-              <a:tr h="594360">
-                <a:tc>
-                  <a:txBody>
-                    <a:bodyPr/>
-                    <a:lstStyle/>
-                    <a:p>
-                      <a:pPr>
-                        <a:defRPr b="1" sz="1200">
-                          <a:solidFill>
-                            <a:srgbClr val="FFFFFF"/>
-                          </a:solidFill>
-                          <a:latin typeface="Calibri"/>
-                        </a:defRPr>
-                      </a:pPr>
-                      <a:r>
-                        <a:t>Metric</a:t>
-                      </a:r>
-                    </a:p>
-                  </a:txBody>
-                  <a:tcPr>
-                    <a:solidFill>
-                      <a:srgbClr val="1B2A4A"/>
-                    </a:solidFill>
-                  </a:tcPr>
-                </a:tc>
-                <a:tc>
-                  <a:txBody>
-                    <a:bodyPr/>
-                    <a:lstStyle/>
-                    <a:p>
-                      <a:pPr>
-                        <a:defRPr b="1" sz="1200">
-                          <a:solidFill>
-                            <a:srgbClr val="FFFFFF"/>
-                          </a:solidFill>
-                          <a:latin typeface="Calibri"/>
-                        </a:defRPr>
-                      </a:pPr>
-                      <a:r>
-                        <a:t>Value</a:t>
-                      </a:r>
-                    </a:p>
-                  </a:txBody>
-                  <a:tcPr>
-                    <a:solidFill>
-                      <a:srgbClr val="1B2A4A"/>
-                    </a:solidFill>
-                  </a:tcPr>
-                </a:tc>
-              </a:tr>
-              <a:tr h="594360">
-                <a:tc>
-                  <a:txBody>
-                    <a:bodyPr/>
-                    <a:lstStyle/>
-                    <a:p>
-                      <a:pPr>
-                        <a:defRPr sz="1100">
-                          <a:solidFill>
-                            <a:srgbClr val="333333"/>
-                          </a:solidFill>
-                          <a:latin typeface="Calibri"/>
-                        </a:defRPr>
-                      </a:pPr>
-                      <a:r>
-                        <a:t>Revenue</a:t>
-                      </a:r>
-                    </a:p>
-                  </a:txBody>
-                  <a:tcPr>
-                    <a:solidFill>
-                      <a:srgbClr val="FFFFFF"/>
-                    </a:solidFill>
-                  </a:tcPr>
-                </a:tc>
-                <a:tc>
-                  <a:txBody>
-                    <a:bodyPr/>
-                    <a:lstStyle/>
-                    <a:p>
-                      <a:pPr>
-                        <a:defRPr sz="1100">
-                          <a:solidFill>
-                            <a:srgbClr val="333333"/>
-                          </a:solidFill>
-                          <a:latin typeface="Calibri"/>
-                        </a:defRPr>
-                      </a:pPr>
-                      <a:r>
-                        <a:t>N/A</a:t>
-                      </a:r>
-                    </a:p>
-                  </a:txBody>
-                  <a:tcPr>
-                    <a:solidFill>
-                      <a:srgbClr val="FFFFFF"/>
-                    </a:solidFill>
-                  </a:tcPr>
-                </a:tc>
-              </a:tr>
-              <a:tr h="594360">
-                <a:tc>
-                  <a:txBody>
-                    <a:bodyPr/>
-                    <a:lstStyle/>
-                    <a:p>
-                      <a:pPr>
-                        <a:defRPr sz="1100">
-                          <a:solidFill>
-                            <a:srgbClr val="333333"/>
-                          </a:solidFill>
-                          <a:latin typeface="Calibri"/>
-                        </a:defRPr>
-                      </a:pPr>
-                      <a:r>
-                        <a:t>Revenue growth</a:t>
-                      </a:r>
-                    </a:p>
-                  </a:txBody>
-                  <a:tcPr>
-                    <a:solidFill>
-                      <a:srgbClr val="FAFAFA"/>
-                    </a:solidFill>
-                  </a:tcPr>
-                </a:tc>
-                <a:tc>
-                  <a:txBody>
-                    <a:bodyPr/>
-                    <a:lstStyle/>
-                    <a:p>
-                      <a:pPr>
-                        <a:defRPr sz="1100">
-                          <a:solidFill>
-                            <a:srgbClr val="333333"/>
-                          </a:solidFill>
-                          <a:latin typeface="Calibri"/>
-                        </a:defRPr>
-                      </a:pPr>
-                      <a:r>
-                        <a:t>N/A</a:t>
-                      </a:r>
-                    </a:p>
-                  </a:txBody>
-                  <a:tcPr>
-                    <a:solidFill>
-                      <a:srgbClr val="FAFAFA"/>
-                    </a:solidFill>
-                  </a:tcPr>
-                </a:tc>
-              </a:tr>
-              <a:tr h="594360">
-                <a:tc>
-                  <a:txBody>
-                    <a:bodyPr/>
-                    <a:lstStyle/>
-                    <a:p>
-                      <a:pPr>
-                        <a:defRPr sz="1100">
-                          <a:solidFill>
-                            <a:srgbClr val="333333"/>
-                          </a:solidFill>
-                          <a:latin typeface="Calibri"/>
-                        </a:defRPr>
-                      </a:pPr>
-                      <a:r>
-                        <a:t>Gross margin</a:t>
-                      </a:r>
-                    </a:p>
-                  </a:txBody>
-                  <a:tcPr>
-                    <a:solidFill>
-                      <a:srgbClr val="FFFFFF"/>
-                    </a:solidFill>
-                  </a:tcPr>
-                </a:tc>
-                <a:tc>
-                  <a:txBody>
-                    <a:bodyPr/>
-                    <a:lstStyle/>
-                    <a:p>
-                      <a:pPr>
-                        <a:defRPr sz="1100">
-                          <a:solidFill>
-                            <a:srgbClr val="333333"/>
-                          </a:solidFill>
-                          <a:latin typeface="Calibri"/>
-                        </a:defRPr>
-                      </a:pPr>
-                      <a:r>
-                        <a:t>N/A</a:t>
-                      </a:r>
-                    </a:p>
-                  </a:txBody>
-                  <a:tcPr>
-                    <a:solidFill>
-                      <a:srgbClr val="FFFFFF"/>
-                    </a:solidFill>
-                  </a:tcPr>
-                </a:tc>
-              </a:tr>
-              <a:tr h="594360">
-                <a:tc>
-                  <a:txBody>
-                    <a:bodyPr/>
-                    <a:lstStyle/>
-                    <a:p>
-                      <a:pPr>
-                        <a:defRPr sz="1100">
-                          <a:solidFill>
-                            <a:srgbClr val="333333"/>
-                          </a:solidFill>
-                          <a:latin typeface="Calibri"/>
-                        </a:defRPr>
-                      </a:pPr>
-                      <a:r>
-                        <a:t>EBITDA margin</a:t>
-                      </a:r>
-                    </a:p>
-                  </a:txBody>
-                  <a:tcPr>
-                    <a:solidFill>
-                      <a:srgbClr val="FAFAFA"/>
-                    </a:solidFill>
-                  </a:tcPr>
-                </a:tc>
-                <a:tc>
-                  <a:txBody>
-                    <a:bodyPr/>
-                    <a:lstStyle/>
-                    <a:p>
-                      <a:pPr>
-                        <a:defRPr sz="1100">
-                          <a:solidFill>
-                            <a:srgbClr val="333333"/>
-                          </a:solidFill>
-                          <a:latin typeface="Calibri"/>
-                        </a:defRPr>
-                      </a:pPr>
-                      <a:r>
-                        <a:t>N/A</a:t>
-                      </a:r>
-                    </a:p>
-                  </a:txBody>
-                  <a:tcPr>
-                    <a:solidFill>
-                      <a:srgbClr val="FAFAFA"/>
-                    </a:solidFill>
-                  </a:tcPr>
-                </a:tc>
-              </a:tr>
-              <a:tr h="594360">
-                <a:tc>
-                  <a:txBody>
-                    <a:bodyPr/>
-                    <a:lstStyle/>
-                    <a:p>
-                      <a:pPr>
-                        <a:defRPr sz="1100">
-                          <a:solidFill>
-                            <a:srgbClr val="333333"/>
-                          </a:solidFill>
-                          <a:latin typeface="Calibri"/>
-                        </a:defRPr>
-                      </a:pPr>
-                      <a:r>
-                        <a:t>Net margin</a:t>
-                      </a:r>
-                    </a:p>
-                  </a:txBody>
-                  <a:tcPr>
-                    <a:solidFill>
-                      <a:srgbClr val="FFFFFF"/>
-                    </a:solidFill>
-                  </a:tcPr>
-                </a:tc>
-                <a:tc>
-                  <a:txBody>
-                    <a:bodyPr/>
-                    <a:lstStyle/>
-                    <a:p>
-                      <a:pPr>
-                        <a:defRPr sz="1100">
-                          <a:solidFill>
-                            <a:srgbClr val="333333"/>
-                          </a:solidFill>
-                          <a:latin typeface="Calibri"/>
-                        </a:defRPr>
-                      </a:pPr>
-                      <a:r>
-                        <a:t>N/A</a:t>
-                      </a:r>
-                    </a:p>
-                  </a:txBody>
-                  <a:tcPr>
-                    <a:solidFill>
-                      <a:srgbClr val="FFFFFF"/>
-                    </a:solidFill>
-                  </a:tcPr>
-                </a:tc>
-              </a:tr>
-              <a:tr h="594360">
-                <a:tc>
-                  <a:txBody>
-                    <a:bodyPr/>
-                    <a:lstStyle/>
-                    <a:p>
-                      <a:pPr>
-                        <a:defRPr sz="1100">
-                          <a:solidFill>
-                            <a:srgbClr val="333333"/>
-                          </a:solidFill>
-                          <a:latin typeface="Calibri"/>
-                        </a:defRPr>
-                      </a:pPr>
-                      <a:r>
-                        <a:t>Free cash flow</a:t>
-                      </a:r>
-                    </a:p>
-                  </a:txBody>
-                  <a:tcPr>
-                    <a:solidFill>
-                      <a:srgbClr val="FAFAFA"/>
-                    </a:solidFill>
-                  </a:tcPr>
-                </a:tc>
-                <a:tc>
-                  <a:txBody>
-                    <a:bodyPr/>
-                    <a:lstStyle/>
-                    <a:p>
-                      <a:pPr>
-                        <a:defRPr sz="1100">
-                          <a:solidFill>
-                            <a:srgbClr val="333333"/>
-                          </a:solidFill>
-                          <a:latin typeface="Calibri"/>
-                        </a:defRPr>
-                      </a:pPr>
-                      <a:r>
-                        <a:t>N/A</a:t>
-                      </a:r>
-                    </a:p>
-                  </a:txBody>
-                  <a:tcPr>
-                    <a:solidFill>
-                      <a:srgbClr val="FAFAFA"/>
-                    </a:solidFill>
-                  </a:tcPr>
-                </a:tc>
-              </a:tr>
-              <a:tr h="594360">
-                <a:tc>
-                  <a:txBody>
-                    <a:bodyPr/>
-                    <a:lstStyle/>
-                    <a:p>
-                      <a:pPr>
-                        <a:defRPr sz="1100">
-                          <a:solidFill>
-                            <a:srgbClr val="333333"/>
-                          </a:solidFill>
-                          <a:latin typeface="Calibri"/>
-                        </a:defRPr>
-                      </a:pPr>
-                      <a:r>
-                        <a:t>Debt/Equity</a:t>
-                      </a:r>
-                    </a:p>
-                  </a:txBody>
-                  <a:tcPr>
-                    <a:solidFill>
-                      <a:srgbClr val="FFFFFF"/>
-                    </a:solidFill>
-                  </a:tcPr>
-                </a:tc>
-                <a:tc>
-                  <a:txBody>
-                    <a:bodyPr/>
-                    <a:lstStyle/>
-                    <a:p>
-                      <a:pPr>
-                        <a:defRPr sz="1100">
-                          <a:solidFill>
-                            <a:srgbClr val="333333"/>
-                          </a:solidFill>
-                          <a:latin typeface="Calibri"/>
-                        </a:defRPr>
-                      </a:pPr>
-                      <a:r>
-                        <a:t>N/A</a:t>
-                      </a:r>
-                    </a:p>
-                  </a:txBody>
-                  <a:tcPr>
-                    <a:solidFill>
-                      <a:srgbClr val="FFFFFF"/>
-                    </a:solidFill>
-                  </a:tcPr>
-                </a:tc>
-              </a:tr>
-            </a:tbl>
-          </a:graphicData>
-        </a:graphic>
-      </p:graphicFrame>
-      <p:sp>
-        <p:nvSpPr>
-          <p:cNvPr id="7" name="TextBox 6"/>
+              <a:t>Market Sizing</a:t>
+            </a:r>
+          </a:p>
+          <a:p>
+            <a:pPr>
+              <a:spcBef>
+                <a:spcPts val="200"/>
+              </a:spcBef>
+              <a:spcAft>
+                <a:spcPts val="200"/>
+              </a:spcAft>
+              <a:defRPr sz="1400">
+                <a:solidFill>
+                  <a:srgbClr val="333333"/>
+                </a:solidFill>
+                <a:latin typeface="Calibri"/>
+              </a:defRPr>
+            </a:pPr>
+            <a:r>
+              <a:t>TAM: Not available</a:t>
+            </a:r>
+          </a:p>
+          <a:p>
+            <a:pPr>
+              <a:spcBef>
+                <a:spcPts val="200"/>
+              </a:spcBef>
+              <a:spcAft>
+                <a:spcPts val="200"/>
+              </a:spcAft>
+              <a:defRPr sz="1400">
+                <a:solidFill>
+                  <a:srgbClr val="333333"/>
+                </a:solidFill>
+                <a:latin typeface="Calibri"/>
+              </a:defRPr>
+            </a:pPr>
+            <a:r>
+              <a:t>Growth (CAGR): Not available</a:t>
+            </a:r>
+          </a:p>
+          <a:p>
+            <a:pPr>
+              <a:spcBef>
+                <a:spcPts val="200"/>
+              </a:spcBef>
+              <a:spcAft>
+                <a:spcPts val="200"/>
+              </a:spcAft>
+              <a:defRPr sz="1400">
+                <a:solidFill>
+                  <a:srgbClr val="333333"/>
+                </a:solidFill>
+                <a:latin typeface="Calibri"/>
+              </a:defRPr>
+            </a:pPr>
+            <a:r>
+              <a:t>Segment: luxury leather goods, specifically luxury handbags and accessories</a:t>
+            </a:r>
+          </a:p>
+          <a:p>
+            <a:pPr>
+              <a:spcBef>
+                <a:spcPts val="200"/>
+              </a:spcBef>
+              <a:spcAft>
+                <a:spcPts val="200"/>
+              </a:spcAft>
+              <a:defRPr sz="1400">
+                <a:solidFill>
+                  <a:srgbClr val="333333"/>
+                </a:solidFill>
+                <a:latin typeface="Calibri"/>
+              </a:defRPr>
+            </a:pPr>
+            <a:r>
+              <a:t>Company share: Estimated 2-4% in luxury leather goods (Longchamp)</a:t>
+            </a:r>
+          </a:p>
+        </p:txBody>
+      </p:sp>
+      <p:sp>
+        <p:nvSpPr>
+          <p:cNvPr id="6" name="TextBox 5"/>
           <p:cNvSpPr txBox="1"/>
           <p:nvPr/>
         </p:nvSpPr>
         <p:spPr>
           <a:xfrm>
-            <a:off x="6492240" y="1280160"/>
-            <a:ext cx="4983480" cy="457200"/>
+            <a:off x="6400800" y="1645920"/>
+            <a:ext cx="5486400" cy="4754880"/>
           </a:xfrm>
           <a:prstGeom prst="rect">
             <a:avLst/>
@@ -4873,431 +4203,239 @@
                 </a:solidFill>
                 <a:latin typeface="Calibri"/>
               </a:rPr>
-              <a:t>Outlook (Projections)</a:t>
-            </a:r>
-          </a:p>
-        </p:txBody>
-      </p:sp>
-      <p:graphicFrame>
-        <p:nvGraphicFramePr>
-          <p:cNvPr id="8" name="Table 7"/>
-          <p:cNvGraphicFramePr>
-            <a:graphicFrameLocks noGrp="1"/>
-          </p:cNvGraphicFramePr>
-          <p:nvPr/>
-        </p:nvGraphicFramePr>
-        <p:xfrm>
-          <a:off x="6492240" y="1737360"/>
-          <a:ext cx="4983480" cy="4754880"/>
-        </p:xfrm>
-        <a:graphic>
-          <a:graphicData uri="http://schemas.openxmlformats.org/drawingml/2006/table">
-            <a:tbl>
-              <a:tblPr firstRow="1" bandRow="1">
-                <a:tableStyleId>{5C22544A-7EE6-4342-B048-85BDC9FD1C3A}</a:tableStyleId>
-              </a:tblPr>
-              <a:tblGrid>
-                <a:gridCol w="1245870"/>
-                <a:gridCol w="1245870"/>
-                <a:gridCol w="1245870"/>
-                <a:gridCol w="1245870"/>
-              </a:tblGrid>
-              <a:tr h="1188720">
-                <a:tc>
-                  <a:txBody>
-                    <a:bodyPr/>
-                    <a:lstStyle/>
-                    <a:p>
-                      <a:pPr>
-                        <a:defRPr b="1" sz="1200">
-                          <a:solidFill>
-                            <a:srgbClr val="FFFFFF"/>
-                          </a:solidFill>
-                          <a:latin typeface="Calibri"/>
-                        </a:defRPr>
-                      </a:pPr>
-                      <a:r>
-                        <a:t>Year</a:t>
-                      </a:r>
-                    </a:p>
-                  </a:txBody>
-                  <a:tcPr>
-                    <a:solidFill>
-                      <a:srgbClr val="1B2A4A"/>
-                    </a:solidFill>
-                  </a:tcPr>
-                </a:tc>
-                <a:tc>
-                  <a:txBody>
-                    <a:bodyPr/>
-                    <a:lstStyle/>
-                    <a:p>
-                      <a:pPr>
-                        <a:defRPr b="1" sz="1200">
-                          <a:solidFill>
-                            <a:srgbClr val="FFFFFF"/>
-                          </a:solidFill>
-                          <a:latin typeface="Calibri"/>
-                        </a:defRPr>
-                      </a:pPr>
-                      <a:r>
-                        <a:t>Revenue</a:t>
-                      </a:r>
-                    </a:p>
-                  </a:txBody>
-                  <a:tcPr>
-                    <a:solidFill>
-                      <a:srgbClr val="1B2A4A"/>
-                    </a:solidFill>
-                  </a:tcPr>
-                </a:tc>
-                <a:tc>
-                  <a:txBody>
-                    <a:bodyPr/>
-                    <a:lstStyle/>
-                    <a:p>
-                      <a:pPr>
-                        <a:defRPr b="1" sz="1200">
-                          <a:solidFill>
-                            <a:srgbClr val="FFFFFF"/>
-                          </a:solidFill>
-                          <a:latin typeface="Calibri"/>
-                        </a:defRPr>
-                      </a:pPr>
-                      <a:r>
-                        <a:t>Growth</a:t>
-                      </a:r>
-                    </a:p>
-                  </a:txBody>
-                  <a:tcPr>
-                    <a:solidFill>
-                      <a:srgbClr val="1B2A4A"/>
-                    </a:solidFill>
-                  </a:tcPr>
-                </a:tc>
-                <a:tc>
-                  <a:txBody>
-                    <a:bodyPr/>
-                    <a:lstStyle/>
-                    <a:p>
-                      <a:pPr>
-                        <a:defRPr b="1" sz="1200">
-                          <a:solidFill>
-                            <a:srgbClr val="FFFFFF"/>
-                          </a:solidFill>
-                          <a:latin typeface="Calibri"/>
-                        </a:defRPr>
-                      </a:pPr>
-                      <a:r>
-                        <a:t>EBITDA %</a:t>
-                      </a:r>
-                    </a:p>
-                  </a:txBody>
-                  <a:tcPr>
-                    <a:solidFill>
-                      <a:srgbClr val="1B2A4A"/>
-                    </a:solidFill>
-                  </a:tcPr>
-                </a:tc>
-              </a:tr>
-              <a:tr h="1188720">
-                <a:tc>
-                  <a:txBody>
-                    <a:bodyPr/>
-                    <a:lstStyle/>
-                    <a:p>
-                      <a:pPr>
-                        <a:defRPr sz="1100">
-                          <a:solidFill>
-                            <a:srgbClr val="333333"/>
-                          </a:solidFill>
-                          <a:latin typeface="Calibri"/>
-                        </a:defRPr>
-                      </a:pPr>
-                      <a:r>
-                        <a:t>2026</a:t>
-                      </a:r>
-                    </a:p>
-                  </a:txBody>
-                  <a:tcPr>
-                    <a:solidFill>
-                      <a:srgbClr val="FFFFFF"/>
-                    </a:solidFill>
-                  </a:tcPr>
-                </a:tc>
-                <a:tc>
-                  <a:txBody>
-                    <a:bodyPr/>
-                    <a:lstStyle/>
-                    <a:p>
-                      <a:pPr>
-                        <a:defRPr sz="1100">
-                          <a:solidFill>
-                            <a:srgbClr val="333333"/>
-                          </a:solidFill>
-                          <a:latin typeface="Calibri"/>
-                        </a:defRPr>
-                      </a:pPr>
-                      <a:r>
-                        <a:t>N/A</a:t>
-                      </a:r>
-                    </a:p>
-                  </a:txBody>
-                  <a:tcPr>
-                    <a:solidFill>
-                      <a:srgbClr val="FFFFFF"/>
-                    </a:solidFill>
-                  </a:tcPr>
-                </a:tc>
-                <a:tc>
-                  <a:txBody>
-                    <a:bodyPr/>
-                    <a:lstStyle/>
-                    <a:p>
-                      <a:pPr>
-                        <a:defRPr sz="1100">
-                          <a:solidFill>
-                            <a:srgbClr val="333333"/>
-                          </a:solidFill>
-                          <a:latin typeface="Calibri"/>
-                        </a:defRPr>
-                      </a:pPr>
-                      <a:r>
-                        <a:t>N/A</a:t>
-                      </a:r>
-                    </a:p>
-                  </a:txBody>
-                  <a:tcPr>
-                    <a:solidFill>
-                      <a:srgbClr val="FFFFFF"/>
-                    </a:solidFill>
-                  </a:tcPr>
-                </a:tc>
-                <a:tc>
-                  <a:txBody>
-                    <a:bodyPr/>
-                    <a:lstStyle/>
-                    <a:p>
-                      <a:pPr>
-                        <a:defRPr sz="1100">
-                          <a:solidFill>
-                            <a:srgbClr val="333333"/>
-                          </a:solidFill>
-                          <a:latin typeface="Calibri"/>
-                        </a:defRPr>
-                      </a:pPr>
-                      <a:r>
-                        <a:t>N/A</a:t>
-                      </a:r>
-                    </a:p>
-                  </a:txBody>
-                  <a:tcPr>
-                    <a:solidFill>
-                      <a:srgbClr val="FFFFFF"/>
-                    </a:solidFill>
-                  </a:tcPr>
-                </a:tc>
-              </a:tr>
-              <a:tr h="1188720">
-                <a:tc>
-                  <a:txBody>
-                    <a:bodyPr/>
-                    <a:lstStyle/>
-                    <a:p>
-                      <a:pPr>
-                        <a:defRPr sz="1100">
-                          <a:solidFill>
-                            <a:srgbClr val="333333"/>
-                          </a:solidFill>
-                          <a:latin typeface="Calibri"/>
-                        </a:defRPr>
-                      </a:pPr>
-                      <a:r>
-                        <a:t>2027</a:t>
-                      </a:r>
-                    </a:p>
-                  </a:txBody>
-                  <a:tcPr>
-                    <a:solidFill>
-                      <a:srgbClr val="FAFAFA"/>
-                    </a:solidFill>
-                  </a:tcPr>
-                </a:tc>
-                <a:tc>
-                  <a:txBody>
-                    <a:bodyPr/>
-                    <a:lstStyle/>
-                    <a:p>
-                      <a:pPr>
-                        <a:defRPr sz="1100">
-                          <a:solidFill>
-                            <a:srgbClr val="333333"/>
-                          </a:solidFill>
-                          <a:latin typeface="Calibri"/>
-                        </a:defRPr>
-                      </a:pPr>
-                      <a:r>
-                        <a:t>N/A</a:t>
-                      </a:r>
-                    </a:p>
-                  </a:txBody>
-                  <a:tcPr>
-                    <a:solidFill>
-                      <a:srgbClr val="FAFAFA"/>
-                    </a:solidFill>
-                  </a:tcPr>
-                </a:tc>
-                <a:tc>
-                  <a:txBody>
-                    <a:bodyPr/>
-                    <a:lstStyle/>
-                    <a:p>
-                      <a:pPr>
-                        <a:defRPr sz="1100">
-                          <a:solidFill>
-                            <a:srgbClr val="333333"/>
-                          </a:solidFill>
-                          <a:latin typeface="Calibri"/>
-                        </a:defRPr>
-                      </a:pPr>
-                      <a:r>
-                        <a:t>N/A</a:t>
-                      </a:r>
-                    </a:p>
-                  </a:txBody>
-                  <a:tcPr>
-                    <a:solidFill>
-                      <a:srgbClr val="FAFAFA"/>
-                    </a:solidFill>
-                  </a:tcPr>
-                </a:tc>
-                <a:tc>
-                  <a:txBody>
-                    <a:bodyPr/>
-                    <a:lstStyle/>
-                    <a:p>
-                      <a:pPr>
-                        <a:defRPr sz="1100">
-                          <a:solidFill>
-                            <a:srgbClr val="333333"/>
-                          </a:solidFill>
-                          <a:latin typeface="Calibri"/>
-                        </a:defRPr>
-                      </a:pPr>
-                      <a:r>
-                        <a:t>N/A</a:t>
-                      </a:r>
-                    </a:p>
-                  </a:txBody>
-                  <a:tcPr>
-                    <a:solidFill>
-                      <a:srgbClr val="FAFAFA"/>
-                    </a:solidFill>
-                  </a:tcPr>
-                </a:tc>
-              </a:tr>
-              <a:tr h="1188720">
-                <a:tc>
-                  <a:txBody>
-                    <a:bodyPr/>
-                    <a:lstStyle/>
-                    <a:p>
-                      <a:pPr>
-                        <a:defRPr sz="1100">
-                          <a:solidFill>
-                            <a:srgbClr val="333333"/>
-                          </a:solidFill>
-                          <a:latin typeface="Calibri"/>
-                        </a:defRPr>
-                      </a:pPr>
-                      <a:r>
-                        <a:t>2028</a:t>
-                      </a:r>
-                    </a:p>
-                  </a:txBody>
-                  <a:tcPr>
-                    <a:solidFill>
-                      <a:srgbClr val="FFFFFF"/>
-                    </a:solidFill>
-                  </a:tcPr>
-                </a:tc>
-                <a:tc>
-                  <a:txBody>
-                    <a:bodyPr/>
-                    <a:lstStyle/>
-                    <a:p>
-                      <a:pPr>
-                        <a:defRPr sz="1100">
-                          <a:solidFill>
-                            <a:srgbClr val="333333"/>
-                          </a:solidFill>
-                          <a:latin typeface="Calibri"/>
-                        </a:defRPr>
-                      </a:pPr>
-                      <a:r>
-                        <a:t>N/A</a:t>
-                      </a:r>
-                    </a:p>
-                  </a:txBody>
-                  <a:tcPr>
-                    <a:solidFill>
-                      <a:srgbClr val="FFFFFF"/>
-                    </a:solidFill>
-                  </a:tcPr>
-                </a:tc>
-                <a:tc>
-                  <a:txBody>
-                    <a:bodyPr/>
-                    <a:lstStyle/>
-                    <a:p>
-                      <a:pPr>
-                        <a:defRPr sz="1100">
-                          <a:solidFill>
-                            <a:srgbClr val="333333"/>
-                          </a:solidFill>
-                          <a:latin typeface="Calibri"/>
-                        </a:defRPr>
-                      </a:pPr>
-                      <a:r>
-                        <a:t>N/A</a:t>
-                      </a:r>
-                    </a:p>
-                  </a:txBody>
-                  <a:tcPr>
-                    <a:solidFill>
-                      <a:srgbClr val="FFFFFF"/>
-                    </a:solidFill>
-                  </a:tcPr>
-                </a:tc>
-                <a:tc>
-                  <a:txBody>
-                    <a:bodyPr/>
-                    <a:lstStyle/>
-                    <a:p>
-                      <a:pPr>
-                        <a:defRPr sz="1100">
-                          <a:solidFill>
-                            <a:srgbClr val="333333"/>
-                          </a:solidFill>
-                          <a:latin typeface="Calibri"/>
-                        </a:defRPr>
-                      </a:pPr>
-                      <a:r>
-                        <a:t>N/A</a:t>
-                      </a:r>
-                    </a:p>
-                  </a:txBody>
-                  <a:tcPr>
-                    <a:solidFill>
-                      <a:srgbClr val="FFFFFF"/>
-                    </a:solidFill>
-                  </a:tcPr>
-                </a:tc>
-              </a:tr>
-            </a:tbl>
-          </a:graphicData>
-        </a:graphic>
-      </p:graphicFrame>
+              <a:t>Trends &amp; Competitors</a:t>
+            </a:r>
+          </a:p>
+          <a:p>
+            <a:pPr>
+              <a:spcBef>
+                <a:spcPts val="200"/>
+              </a:spcBef>
+              <a:spcAft>
+                <a:spcPts val="200"/>
+              </a:spcAft>
+              <a:defRPr sz="1400">
+                <a:solidFill>
+                  <a:srgbClr val="333333"/>
+                </a:solidFill>
+                <a:latin typeface="Calibri"/>
+              </a:defRPr>
+            </a:pPr>
+            <a:r>
+              <a:t>Sustainability and ethical sourcing in materials</a:t>
+            </a:r>
+          </a:p>
+          <a:p>
+            <a:pPr>
+              <a:spcBef>
+                <a:spcPts val="200"/>
+              </a:spcBef>
+              <a:spcAft>
+                <a:spcPts val="200"/>
+              </a:spcAft>
+              <a:defRPr sz="1400">
+                <a:solidFill>
+                  <a:srgbClr val="333333"/>
+                </a:solidFill>
+                <a:latin typeface="Calibri"/>
+              </a:defRPr>
+            </a:pPr>
+            <a:r>
+              <a:t>Rise of 'quiet luxury' and minimalist design</a:t>
+            </a:r>
+          </a:p>
+          <a:p>
+            <a:pPr>
+              <a:spcBef>
+                <a:spcPts val="200"/>
+              </a:spcBef>
+              <a:spcAft>
+                <a:spcPts val="200"/>
+              </a:spcAft>
+              <a:defRPr sz="1400">
+                <a:solidFill>
+                  <a:srgbClr val="333333"/>
+                </a:solidFill>
+                <a:latin typeface="Calibri"/>
+              </a:defRPr>
+            </a:pPr>
+            <a:r>
+              <a:t>Growth in online and omnichannel sales</a:t>
+            </a:r>
+          </a:p>
+          <a:p>
+            <a:pPr>
+              <a:spcBef>
+                <a:spcPts val="200"/>
+              </a:spcBef>
+              <a:spcAft>
+                <a:spcPts val="200"/>
+              </a:spcAft>
+              <a:defRPr sz="1400">
+                <a:solidFill>
+                  <a:srgbClr val="333333"/>
+                </a:solidFill>
+                <a:latin typeface="Calibri"/>
+              </a:defRPr>
+            </a:pPr>
+            <a:r>
+              <a:t>Increasing demand for vintage and pre-owned luxury handbags</a:t>
+            </a:r>
+          </a:p>
+          <a:p>
+            <a:pPr>
+              <a:spcBef>
+                <a:spcPts val="200"/>
+              </a:spcBef>
+              <a:spcAft>
+                <a:spcPts val="200"/>
+              </a:spcAft>
+              <a:defRPr sz="1400">
+                <a:solidFill>
+                  <a:srgbClr val="333333"/>
+                </a:solidFill>
+                <a:latin typeface="Calibri"/>
+              </a:defRPr>
+            </a:pPr>
+            <a:r>
+              <a:t>Top competitors:</a:t>
+            </a:r>
+          </a:p>
+          <a:p>
+            <a:pPr>
+              <a:spcBef>
+                <a:spcPts val="200"/>
+              </a:spcBef>
+              <a:spcAft>
+                <a:spcPts val="200"/>
+              </a:spcAft>
+              <a:defRPr sz="1400">
+                <a:solidFill>
+                  <a:srgbClr val="333333"/>
+                </a:solidFill>
+                <a:latin typeface="Calibri"/>
+              </a:defRPr>
+            </a:pPr>
+            <a:r>
+              <a:t>Hermès (Estimated 20-25% in luxury handbags)</a:t>
+            </a:r>
+          </a:p>
+          <a:p>
+            <a:pPr>
+              <a:spcBef>
+                <a:spcPts val="200"/>
+              </a:spcBef>
+              <a:spcAft>
+                <a:spcPts val="200"/>
+              </a:spcAft>
+              <a:defRPr sz="1400">
+                <a:solidFill>
+                  <a:srgbClr val="333333"/>
+                </a:solidFill>
+                <a:latin typeface="Calibri"/>
+              </a:defRPr>
+            </a:pPr>
+            <a:r>
+              <a:t>Louis Vuitton (Estimated 15-20% in luxury handbags)</a:t>
+            </a:r>
+          </a:p>
+          <a:p>
+            <a:pPr>
+              <a:spcBef>
+                <a:spcPts val="200"/>
+              </a:spcBef>
+              <a:spcAft>
+                <a:spcPts val="200"/>
+              </a:spcAft>
+              <a:defRPr sz="1400">
+                <a:solidFill>
+                  <a:srgbClr val="333333"/>
+                </a:solidFill>
+                <a:latin typeface="Calibri"/>
+              </a:defRPr>
+            </a:pPr>
+            <a:r>
+              <a:t>Chanel (Estimated 10-15% in luxury handbags)</a:t>
+            </a:r>
+          </a:p>
+          <a:p>
+            <a:pPr>
+              <a:spcBef>
+                <a:spcPts val="200"/>
+              </a:spcBef>
+              <a:spcAft>
+                <a:spcPts val="200"/>
+              </a:spcAft>
+              <a:defRPr sz="1400">
+                <a:solidFill>
+                  <a:srgbClr val="333333"/>
+                </a:solidFill>
+                <a:latin typeface="Calibri"/>
+              </a:defRPr>
+            </a:pPr>
+            <a:r>
+              <a:t>Gucci (Estimated 8-12% in luxury handbags)</a:t>
+            </a:r>
+          </a:p>
+          <a:p>
+            <a:pPr>
+              <a:spcBef>
+                <a:spcPts val="200"/>
+              </a:spcBef>
+              <a:spcAft>
+                <a:spcPts val="200"/>
+              </a:spcAft>
+              <a:defRPr sz="1400">
+                <a:solidFill>
+                  <a:srgbClr val="333333"/>
+                </a:solidFill>
+                <a:latin typeface="Calibri"/>
+              </a:defRPr>
+            </a:pPr>
+            <a:r>
+              <a:t>Coach (Estimated 5-8% in luxury leather goods)</a:t>
+            </a:r>
+          </a:p>
+          <a:p>
+            <a:pPr>
+              <a:spcBef>
+                <a:spcPts val="200"/>
+              </a:spcBef>
+              <a:spcAft>
+                <a:spcPts val="200"/>
+              </a:spcAft>
+              <a:defRPr sz="1400">
+                <a:solidFill>
+                  <a:srgbClr val="333333"/>
+                </a:solidFill>
+                <a:latin typeface="Calibri"/>
+              </a:defRPr>
+            </a:pPr>
+            <a:r>
+              <a:t>Prada (Estimated 5-7% in luxury leather goods)</a:t>
+            </a:r>
+          </a:p>
+          <a:p>
+            <a:pPr>
+              <a:spcBef>
+                <a:spcPts val="200"/>
+              </a:spcBef>
+              <a:spcAft>
+                <a:spcPts val="200"/>
+              </a:spcAft>
+              <a:defRPr sz="1400">
+                <a:solidFill>
+                  <a:srgbClr val="333333"/>
+                </a:solidFill>
+                <a:latin typeface="Calibri"/>
+              </a:defRPr>
+            </a:pPr>
+            <a:r>
+              <a:t>Furla (Estimated 3-5% in luxury leather goods)</a:t>
+            </a:r>
+          </a:p>
+        </p:txBody>
+      </p:sp>
     </p:spTree>
   </p:cSld>
   <p:clrMapOvr>
@@ -5306,7 +4444,7 @@
 </p:sld>
 </file>
 
-<file path=ppt/slides/slide5.xml><?xml version="1.0" encoding="utf-8"?>
+<file path=ppt/slides/slide4.xml><?xml version="1.0" encoding="utf-8"?>
 <p:sld xmlns:a="http://schemas.openxmlformats.org/drawingml/2006/main" xmlns:p="http://schemas.openxmlformats.org/presentationml/2006/main" xmlns:r="http://schemas.openxmlformats.org/officeDocument/2006/relationships">
   <p:cSld>
     <p:spTree>
@@ -5432,7 +4570,7 @@
                 </a:solidFill>
                 <a:latin typeface="Calibri"/>
               </a:rPr>
-              <a:t>Valuation Summary</a:t>
+              <a:t>Financial Snapshot</a:t>
             </a:r>
           </a:p>
         </p:txBody>
@@ -5446,7 +4584,7 @@
         <p:spPr>
           <a:xfrm>
             <a:off x="685800" y="1280160"/>
-            <a:ext cx="5394960" cy="5212080"/>
+            <a:ext cx="5669280" cy="457200"/>
           </a:xfrm>
           <a:prstGeom prst="rect">
             <a:avLst/>
@@ -5466,151 +4604,22 @@
                 </a:solidFill>
                 <a:latin typeface="Calibri"/>
               </a:rPr>
-              <a:t>Conclusion</a:t>
-            </a:r>
-          </a:p>
-          <a:p>
-            <a:pPr>
-              <a:spcBef>
-                <a:spcPts val="200"/>
-              </a:spcBef>
-              <a:spcAft>
-                <a:spcPts val="200"/>
-              </a:spcAft>
-              <a:defRPr sz="1400">
-                <a:solidFill>
-                  <a:srgbClr val="333333"/>
-                </a:solidFill>
-                <a:latin typeface="Calibri"/>
-              </a:defRPr>
-            </a:pPr>
-            <a:r>
-              <a:t>Implied value: 1550000000</a:t>
-            </a:r>
-          </a:p>
-          <a:p>
-            <a:pPr>
-              <a:spcBef>
-                <a:spcPts val="200"/>
-              </a:spcBef>
-              <a:spcAft>
-                <a:spcPts val="200"/>
-              </a:spcAft>
-              <a:defRPr sz="1400">
-                <a:solidFill>
-                  <a:srgbClr val="333333"/>
-                </a:solidFill>
-                <a:latin typeface="Calibri"/>
-              </a:defRPr>
-            </a:pPr>
-            <a:r>
-              <a:t>Upside/Downside: +3.3%</a:t>
-            </a:r>
-          </a:p>
-          <a:p>
-            <a:pPr>
-              <a:spcBef>
-                <a:spcPts val="200"/>
-              </a:spcBef>
-              <a:spcAft>
-                <a:spcPts val="200"/>
-              </a:spcAft>
-              <a:defRPr sz="1400">
-                <a:solidFill>
-                  <a:srgbClr val="333333"/>
-                </a:solidFill>
-                <a:latin typeface="Calibri"/>
-              </a:defRPr>
-            </a:pPr>
-            <a:r>
-              <a:t>Recommendation: HOLD</a:t>
-            </a:r>
-          </a:p>
-          <a:p>
-            <a:pPr>
-              <a:spcBef>
-                <a:spcPts val="200"/>
-              </a:spcBef>
-              <a:spcAft>
-                <a:spcPts val="200"/>
-              </a:spcAft>
-              <a:defRPr sz="1400">
-                <a:solidFill>
-                  <a:srgbClr val="333333"/>
-                </a:solidFill>
-                <a:latin typeface="Calibri"/>
-              </a:defRPr>
-            </a:pPr>
-            <a:r>
-              <a:t>Currency: EUR</a:t>
-            </a:r>
-          </a:p>
-          <a:p>
-            <a:pPr>
-              <a:spcBef>
-                <a:spcPts val="200"/>
-              </a:spcBef>
-              <a:spcAft>
-                <a:spcPts val="200"/>
-              </a:spcAft>
-              <a:defRPr sz="1400">
-                <a:solidFill>
-                  <a:srgbClr val="333333"/>
-                </a:solidFill>
-                <a:latin typeface="Calibri"/>
-              </a:defRPr>
-            </a:pPr>
-            <a:r>
-              <a:t>DCF: WACC 10%, TGR 2%</a:t>
-            </a:r>
-          </a:p>
-        </p:txBody>
-      </p:sp>
-      <p:sp>
-        <p:nvSpPr>
-          <p:cNvPr id="6" name="TextBox 5"/>
-          <p:cNvSpPr txBox="1"/>
-          <p:nvPr/>
-        </p:nvSpPr>
-        <p:spPr>
-          <a:xfrm>
-            <a:off x="6309360" y="1280160"/>
-            <a:ext cx="5166360" cy="457200"/>
-          </a:xfrm>
-          <a:prstGeom prst="rect">
-            <a:avLst/>
-          </a:prstGeom>
-          <a:noFill/>
-        </p:spPr>
-        <p:txBody>
-          <a:bodyPr wrap="none">
-            <a:spAutoFit/>
-          </a:bodyPr>
-          <a:lstStyle/>
-          <a:p>
-            <a:r>
-              <a:rPr b="1" sz="2000">
-                <a:solidFill>
-                  <a:srgbClr val="333333"/>
-                </a:solidFill>
-                <a:latin typeface="Calibri"/>
-              </a:rPr>
-              <a:t>Methods</a:t>
+              <a:t>Key Financials</a:t>
             </a:r>
           </a:p>
         </p:txBody>
       </p:sp>
       <p:graphicFrame>
         <p:nvGraphicFramePr>
-          <p:cNvPr id="7" name="Table 6"/>
+          <p:cNvPr id="6" name="Table 5"/>
           <p:cNvGraphicFramePr>
             <a:graphicFrameLocks noGrp="1"/>
           </p:cNvGraphicFramePr>
           <p:nvPr/>
         </p:nvGraphicFramePr>
         <p:xfrm>
-          <a:off x="6309360" y="1737360"/>
-          <a:ext cx="5166360" cy="4754880"/>
+          <a:off x="685800" y="1737360"/>
+          <a:ext cx="5669280" cy="4754880"/>
         </p:xfrm>
         <a:graphic>
           <a:graphicData uri="http://schemas.openxmlformats.org/drawingml/2006/table">
@@ -5619,13 +4628,10 @@
                 <a:tableStyleId>{5C22544A-7EE6-4342-B048-85BDC9FD1C3A}</a:tableStyleId>
               </a:tblPr>
               <a:tblGrid>
-                <a:gridCol w="1033272"/>
-                <a:gridCol w="1033272"/>
-                <a:gridCol w="1033272"/>
-                <a:gridCol w="1033272"/>
-                <a:gridCol w="1033272"/>
+                <a:gridCol w="2834640"/>
+                <a:gridCol w="2834640"/>
               </a:tblGrid>
-              <a:tr h="950976">
+              <a:tr h="594360">
                 <a:tc>
                   <a:txBody>
                     <a:bodyPr/>
@@ -5640,7 +4646,7 @@
                         </a:defRPr>
                       </a:pPr>
                       <a:r>
-                        <a:t>Method</a:t>
+                        <a:t>Metric</a:t>
                       </a:r>
                     </a:p>
                   </a:txBody>
@@ -5664,7 +4670,7 @@
                         </a:defRPr>
                       </a:pPr>
                       <a:r>
-                        <a:t>Low</a:t>
+                        <a:t>Value</a:t>
                       </a:r>
                     </a:p>
                   </a:txBody>
@@ -5674,6 +4680,420 @@
                     </a:solidFill>
                   </a:tcPr>
                 </a:tc>
+              </a:tr>
+              <a:tr h="594360">
+                <a:tc>
+                  <a:txBody>
+                    <a:bodyPr/>
+                    <a:lstStyle/>
+                    <a:p>
+                      <a:pPr>
+                        <a:defRPr sz="1100">
+                          <a:solidFill>
+                            <a:srgbClr val="333333"/>
+                          </a:solidFill>
+                          <a:latin typeface="Calibri"/>
+                        </a:defRPr>
+                      </a:pPr>
+                      <a:r>
+                        <a:t>Revenue</a:t>
+                      </a:r>
+                    </a:p>
+                  </a:txBody>
+                  <a:tcPr>
+                    <a:solidFill>
+                      <a:srgbClr val="FFFFFF"/>
+                    </a:solidFill>
+                  </a:tcPr>
+                </a:tc>
+                <a:tc>
+                  <a:txBody>
+                    <a:bodyPr/>
+                    <a:lstStyle/>
+                    <a:p>
+                      <a:pPr>
+                        <a:defRPr sz="1100">
+                          <a:solidFill>
+                            <a:srgbClr val="333333"/>
+                          </a:solidFill>
+                          <a:latin typeface="Calibri"/>
+                        </a:defRPr>
+                      </a:pPr>
+                      <a:r>
+                        <a:t>1200</a:t>
+                      </a:r>
+                    </a:p>
+                  </a:txBody>
+                  <a:tcPr>
+                    <a:solidFill>
+                      <a:srgbClr val="FFFFFF"/>
+                    </a:solidFill>
+                  </a:tcPr>
+                </a:tc>
+              </a:tr>
+              <a:tr h="594360">
+                <a:tc>
+                  <a:txBody>
+                    <a:bodyPr/>
+                    <a:lstStyle/>
+                    <a:p>
+                      <a:pPr>
+                        <a:defRPr sz="1100">
+                          <a:solidFill>
+                            <a:srgbClr val="333333"/>
+                          </a:solidFill>
+                          <a:latin typeface="Calibri"/>
+                        </a:defRPr>
+                      </a:pPr>
+                      <a:r>
+                        <a:t>Revenue growth</a:t>
+                      </a:r>
+                    </a:p>
+                  </a:txBody>
+                  <a:tcPr>
+                    <a:solidFill>
+                      <a:srgbClr val="FAFAFA"/>
+                    </a:solidFill>
+                  </a:tcPr>
+                </a:tc>
+                <a:tc>
+                  <a:txBody>
+                    <a:bodyPr/>
+                    <a:lstStyle/>
+                    <a:p>
+                      <a:pPr>
+                        <a:defRPr sz="1100">
+                          <a:solidFill>
+                            <a:srgbClr val="333333"/>
+                          </a:solidFill>
+                          <a:latin typeface="Calibri"/>
+                        </a:defRPr>
+                      </a:pPr>
+                      <a:r>
+                        <a:t>0.0476</a:t>
+                      </a:r>
+                    </a:p>
+                  </a:txBody>
+                  <a:tcPr>
+                    <a:solidFill>
+                      <a:srgbClr val="FAFAFA"/>
+                    </a:solidFill>
+                  </a:tcPr>
+                </a:tc>
+              </a:tr>
+              <a:tr h="594360">
+                <a:tc>
+                  <a:txBody>
+                    <a:bodyPr/>
+                    <a:lstStyle/>
+                    <a:p>
+                      <a:pPr>
+                        <a:defRPr sz="1100">
+                          <a:solidFill>
+                            <a:srgbClr val="333333"/>
+                          </a:solidFill>
+                          <a:latin typeface="Calibri"/>
+                        </a:defRPr>
+                      </a:pPr>
+                      <a:r>
+                        <a:t>Gross margin</a:t>
+                      </a:r>
+                    </a:p>
+                  </a:txBody>
+                  <a:tcPr>
+                    <a:solidFill>
+                      <a:srgbClr val="FFFFFF"/>
+                    </a:solidFill>
+                  </a:tcPr>
+                </a:tc>
+                <a:tc>
+                  <a:txBody>
+                    <a:bodyPr/>
+                    <a:lstStyle/>
+                    <a:p>
+                      <a:pPr>
+                        <a:defRPr sz="1100">
+                          <a:solidFill>
+                            <a:srgbClr val="333333"/>
+                          </a:solidFill>
+                          <a:latin typeface="Calibri"/>
+                        </a:defRPr>
+                      </a:pPr>
+                      <a:r>
+                        <a:t>0.65</a:t>
+                      </a:r>
+                    </a:p>
+                  </a:txBody>
+                  <a:tcPr>
+                    <a:solidFill>
+                      <a:srgbClr val="FFFFFF"/>
+                    </a:solidFill>
+                  </a:tcPr>
+                </a:tc>
+              </a:tr>
+              <a:tr h="594360">
+                <a:tc>
+                  <a:txBody>
+                    <a:bodyPr/>
+                    <a:lstStyle/>
+                    <a:p>
+                      <a:pPr>
+                        <a:defRPr sz="1100">
+                          <a:solidFill>
+                            <a:srgbClr val="333333"/>
+                          </a:solidFill>
+                          <a:latin typeface="Calibri"/>
+                        </a:defRPr>
+                      </a:pPr>
+                      <a:r>
+                        <a:t>EBITDA margin</a:t>
+                      </a:r>
+                    </a:p>
+                  </a:txBody>
+                  <a:tcPr>
+                    <a:solidFill>
+                      <a:srgbClr val="FAFAFA"/>
+                    </a:solidFill>
+                  </a:tcPr>
+                </a:tc>
+                <a:tc>
+                  <a:txBody>
+                    <a:bodyPr/>
+                    <a:lstStyle/>
+                    <a:p>
+                      <a:pPr>
+                        <a:defRPr sz="1100">
+                          <a:solidFill>
+                            <a:srgbClr val="333333"/>
+                          </a:solidFill>
+                          <a:latin typeface="Calibri"/>
+                        </a:defRPr>
+                      </a:pPr>
+                      <a:r>
+                        <a:t>0.15</a:t>
+                      </a:r>
+                    </a:p>
+                  </a:txBody>
+                  <a:tcPr>
+                    <a:solidFill>
+                      <a:srgbClr val="FAFAFA"/>
+                    </a:solidFill>
+                  </a:tcPr>
+                </a:tc>
+              </a:tr>
+              <a:tr h="594360">
+                <a:tc>
+                  <a:txBody>
+                    <a:bodyPr/>
+                    <a:lstStyle/>
+                    <a:p>
+                      <a:pPr>
+                        <a:defRPr sz="1100">
+                          <a:solidFill>
+                            <a:srgbClr val="333333"/>
+                          </a:solidFill>
+                          <a:latin typeface="Calibri"/>
+                        </a:defRPr>
+                      </a:pPr>
+                      <a:r>
+                        <a:t>Net margin</a:t>
+                      </a:r>
+                    </a:p>
+                  </a:txBody>
+                  <a:tcPr>
+                    <a:solidFill>
+                      <a:srgbClr val="FFFFFF"/>
+                    </a:solidFill>
+                  </a:tcPr>
+                </a:tc>
+                <a:tc>
+                  <a:txBody>
+                    <a:bodyPr/>
+                    <a:lstStyle/>
+                    <a:p>
+                      <a:pPr>
+                        <a:defRPr sz="1100">
+                          <a:solidFill>
+                            <a:srgbClr val="333333"/>
+                          </a:solidFill>
+                          <a:latin typeface="Calibri"/>
+                        </a:defRPr>
+                      </a:pPr>
+                      <a:r>
+                        <a:t>0.08</a:t>
+                      </a:r>
+                    </a:p>
+                  </a:txBody>
+                  <a:tcPr>
+                    <a:solidFill>
+                      <a:srgbClr val="FFFFFF"/>
+                    </a:solidFill>
+                  </a:tcPr>
+                </a:tc>
+              </a:tr>
+              <a:tr h="594360">
+                <a:tc>
+                  <a:txBody>
+                    <a:bodyPr/>
+                    <a:lstStyle/>
+                    <a:p>
+                      <a:pPr>
+                        <a:defRPr sz="1100">
+                          <a:solidFill>
+                            <a:srgbClr val="333333"/>
+                          </a:solidFill>
+                          <a:latin typeface="Calibri"/>
+                        </a:defRPr>
+                      </a:pPr>
+                      <a:r>
+                        <a:t>Free cash flow</a:t>
+                      </a:r>
+                    </a:p>
+                  </a:txBody>
+                  <a:tcPr>
+                    <a:solidFill>
+                      <a:srgbClr val="FAFAFA"/>
+                    </a:solidFill>
+                  </a:tcPr>
+                </a:tc>
+                <a:tc>
+                  <a:txBody>
+                    <a:bodyPr/>
+                    <a:lstStyle/>
+                    <a:p>
+                      <a:pPr>
+                        <a:defRPr sz="1100">
+                          <a:solidFill>
+                            <a:srgbClr val="333333"/>
+                          </a:solidFill>
+                          <a:latin typeface="Calibri"/>
+                        </a:defRPr>
+                      </a:pPr>
+                      <a:r>
+                        <a:t>N/A</a:t>
+                      </a:r>
+                    </a:p>
+                  </a:txBody>
+                  <a:tcPr>
+                    <a:solidFill>
+                      <a:srgbClr val="FAFAFA"/>
+                    </a:solidFill>
+                  </a:tcPr>
+                </a:tc>
+              </a:tr>
+              <a:tr h="594360">
+                <a:tc>
+                  <a:txBody>
+                    <a:bodyPr/>
+                    <a:lstStyle/>
+                    <a:p>
+                      <a:pPr>
+                        <a:defRPr sz="1100">
+                          <a:solidFill>
+                            <a:srgbClr val="333333"/>
+                          </a:solidFill>
+                          <a:latin typeface="Calibri"/>
+                        </a:defRPr>
+                      </a:pPr>
+                      <a:r>
+                        <a:t>Debt/Equity</a:t>
+                      </a:r>
+                    </a:p>
+                  </a:txBody>
+                  <a:tcPr>
+                    <a:solidFill>
+                      <a:srgbClr val="FFFFFF"/>
+                    </a:solidFill>
+                  </a:tcPr>
+                </a:tc>
+                <a:tc>
+                  <a:txBody>
+                    <a:bodyPr/>
+                    <a:lstStyle/>
+                    <a:p>
+                      <a:pPr>
+                        <a:defRPr sz="1100">
+                          <a:solidFill>
+                            <a:srgbClr val="333333"/>
+                          </a:solidFill>
+                          <a:latin typeface="Calibri"/>
+                        </a:defRPr>
+                      </a:pPr>
+                      <a:r>
+                        <a:t>N/A</a:t>
+                      </a:r>
+                    </a:p>
+                  </a:txBody>
+                  <a:tcPr>
+                    <a:solidFill>
+                      <a:srgbClr val="FFFFFF"/>
+                    </a:solidFill>
+                  </a:tcPr>
+                </a:tc>
+              </a:tr>
+            </a:tbl>
+          </a:graphicData>
+        </a:graphic>
+      </p:graphicFrame>
+      <p:sp>
+        <p:nvSpPr>
+          <p:cNvPr id="7" name="TextBox 6"/>
+          <p:cNvSpPr txBox="1"/>
+          <p:nvPr/>
+        </p:nvSpPr>
+        <p:spPr>
+          <a:xfrm>
+            <a:off x="6492240" y="1280160"/>
+            <a:ext cx="4983480" cy="457200"/>
+          </a:xfrm>
+          <a:prstGeom prst="rect">
+            <a:avLst/>
+          </a:prstGeom>
+          <a:noFill/>
+        </p:spPr>
+        <p:txBody>
+          <a:bodyPr wrap="none">
+            <a:spAutoFit/>
+          </a:bodyPr>
+          <a:lstStyle/>
+          <a:p>
+            <a:r>
+              <a:rPr b="1" sz="2000">
+                <a:solidFill>
+                  <a:srgbClr val="333333"/>
+                </a:solidFill>
+                <a:latin typeface="Calibri"/>
+              </a:rPr>
+              <a:t>Outlook (Projections)</a:t>
+            </a:r>
+          </a:p>
+        </p:txBody>
+      </p:sp>
+      <p:graphicFrame>
+        <p:nvGraphicFramePr>
+          <p:cNvPr id="8" name="Table 7"/>
+          <p:cNvGraphicFramePr>
+            <a:graphicFrameLocks noGrp="1"/>
+          </p:cNvGraphicFramePr>
+          <p:nvPr/>
+        </p:nvGraphicFramePr>
+        <p:xfrm>
+          <a:off x="6492240" y="1737360"/>
+          <a:ext cx="4983480" cy="4754880"/>
+        </p:xfrm>
+        <a:graphic>
+          <a:graphicData uri="http://schemas.openxmlformats.org/drawingml/2006/table">
+            <a:tbl>
+              <a:tblPr firstRow="1" bandRow="1">
+                <a:tableStyleId>{5C22544A-7EE6-4342-B048-85BDC9FD1C3A}</a:tableStyleId>
+              </a:tblPr>
+              <a:tblGrid>
+                <a:gridCol w="1245870"/>
+                <a:gridCol w="1245870"/>
+                <a:gridCol w="1245870"/>
+                <a:gridCol w="1245870"/>
+              </a:tblGrid>
+              <a:tr h="2377440">
                 <a:tc>
                   <a:txBody>
                     <a:bodyPr/>
@@ -5688,7 +5108,7 @@
                         </a:defRPr>
                       </a:pPr>
                       <a:r>
-                        <a:t>Mid</a:t>
+                        <a:t>Year</a:t>
                       </a:r>
                     </a:p>
                   </a:txBody>
@@ -5712,7 +5132,7 @@
                         </a:defRPr>
                       </a:pPr>
                       <a:r>
-                        <a:t>High</a:t>
+                        <a:t>Revenue</a:t>
                       </a:r>
                     </a:p>
                   </a:txBody>
@@ -5736,7 +5156,7 @@
                         </a:defRPr>
                       </a:pPr>
                       <a:r>
-                        <a:t>Weight</a:t>
+                        <a:t>Growth</a:t>
                       </a:r>
                     </a:p>
                   </a:txBody>
@@ -5746,23 +5166,47 @@
                     </a:solidFill>
                   </a:tcPr>
                 </a:tc>
+                <a:tc>
+                  <a:txBody>
+                    <a:bodyPr/>
+                    <a:lstStyle/>
+                    <a:p>
+                      <a:pPr>
+                        <a:defRPr b="1" sz="1200">
+                          <a:solidFill>
+                            <a:srgbClr val="FFFFFF"/>
+                          </a:solidFill>
+                          <a:latin typeface="Calibri"/>
+                        </a:defRPr>
+                      </a:pPr>
+                      <a:r>
+                        <a:t>EBITDA %</a:t>
+                      </a:r>
+                    </a:p>
+                  </a:txBody>
+                  <a:tcPr>
+                    <a:solidFill>
+                      <a:srgbClr val="1B2A4A"/>
+                    </a:solidFill>
+                  </a:tcPr>
+                </a:tc>
               </a:tr>
-              <a:tr h="950976">
-                <a:tc>
-                  <a:txBody>
-                    <a:bodyPr/>
-                    <a:lstStyle/>
-                    <a:p>
-                      <a:pPr>
-                        <a:defRPr sz="1100">
-                          <a:solidFill>
-                            <a:srgbClr val="333333"/>
-                          </a:solidFill>
-                          <a:latin typeface="Calibri"/>
-                        </a:defRPr>
-                      </a:pPr>
-                      <a:r>
-                        <a:t>DCF (5Y)</a:t>
+              <a:tr h="2377440">
+                <a:tc>
+                  <a:txBody>
+                    <a:bodyPr/>
+                    <a:lstStyle/>
+                    <a:p>
+                      <a:pPr>
+                        <a:defRPr sz="1100">
+                          <a:solidFill>
+                            <a:srgbClr val="333333"/>
+                          </a:solidFill>
+                          <a:latin typeface="Calibri"/>
+                        </a:defRPr>
+                      </a:pPr>
+                      <a:r>
+                        <a:t>—</a:t>
                       </a:r>
                     </a:p>
                   </a:txBody>
@@ -5786,7 +5230,7 @@
                         </a:defRPr>
                       </a:pPr>
                       <a:r>
-                        <a:t>1200000000</a:t>
+                        <a:t>No projections provided.</a:t>
                       </a:r>
                     </a:p>
                   </a:txBody>
@@ -5809,9 +5253,6 @@
                           <a:latin typeface="Calibri"/>
                         </a:defRPr>
                       </a:pPr>
-                      <a:r>
-                        <a:t>1500000000</a:t>
-                      </a:r>
                     </a:p>
                   </a:txBody>
                   <a:tcPr>
@@ -5833,404 +5274,11 @@
                           <a:latin typeface="Calibri"/>
                         </a:defRPr>
                       </a:pPr>
-                      <a:r>
-                        <a:t>1800000000</a:t>
-                      </a:r>
                     </a:p>
                   </a:txBody>
                   <a:tcPr>
                     <a:solidFill>
                       <a:srgbClr val="FFFFFF"/>
-                    </a:solidFill>
-                  </a:tcPr>
-                </a:tc>
-                <a:tc>
-                  <a:txBody>
-                    <a:bodyPr/>
-                    <a:lstStyle/>
-                    <a:p>
-                      <a:pPr>
-                        <a:defRPr sz="1100">
-                          <a:solidFill>
-                            <a:srgbClr val="333333"/>
-                          </a:solidFill>
-                          <a:latin typeface="Calibri"/>
-                        </a:defRPr>
-                      </a:pPr>
-                      <a:r>
-                        <a:t>40%</a:t>
-                      </a:r>
-                    </a:p>
-                  </a:txBody>
-                  <a:tcPr>
-                    <a:solidFill>
-                      <a:srgbClr val="FFFFFF"/>
-                    </a:solidFill>
-                  </a:tcPr>
-                </a:tc>
-              </a:tr>
-              <a:tr h="950976">
-                <a:tc>
-                  <a:txBody>
-                    <a:bodyPr/>
-                    <a:lstStyle/>
-                    <a:p>
-                      <a:pPr>
-                        <a:defRPr sz="1100">
-                          <a:solidFill>
-                            <a:srgbClr val="333333"/>
-                          </a:solidFill>
-                          <a:latin typeface="Calibri"/>
-                        </a:defRPr>
-                      </a:pPr>
-                      <a:r>
-                        <a:t>EV/EBITDA Comps</a:t>
-                      </a:r>
-                    </a:p>
-                  </a:txBody>
-                  <a:tcPr>
-                    <a:solidFill>
-                      <a:srgbClr val="FAFAFA"/>
-                    </a:solidFill>
-                  </a:tcPr>
-                </a:tc>
-                <a:tc>
-                  <a:txBody>
-                    <a:bodyPr/>
-                    <a:lstStyle/>
-                    <a:p>
-                      <a:pPr>
-                        <a:defRPr sz="1100">
-                          <a:solidFill>
-                            <a:srgbClr val="333333"/>
-                          </a:solidFill>
-                          <a:latin typeface="Calibri"/>
-                        </a:defRPr>
-                      </a:pPr>
-                      <a:r>
-                        <a:t>1300000000</a:t>
-                      </a:r>
-                    </a:p>
-                  </a:txBody>
-                  <a:tcPr>
-                    <a:solidFill>
-                      <a:srgbClr val="FAFAFA"/>
-                    </a:solidFill>
-                  </a:tcPr>
-                </a:tc>
-                <a:tc>
-                  <a:txBody>
-                    <a:bodyPr/>
-                    <a:lstStyle/>
-                    <a:p>
-                      <a:pPr>
-                        <a:defRPr sz="1100">
-                          <a:solidFill>
-                            <a:srgbClr val="333333"/>
-                          </a:solidFill>
-                          <a:latin typeface="Calibri"/>
-                        </a:defRPr>
-                      </a:pPr>
-                      <a:r>
-                        <a:t>1600000000</a:t>
-                      </a:r>
-                    </a:p>
-                  </a:txBody>
-                  <a:tcPr>
-                    <a:solidFill>
-                      <a:srgbClr val="FAFAFA"/>
-                    </a:solidFill>
-                  </a:tcPr>
-                </a:tc>
-                <a:tc>
-                  <a:txBody>
-                    <a:bodyPr/>
-                    <a:lstStyle/>
-                    <a:p>
-                      <a:pPr>
-                        <a:defRPr sz="1100">
-                          <a:solidFill>
-                            <a:srgbClr val="333333"/>
-                          </a:solidFill>
-                          <a:latin typeface="Calibri"/>
-                        </a:defRPr>
-                      </a:pPr>
-                      <a:r>
-                        <a:t>1900000000</a:t>
-                      </a:r>
-                    </a:p>
-                  </a:txBody>
-                  <a:tcPr>
-                    <a:solidFill>
-                      <a:srgbClr val="FAFAFA"/>
-                    </a:solidFill>
-                  </a:tcPr>
-                </a:tc>
-                <a:tc>
-                  <a:txBody>
-                    <a:bodyPr/>
-                    <a:lstStyle/>
-                    <a:p>
-                      <a:pPr>
-                        <a:defRPr sz="1100">
-                          <a:solidFill>
-                            <a:srgbClr val="333333"/>
-                          </a:solidFill>
-                          <a:latin typeface="Calibri"/>
-                        </a:defRPr>
-                      </a:pPr>
-                      <a:r>
-                        <a:t>30%</a:t>
-                      </a:r>
-                    </a:p>
-                  </a:txBody>
-                  <a:tcPr>
-                    <a:solidFill>
-                      <a:srgbClr val="FAFAFA"/>
-                    </a:solidFill>
-                  </a:tcPr>
-                </a:tc>
-              </a:tr>
-              <a:tr h="950976">
-                <a:tc>
-                  <a:txBody>
-                    <a:bodyPr/>
-                    <a:lstStyle/>
-                    <a:p>
-                      <a:pPr>
-                        <a:defRPr sz="1100">
-                          <a:solidFill>
-                            <a:srgbClr val="333333"/>
-                          </a:solidFill>
-                          <a:latin typeface="Calibri"/>
-                        </a:defRPr>
-                      </a:pPr>
-                      <a:r>
-                        <a:t>EV/Revenue Comps</a:t>
-                      </a:r>
-                    </a:p>
-                  </a:txBody>
-                  <a:tcPr>
-                    <a:solidFill>
-                      <a:srgbClr val="FFFFFF"/>
-                    </a:solidFill>
-                  </a:tcPr>
-                </a:tc>
-                <a:tc>
-                  <a:txBody>
-                    <a:bodyPr/>
-                    <a:lstStyle/>
-                    <a:p>
-                      <a:pPr>
-                        <a:defRPr sz="1100">
-                          <a:solidFill>
-                            <a:srgbClr val="333333"/>
-                          </a:solidFill>
-                          <a:latin typeface="Calibri"/>
-                        </a:defRPr>
-                      </a:pPr>
-                      <a:r>
-                        <a:t>1400000000</a:t>
-                      </a:r>
-                    </a:p>
-                  </a:txBody>
-                  <a:tcPr>
-                    <a:solidFill>
-                      <a:srgbClr val="FFFFFF"/>
-                    </a:solidFill>
-                  </a:tcPr>
-                </a:tc>
-                <a:tc>
-                  <a:txBody>
-                    <a:bodyPr/>
-                    <a:lstStyle/>
-                    <a:p>
-                      <a:pPr>
-                        <a:defRPr sz="1100">
-                          <a:solidFill>
-                            <a:srgbClr val="333333"/>
-                          </a:solidFill>
-                          <a:latin typeface="Calibri"/>
-                        </a:defRPr>
-                      </a:pPr>
-                      <a:r>
-                        <a:t>1700000000</a:t>
-                      </a:r>
-                    </a:p>
-                  </a:txBody>
-                  <a:tcPr>
-                    <a:solidFill>
-                      <a:srgbClr val="FFFFFF"/>
-                    </a:solidFill>
-                  </a:tcPr>
-                </a:tc>
-                <a:tc>
-                  <a:txBody>
-                    <a:bodyPr/>
-                    <a:lstStyle/>
-                    <a:p>
-                      <a:pPr>
-                        <a:defRPr sz="1100">
-                          <a:solidFill>
-                            <a:srgbClr val="333333"/>
-                          </a:solidFill>
-                          <a:latin typeface="Calibri"/>
-                        </a:defRPr>
-                      </a:pPr>
-                      <a:r>
-                        <a:t>2000000000</a:t>
-                      </a:r>
-                    </a:p>
-                  </a:txBody>
-                  <a:tcPr>
-                    <a:solidFill>
-                      <a:srgbClr val="FFFFFF"/>
-                    </a:solidFill>
-                  </a:tcPr>
-                </a:tc>
-                <a:tc>
-                  <a:txBody>
-                    <a:bodyPr/>
-                    <a:lstStyle/>
-                    <a:p>
-                      <a:pPr>
-                        <a:defRPr sz="1100">
-                          <a:solidFill>
-                            <a:srgbClr val="333333"/>
-                          </a:solidFill>
-                          <a:latin typeface="Calibri"/>
-                        </a:defRPr>
-                      </a:pPr>
-                      <a:r>
-                        <a:t>20%</a:t>
-                      </a:r>
-                    </a:p>
-                  </a:txBody>
-                  <a:tcPr>
-                    <a:solidFill>
-                      <a:srgbClr val="FFFFFF"/>
-                    </a:solidFill>
-                  </a:tcPr>
-                </a:tc>
-              </a:tr>
-              <a:tr h="950976">
-                <a:tc>
-                  <a:txBody>
-                    <a:bodyPr/>
-                    <a:lstStyle/>
-                    <a:p>
-                      <a:pPr>
-                        <a:defRPr sz="1100">
-                          <a:solidFill>
-                            <a:srgbClr val="333333"/>
-                          </a:solidFill>
-                          <a:latin typeface="Calibri"/>
-                        </a:defRPr>
-                      </a:pPr>
-                      <a:r>
-                        <a:t>Precedent Transactions</a:t>
-                      </a:r>
-                    </a:p>
-                  </a:txBody>
-                  <a:tcPr>
-                    <a:solidFill>
-                      <a:srgbClr val="FAFAFA"/>
-                    </a:solidFill>
-                  </a:tcPr>
-                </a:tc>
-                <a:tc>
-                  <a:txBody>
-                    <a:bodyPr/>
-                    <a:lstStyle/>
-                    <a:p>
-                      <a:pPr>
-                        <a:defRPr sz="1100">
-                          <a:solidFill>
-                            <a:srgbClr val="333333"/>
-                          </a:solidFill>
-                          <a:latin typeface="Calibri"/>
-                        </a:defRPr>
-                      </a:pPr>
-                      <a:r>
-                        <a:t>1500000000</a:t>
-                      </a:r>
-                    </a:p>
-                  </a:txBody>
-                  <a:tcPr>
-                    <a:solidFill>
-                      <a:srgbClr val="FAFAFA"/>
-                    </a:solidFill>
-                  </a:tcPr>
-                </a:tc>
-                <a:tc>
-                  <a:txBody>
-                    <a:bodyPr/>
-                    <a:lstStyle/>
-                    <a:p>
-                      <a:pPr>
-                        <a:defRPr sz="1100">
-                          <a:solidFill>
-                            <a:srgbClr val="333333"/>
-                          </a:solidFill>
-                          <a:latin typeface="Calibri"/>
-                        </a:defRPr>
-                      </a:pPr>
-                      <a:r>
-                        <a:t>1800000000</a:t>
-                      </a:r>
-                    </a:p>
-                  </a:txBody>
-                  <a:tcPr>
-                    <a:solidFill>
-                      <a:srgbClr val="FAFAFA"/>
-                    </a:solidFill>
-                  </a:tcPr>
-                </a:tc>
-                <a:tc>
-                  <a:txBody>
-                    <a:bodyPr/>
-                    <a:lstStyle/>
-                    <a:p>
-                      <a:pPr>
-                        <a:defRPr sz="1100">
-                          <a:solidFill>
-                            <a:srgbClr val="333333"/>
-                          </a:solidFill>
-                          <a:latin typeface="Calibri"/>
-                        </a:defRPr>
-                      </a:pPr>
-                      <a:r>
-                        <a:t>2100000000</a:t>
-                      </a:r>
-                    </a:p>
-                  </a:txBody>
-                  <a:tcPr>
-                    <a:solidFill>
-                      <a:srgbClr val="FAFAFA"/>
-                    </a:solidFill>
-                  </a:tcPr>
-                </a:tc>
-                <a:tc>
-                  <a:txBody>
-                    <a:bodyPr/>
-                    <a:lstStyle/>
-                    <a:p>
-                      <a:pPr>
-                        <a:defRPr sz="1100">
-                          <a:solidFill>
-                            <a:srgbClr val="333333"/>
-                          </a:solidFill>
-                          <a:latin typeface="Calibri"/>
-                        </a:defRPr>
-                      </a:pPr>
-                      <a:r>
-                        <a:t>10%</a:t>
-                      </a:r>
-                    </a:p>
-                  </a:txBody>
-                  <a:tcPr>
-                    <a:solidFill>
-                      <a:srgbClr val="FAFAFA"/>
                     </a:solidFill>
                   </a:tcPr>
                 </a:tc>
@@ -6247,7 +5295,7 @@
 </p:sld>
 </file>
 
-<file path=ppt/slides/slide6.xml><?xml version="1.0" encoding="utf-8"?>
+<file path=ppt/slides/slide5.xml><?xml version="1.0" encoding="utf-8"?>
 <p:sld xmlns:a="http://schemas.openxmlformats.org/drawingml/2006/main" xmlns:p="http://schemas.openxmlformats.org/presentationml/2006/main" xmlns:r="http://schemas.openxmlformats.org/officeDocument/2006/relationships">
   <p:cSld>
     <p:spTree>
@@ -6373,7 +5421,7 @@
                 </a:solidFill>
                 <a:latin typeface="Calibri"/>
               </a:rPr>
-              <a:t>Investment Thesis</a:t>
+              <a:t>Valuation Summary</a:t>
             </a:r>
           </a:p>
         </p:txBody>
@@ -6386,8 +5434,8 @@
         </p:nvSpPr>
         <p:spPr>
           <a:xfrm>
-            <a:off x="685800" y="1645920"/>
-            <a:ext cx="11155680" cy="5029200"/>
+            <a:off x="685800" y="1280160"/>
+            <a:ext cx="5394960" cy="5212080"/>
           </a:xfrm>
           <a:prstGeom prst="rect">
             <a:avLst/>
@@ -6407,7 +5455,7 @@
                 </a:solidFill>
                 <a:latin typeface="Calibri"/>
               </a:rPr>
-              <a:t>Thesis</a:t>
+              <a:t>Conclusion</a:t>
             </a:r>
           </a:p>
           <a:p>
@@ -6426,7 +5474,7 @@
               </a:defRPr>
             </a:pPr>
             <a:r>
-              <a:t>Longchamp, a privately held French luxury leather goods brand, remains a compelling niche player in the global accessories market, distinguished by its heritage, strong brand equity, and focus on accessible luxury. With a history spanning over 75 years, Longchamp has cultivated a loyal customer base, particularly in Europe and Asia, driven by its iconic Le Pliage tote, which accounts for a significant portion of its revenue. While precise financials are not publicly disclosed, industry estimates suggest Longchamp generates approximately €600–700 million in annual revenue, with EBITDA margins in the mid-teens, reflecting its efficient operational model and premium pricing power. The brand’s competitive moat is underpinned by its vertically integrated supply chain, enabling high-quality production at scale, and a direct-to-consumer (DTC) strategy that has seen e-commerce sales grow to nearly 30% of total revenue, a critical lever in the post-pandemic retail landscape. However, Longchamp’s growth trajectory has been modest compared to peers like Coach or Michael Kors, with revenue growth estimated at 3–5% annually, constrained by its limited product diversification and underpenetrated markets such as the U.S. and China. Valuation support for a HOLD recommendation stems from its stable cash flows, low leverage, and private ownership structure, which insulates it from short-term public market volatility but also limits liquidity and transparency for investors. The brand’s valuation is likely in line with mid-tier luxury peers, trading at 8–10x EV/EBITDA, reflecting its niche positioning and growth constraints. While Longchamp’s financial trajectory is steady, its ability to accelerate growth hinges on successful market expansion and product innovation, particularly in categories beyond leather goods, such as ready-to-wear and footwear, where it has yet to establish a strong foothold.</a:t>
+              <a:t>Implied value: 3411.7</a:t>
             </a:r>
           </a:p>
           <a:p>
@@ -6445,7 +5493,7 @@
               </a:defRPr>
             </a:pPr>
             <a:r>
-              <a:t>Bull: The bull case for Longchamp centers on three concrete drivers: (1) **Accelerated international expansion**, particularly in the U.S. and China, where the brand’s market share remains below potential. A targeted push into these regions, leveraging localized marketing and strategic retail partnerships, could unlock 10–15% annual revenue growth. (2) **Product diversification and innovation**, with a focus on elevating its ready-to-wear and footwear lines to complement its core leather goods. Successful execution could expand its addressable market by 20–30% and improve gross margins through higher-margin categories. (3) **Digital and DTC growth**, with e-commerce and omnichannel initiatives driving a 5–7% uplift in same-store sales. If Longchamp achieves these milestones, revenue could surpass €800 million within three years, with EBITDA margins expanding to 18–20%, justifying a valuation multiple of 12–14x EV/EBITDA and delivering significant upside to stakeholders.</a:t>
+              <a:t>Upside/Downside: N/A</a:t>
             </a:r>
           </a:p>
           <a:p>
@@ -6464,7 +5512,7 @@
               </a:defRPr>
             </a:pPr>
             <a:r>
-              <a:t>Base: In the base case, Longchamp continues to deliver steady, low-single-digit revenue growth, supported by organic expansion in its core European and Asian markets and modest gains in the U.S. The brand maintains its focus on the Le Pliage franchise, which remains a cash cow but limits upside from product innovation. E-commerce growth stabilizes at 5–7% annually, while brick-and-mortar retail sees flat to slightly negative same-store sales due to ongoing retail headwinds. EBITDA margins remain in the 14–16% range, as cost efficiencies are offset by investments in marketing and digital capabilities. Longchamp’s valuation remains anchored at 8–10x EV/EBITDA, reflecting its niche positioning and limited growth acceleration. The most likely outcome is a 3–5% annual revenue increase, with stable profitability and no material change in its competitive dynamics. This scenario supports a HOLD recommendation, with upside/downside of +3.3% based on modest multiple expansion or contraction.</a:t>
+              <a:t>Recommendation: HOLD</a:t>
             </a:r>
           </a:p>
           <a:p>
@@ -6483,11 +5531,581 @@
               </a:defRPr>
             </a:pPr>
             <a:r>
-              <a:t>Bear: The bear case for Longchamp is triggered by (1) **intensifying competition** from both accessible luxury peers (e.g., Coach, Furla) and fast-fashion brands (e.g., Zara, &amp; Other Stories) encroaching on its core leather goods segment, leading to market share erosion and pricing pressure. (2) **Failed expansion efforts**, particularly in the U.S. and China, where the brand struggles to resonate with local consumers, resulting in store closures and inventory write-downs. (3) **Supply chain disruptions or rising input costs**, which could compress margins if Longchamp is unable to pass on price increases to consumers. In this scenario, revenue growth stagnates or declines by 1–3% annually, with EBITDA margins falling to 10–12% due to higher promotional activity and lower full-price sell-through. Valuation multiples could contract to 6–8x EV/EBITDA, reflecting diminished growth prospects and increased risk, leading to a 10–15% downside for stakeholders.</a:t>
-            </a:r>
-          </a:p>
-        </p:txBody>
-      </p:sp>
+              <a:t>Currency: USD</a:t>
+            </a:r>
+          </a:p>
+          <a:p>
+            <a:pPr>
+              <a:spcBef>
+                <a:spcPts val="200"/>
+              </a:spcBef>
+              <a:spcAft>
+                <a:spcPts val="200"/>
+              </a:spcAft>
+              <a:defRPr sz="1400">
+                <a:solidFill>
+                  <a:srgbClr val="333333"/>
+                </a:solidFill>
+                <a:latin typeface="Calibri"/>
+              </a:defRPr>
+            </a:pPr>
+            <a:r>
+              <a:t>DCF: WACC 10.00%, TGR 2.00%</a:t>
+            </a:r>
+          </a:p>
+        </p:txBody>
+      </p:sp>
+      <p:sp>
+        <p:nvSpPr>
+          <p:cNvPr id="6" name="TextBox 5"/>
+          <p:cNvSpPr txBox="1"/>
+          <p:nvPr/>
+        </p:nvSpPr>
+        <p:spPr>
+          <a:xfrm>
+            <a:off x="6309360" y="1280160"/>
+            <a:ext cx="5166360" cy="457200"/>
+          </a:xfrm>
+          <a:prstGeom prst="rect">
+            <a:avLst/>
+          </a:prstGeom>
+          <a:noFill/>
+        </p:spPr>
+        <p:txBody>
+          <a:bodyPr wrap="none">
+            <a:spAutoFit/>
+          </a:bodyPr>
+          <a:lstStyle/>
+          <a:p>
+            <a:r>
+              <a:rPr b="1" sz="2000">
+                <a:solidFill>
+                  <a:srgbClr val="333333"/>
+                </a:solidFill>
+                <a:latin typeface="Calibri"/>
+              </a:rPr>
+              <a:t>Methods</a:t>
+            </a:r>
+          </a:p>
+        </p:txBody>
+      </p:sp>
+      <p:graphicFrame>
+        <p:nvGraphicFramePr>
+          <p:cNvPr id="7" name="Table 6"/>
+          <p:cNvGraphicFramePr>
+            <a:graphicFrameLocks noGrp="1"/>
+          </p:cNvGraphicFramePr>
+          <p:nvPr/>
+        </p:nvGraphicFramePr>
+        <p:xfrm>
+          <a:off x="6309360" y="1737360"/>
+          <a:ext cx="5166360" cy="4754880"/>
+        </p:xfrm>
+        <a:graphic>
+          <a:graphicData uri="http://schemas.openxmlformats.org/drawingml/2006/table">
+            <a:tbl>
+              <a:tblPr firstRow="1" bandRow="1">
+                <a:tableStyleId>{5C22544A-7EE6-4342-B048-85BDC9FD1C3A}</a:tableStyleId>
+              </a:tblPr>
+              <a:tblGrid>
+                <a:gridCol w="1033272"/>
+                <a:gridCol w="1033272"/>
+                <a:gridCol w="1033272"/>
+                <a:gridCol w="1033272"/>
+                <a:gridCol w="1033272"/>
+              </a:tblGrid>
+              <a:tr h="1188720">
+                <a:tc>
+                  <a:txBody>
+                    <a:bodyPr/>
+                    <a:lstStyle/>
+                    <a:p>
+                      <a:pPr>
+                        <a:defRPr b="1" sz="1200">
+                          <a:solidFill>
+                            <a:srgbClr val="FFFFFF"/>
+                          </a:solidFill>
+                          <a:latin typeface="Calibri"/>
+                        </a:defRPr>
+                      </a:pPr>
+                      <a:r>
+                        <a:t>Method</a:t>
+                      </a:r>
+                    </a:p>
+                  </a:txBody>
+                  <a:tcPr>
+                    <a:solidFill>
+                      <a:srgbClr val="1B2A4A"/>
+                    </a:solidFill>
+                  </a:tcPr>
+                </a:tc>
+                <a:tc>
+                  <a:txBody>
+                    <a:bodyPr/>
+                    <a:lstStyle/>
+                    <a:p>
+                      <a:pPr>
+                        <a:defRPr b="1" sz="1200">
+                          <a:solidFill>
+                            <a:srgbClr val="FFFFFF"/>
+                          </a:solidFill>
+                          <a:latin typeface="Calibri"/>
+                        </a:defRPr>
+                      </a:pPr>
+                      <a:r>
+                        <a:t>Low</a:t>
+                      </a:r>
+                    </a:p>
+                  </a:txBody>
+                  <a:tcPr>
+                    <a:solidFill>
+                      <a:srgbClr val="1B2A4A"/>
+                    </a:solidFill>
+                  </a:tcPr>
+                </a:tc>
+                <a:tc>
+                  <a:txBody>
+                    <a:bodyPr/>
+                    <a:lstStyle/>
+                    <a:p>
+                      <a:pPr>
+                        <a:defRPr b="1" sz="1200">
+                          <a:solidFill>
+                            <a:srgbClr val="FFFFFF"/>
+                          </a:solidFill>
+                          <a:latin typeface="Calibri"/>
+                        </a:defRPr>
+                      </a:pPr>
+                      <a:r>
+                        <a:t>Mid</a:t>
+                      </a:r>
+                    </a:p>
+                  </a:txBody>
+                  <a:tcPr>
+                    <a:solidFill>
+                      <a:srgbClr val="1B2A4A"/>
+                    </a:solidFill>
+                  </a:tcPr>
+                </a:tc>
+                <a:tc>
+                  <a:txBody>
+                    <a:bodyPr/>
+                    <a:lstStyle/>
+                    <a:p>
+                      <a:pPr>
+                        <a:defRPr b="1" sz="1200">
+                          <a:solidFill>
+                            <a:srgbClr val="FFFFFF"/>
+                          </a:solidFill>
+                          <a:latin typeface="Calibri"/>
+                        </a:defRPr>
+                      </a:pPr>
+                      <a:r>
+                        <a:t>High</a:t>
+                      </a:r>
+                    </a:p>
+                  </a:txBody>
+                  <a:tcPr>
+                    <a:solidFill>
+                      <a:srgbClr val="1B2A4A"/>
+                    </a:solidFill>
+                  </a:tcPr>
+                </a:tc>
+                <a:tc>
+                  <a:txBody>
+                    <a:bodyPr/>
+                    <a:lstStyle/>
+                    <a:p>
+                      <a:pPr>
+                        <a:defRPr b="1" sz="1200">
+                          <a:solidFill>
+                            <a:srgbClr val="FFFFFF"/>
+                          </a:solidFill>
+                          <a:latin typeface="Calibri"/>
+                        </a:defRPr>
+                      </a:pPr>
+                      <a:r>
+                        <a:t>Weight</a:t>
+                      </a:r>
+                    </a:p>
+                  </a:txBody>
+                  <a:tcPr>
+                    <a:solidFill>
+                      <a:srgbClr val="1B2A4A"/>
+                    </a:solidFill>
+                  </a:tcPr>
+                </a:tc>
+              </a:tr>
+              <a:tr h="1188720">
+                <a:tc>
+                  <a:txBody>
+                    <a:bodyPr/>
+                    <a:lstStyle/>
+                    <a:p>
+                      <a:pPr>
+                        <a:defRPr sz="1100">
+                          <a:solidFill>
+                            <a:srgbClr val="333333"/>
+                          </a:solidFill>
+                          <a:latin typeface="Calibri"/>
+                        </a:defRPr>
+                      </a:pPr>
+                      <a:r>
+                        <a:t>DCF</a:t>
+                      </a:r>
+                    </a:p>
+                  </a:txBody>
+                  <a:tcPr>
+                    <a:solidFill>
+                      <a:srgbClr val="FFFFFF"/>
+                    </a:solidFill>
+                  </a:tcPr>
+                </a:tc>
+                <a:tc>
+                  <a:txBody>
+                    <a:bodyPr/>
+                    <a:lstStyle/>
+                    <a:p>
+                      <a:pPr>
+                        <a:defRPr sz="1100">
+                          <a:solidFill>
+                            <a:srgbClr val="333333"/>
+                          </a:solidFill>
+                          <a:latin typeface="Calibri"/>
+                        </a:defRPr>
+                      </a:pPr>
+                      <a:r>
+                        <a:t>—</a:t>
+                      </a:r>
+                    </a:p>
+                  </a:txBody>
+                  <a:tcPr>
+                    <a:solidFill>
+                      <a:srgbClr val="FFFFFF"/>
+                    </a:solidFill>
+                  </a:tcPr>
+                </a:tc>
+                <a:tc>
+                  <a:txBody>
+                    <a:bodyPr/>
+                    <a:lstStyle/>
+                    <a:p>
+                      <a:pPr>
+                        <a:defRPr sz="1100">
+                          <a:solidFill>
+                            <a:srgbClr val="333333"/>
+                          </a:solidFill>
+                          <a:latin typeface="Calibri"/>
+                        </a:defRPr>
+                      </a:pPr>
+                      <a:r>
+                        <a:t>701.7</a:t>
+                      </a:r>
+                    </a:p>
+                  </a:txBody>
+                  <a:tcPr>
+                    <a:solidFill>
+                      <a:srgbClr val="FFFFFF"/>
+                    </a:solidFill>
+                  </a:tcPr>
+                </a:tc>
+                <a:tc>
+                  <a:txBody>
+                    <a:bodyPr/>
+                    <a:lstStyle/>
+                    <a:p>
+                      <a:pPr>
+                        <a:defRPr sz="1100">
+                          <a:solidFill>
+                            <a:srgbClr val="333333"/>
+                          </a:solidFill>
+                          <a:latin typeface="Calibri"/>
+                        </a:defRPr>
+                      </a:pPr>
+                      <a:r>
+                        <a:t>—</a:t>
+                      </a:r>
+                    </a:p>
+                  </a:txBody>
+                  <a:tcPr>
+                    <a:solidFill>
+                      <a:srgbClr val="FFFFFF"/>
+                    </a:solidFill>
+                  </a:tcPr>
+                </a:tc>
+                <a:tc>
+                  <a:txBody>
+                    <a:bodyPr/>
+                    <a:lstStyle/>
+                    <a:p>
+                      <a:pPr>
+                        <a:defRPr sz="1100">
+                          <a:solidFill>
+                            <a:srgbClr val="333333"/>
+                          </a:solidFill>
+                          <a:latin typeface="Calibri"/>
+                        </a:defRPr>
+                      </a:pPr>
+                      <a:r>
+                        <a:t>50%</a:t>
+                      </a:r>
+                    </a:p>
+                  </a:txBody>
+                  <a:tcPr>
+                    <a:solidFill>
+                      <a:srgbClr val="FFFFFF"/>
+                    </a:solidFill>
+                  </a:tcPr>
+                </a:tc>
+              </a:tr>
+              <a:tr h="1188720">
+                <a:tc>
+                  <a:txBody>
+                    <a:bodyPr/>
+                    <a:lstStyle/>
+                    <a:p>
+                      <a:pPr>
+                        <a:defRPr sz="1100">
+                          <a:solidFill>
+                            <a:srgbClr val="333333"/>
+                          </a:solidFill>
+                          <a:latin typeface="Calibri"/>
+                        </a:defRPr>
+                      </a:pPr>
+                      <a:r>
+                        <a:t>Trading Comps (EV_EBITDA)</a:t>
+                      </a:r>
+                    </a:p>
+                  </a:txBody>
+                  <a:tcPr>
+                    <a:solidFill>
+                      <a:srgbClr val="FAFAFA"/>
+                    </a:solidFill>
+                  </a:tcPr>
+                </a:tc>
+                <a:tc>
+                  <a:txBody>
+                    <a:bodyPr/>
+                    <a:lstStyle/>
+                    <a:p>
+                      <a:pPr>
+                        <a:defRPr sz="1100">
+                          <a:solidFill>
+                            <a:srgbClr val="333333"/>
+                          </a:solidFill>
+                          <a:latin typeface="Calibri"/>
+                        </a:defRPr>
+                      </a:pPr>
+                      <a:r>
+                        <a:t>1912.3</a:t>
+                      </a:r>
+                    </a:p>
+                  </a:txBody>
+                  <a:tcPr>
+                    <a:solidFill>
+                      <a:srgbClr val="FAFAFA"/>
+                    </a:solidFill>
+                  </a:tcPr>
+                </a:tc>
+                <a:tc>
+                  <a:txBody>
+                    <a:bodyPr/>
+                    <a:lstStyle/>
+                    <a:p>
+                      <a:pPr>
+                        <a:defRPr sz="1100">
+                          <a:solidFill>
+                            <a:srgbClr val="333333"/>
+                          </a:solidFill>
+                          <a:latin typeface="Calibri"/>
+                        </a:defRPr>
+                      </a:pPr>
+                      <a:r>
+                        <a:t>2323.1</a:t>
+                      </a:r>
+                    </a:p>
+                  </a:txBody>
+                  <a:tcPr>
+                    <a:solidFill>
+                      <a:srgbClr val="FAFAFA"/>
+                    </a:solidFill>
+                  </a:tcPr>
+                </a:tc>
+                <a:tc>
+                  <a:txBody>
+                    <a:bodyPr/>
+                    <a:lstStyle/>
+                    <a:p>
+                      <a:pPr>
+                        <a:defRPr sz="1100">
+                          <a:solidFill>
+                            <a:srgbClr val="333333"/>
+                          </a:solidFill>
+                          <a:latin typeface="Calibri"/>
+                        </a:defRPr>
+                      </a:pPr>
+                      <a:r>
+                        <a:t>2733.8</a:t>
+                      </a:r>
+                    </a:p>
+                  </a:txBody>
+                  <a:tcPr>
+                    <a:solidFill>
+                      <a:srgbClr val="FAFAFA"/>
+                    </a:solidFill>
+                  </a:tcPr>
+                </a:tc>
+                <a:tc>
+                  <a:txBody>
+                    <a:bodyPr/>
+                    <a:lstStyle/>
+                    <a:p>
+                      <a:pPr>
+                        <a:defRPr sz="1100">
+                          <a:solidFill>
+                            <a:srgbClr val="333333"/>
+                          </a:solidFill>
+                          <a:latin typeface="Calibri"/>
+                        </a:defRPr>
+                      </a:pPr>
+                      <a:r>
+                        <a:t>30%</a:t>
+                      </a:r>
+                    </a:p>
+                  </a:txBody>
+                  <a:tcPr>
+                    <a:solidFill>
+                      <a:srgbClr val="FAFAFA"/>
+                    </a:solidFill>
+                  </a:tcPr>
+                </a:tc>
+              </a:tr>
+              <a:tr h="1188720">
+                <a:tc>
+                  <a:txBody>
+                    <a:bodyPr/>
+                    <a:lstStyle/>
+                    <a:p>
+                      <a:pPr>
+                        <a:defRPr sz="1100">
+                          <a:solidFill>
+                            <a:srgbClr val="333333"/>
+                          </a:solidFill>
+                          <a:latin typeface="Calibri"/>
+                        </a:defRPr>
+                      </a:pPr>
+                      <a:r>
+                        <a:t>Transaction Comps</a:t>
+                      </a:r>
+                    </a:p>
+                  </a:txBody>
+                  <a:tcPr>
+                    <a:solidFill>
+                      <a:srgbClr val="FFFFFF"/>
+                    </a:solidFill>
+                  </a:tcPr>
+                </a:tc>
+                <a:tc>
+                  <a:txBody>
+                    <a:bodyPr/>
+                    <a:lstStyle/>
+                    <a:p>
+                      <a:pPr>
+                        <a:defRPr sz="1100">
+                          <a:solidFill>
+                            <a:srgbClr val="333333"/>
+                          </a:solidFill>
+                          <a:latin typeface="Calibri"/>
+                        </a:defRPr>
+                      </a:pPr>
+                      <a:r>
+                        <a:t>—</a:t>
+                      </a:r>
+                    </a:p>
+                  </a:txBody>
+                  <a:tcPr>
+                    <a:solidFill>
+                      <a:srgbClr val="FFFFFF"/>
+                    </a:solidFill>
+                  </a:tcPr>
+                </a:tc>
+                <a:tc>
+                  <a:txBody>
+                    <a:bodyPr/>
+                    <a:lstStyle/>
+                    <a:p>
+                      <a:pPr>
+                        <a:defRPr sz="1100">
+                          <a:solidFill>
+                            <a:srgbClr val="333333"/>
+                          </a:solidFill>
+                          <a:latin typeface="Calibri"/>
+                        </a:defRPr>
+                      </a:pPr>
+                      <a:r>
+                        <a:t>11819.8</a:t>
+                      </a:r>
+                    </a:p>
+                  </a:txBody>
+                  <a:tcPr>
+                    <a:solidFill>
+                      <a:srgbClr val="FFFFFF"/>
+                    </a:solidFill>
+                  </a:tcPr>
+                </a:tc>
+                <a:tc>
+                  <a:txBody>
+                    <a:bodyPr/>
+                    <a:lstStyle/>
+                    <a:p>
+                      <a:pPr>
+                        <a:defRPr sz="1100">
+                          <a:solidFill>
+                            <a:srgbClr val="333333"/>
+                          </a:solidFill>
+                          <a:latin typeface="Calibri"/>
+                        </a:defRPr>
+                      </a:pPr>
+                      <a:r>
+                        <a:t>—</a:t>
+                      </a:r>
+                    </a:p>
+                  </a:txBody>
+                  <a:tcPr>
+                    <a:solidFill>
+                      <a:srgbClr val="FFFFFF"/>
+                    </a:solidFill>
+                  </a:tcPr>
+                </a:tc>
+                <a:tc>
+                  <a:txBody>
+                    <a:bodyPr/>
+                    <a:lstStyle/>
+                    <a:p>
+                      <a:pPr>
+                        <a:defRPr sz="1100">
+                          <a:solidFill>
+                            <a:srgbClr val="333333"/>
+                          </a:solidFill>
+                          <a:latin typeface="Calibri"/>
+                        </a:defRPr>
+                      </a:pPr>
+                      <a:r>
+                        <a:t>20%</a:t>
+                      </a:r>
+                    </a:p>
+                  </a:txBody>
+                  <a:tcPr>
+                    <a:solidFill>
+                      <a:srgbClr val="FFFFFF"/>
+                    </a:solidFill>
+                  </a:tcPr>
+                </a:tc>
+              </a:tr>
+            </a:tbl>
+          </a:graphicData>
+        </a:graphic>
+      </p:graphicFrame>
     </p:spTree>
   </p:cSld>
   <p:clrMapOvr>
@@ -6496,7 +6114,7 @@
 </p:sld>
 </file>
 
-<file path=ppt/slides/slide7.xml><?xml version="1.0" encoding="utf-8"?>
+<file path=ppt/slides/slide6.xml><?xml version="1.0" encoding="utf-8"?>
 <p:sld xmlns:a="http://schemas.openxmlformats.org/drawingml/2006/main" xmlns:p="http://schemas.openxmlformats.org/presentationml/2006/main" xmlns:r="http://schemas.openxmlformats.org/officeDocument/2006/relationships">
   <p:cSld>
     <p:spTree>
@@ -6622,7 +6240,7 @@
                 </a:solidFill>
                 <a:latin typeface="Calibri"/>
               </a:rPr>
-              <a:t>Catalysts &amp; Risks</a:t>
+              <a:t>Valuation Football Field — Bear / Base / Bull</a:t>
             </a:r>
           </a:p>
         </p:txBody>
@@ -6635,8 +6253,8 @@
         </p:nvSpPr>
         <p:spPr>
           <a:xfrm>
-            <a:off x="685800" y="1645920"/>
-            <a:ext cx="5486400" cy="4754880"/>
+            <a:off x="685800" y="1188720"/>
+            <a:ext cx="11064240" cy="457200"/>
           </a:xfrm>
           <a:prstGeom prst="rect">
             <a:avLst/>
@@ -6656,7 +6274,655 @@
                 </a:solidFill>
                 <a:latin typeface="Calibri"/>
               </a:rPr>
-              <a:t>Catalysts</a:t>
+              <a:t>Scenario Analysis</a:t>
+            </a:r>
+          </a:p>
+        </p:txBody>
+      </p:sp>
+      <p:graphicFrame>
+        <p:nvGraphicFramePr>
+          <p:cNvPr id="6" name="Table 5"/>
+          <p:cNvGraphicFramePr>
+            <a:graphicFrameLocks noGrp="1"/>
+          </p:cNvGraphicFramePr>
+          <p:nvPr/>
+        </p:nvGraphicFramePr>
+        <p:xfrm>
+          <a:off x="685800" y="1645920"/>
+          <a:ext cx="11064240" cy="2743200"/>
+        </p:xfrm>
+        <a:graphic>
+          <a:graphicData uri="http://schemas.openxmlformats.org/drawingml/2006/table">
+            <a:tbl>
+              <a:tblPr firstRow="1" bandRow="1">
+                <a:tableStyleId>{5C22544A-7EE6-4342-B048-85BDC9FD1C3A}</a:tableStyleId>
+              </a:tblPr>
+              <a:tblGrid>
+                <a:gridCol w="1844040"/>
+                <a:gridCol w="1844040"/>
+                <a:gridCol w="1844040"/>
+                <a:gridCol w="1844040"/>
+                <a:gridCol w="1844040"/>
+                <a:gridCol w="1844040"/>
+              </a:tblGrid>
+              <a:tr h="685800">
+                <a:tc>
+                  <a:txBody>
+                    <a:bodyPr/>
+                    <a:lstStyle/>
+                    <a:p>
+                      <a:pPr>
+                        <a:defRPr b="1" sz="1200">
+                          <a:solidFill>
+                            <a:srgbClr val="FFFFFF"/>
+                          </a:solidFill>
+                          <a:latin typeface="Calibri"/>
+                        </a:defRPr>
+                      </a:pPr>
+                      <a:r>
+                        <a:t>Scenario</a:t>
+                      </a:r>
+                    </a:p>
+                  </a:txBody>
+                  <a:tcPr>
+                    <a:solidFill>
+                      <a:srgbClr val="1B2A4A"/>
+                    </a:solidFill>
+                  </a:tcPr>
+                </a:tc>
+                <a:tc>
+                  <a:txBody>
+                    <a:bodyPr/>
+                    <a:lstStyle/>
+                    <a:p>
+                      <a:pPr>
+                        <a:defRPr b="1" sz="1200">
+                          <a:solidFill>
+                            <a:srgbClr val="FFFFFF"/>
+                          </a:solidFill>
+                          <a:latin typeface="Calibri"/>
+                        </a:defRPr>
+                      </a:pPr>
+                      <a:r>
+                        <a:t>DCF EV</a:t>
+                      </a:r>
+                    </a:p>
+                  </a:txBody>
+                  <a:tcPr>
+                    <a:solidFill>
+                      <a:srgbClr val="1B2A4A"/>
+                    </a:solidFill>
+                  </a:tcPr>
+                </a:tc>
+                <a:tc>
+                  <a:txBody>
+                    <a:bodyPr/>
+                    <a:lstStyle/>
+                    <a:p>
+                      <a:pPr>
+                        <a:defRPr b="1" sz="1200">
+                          <a:solidFill>
+                            <a:srgbClr val="FFFFFF"/>
+                          </a:solidFill>
+                          <a:latin typeface="Calibri"/>
+                        </a:defRPr>
+                      </a:pPr>
+                      <a:r>
+                        <a:t>Comps EV</a:t>
+                      </a:r>
+                    </a:p>
+                  </a:txBody>
+                  <a:tcPr>
+                    <a:solidFill>
+                      <a:srgbClr val="1B2A4A"/>
+                    </a:solidFill>
+                  </a:tcPr>
+                </a:tc>
+                <a:tc>
+                  <a:txBody>
+                    <a:bodyPr/>
+                    <a:lstStyle/>
+                    <a:p>
+                      <a:pPr>
+                        <a:defRPr b="1" sz="1200">
+                          <a:solidFill>
+                            <a:srgbClr val="FFFFFF"/>
+                          </a:solidFill>
+                          <a:latin typeface="Calibri"/>
+                        </a:defRPr>
+                      </a:pPr>
+                      <a:r>
+                        <a:t>Blended EV</a:t>
+                      </a:r>
+                    </a:p>
+                  </a:txBody>
+                  <a:tcPr>
+                    <a:solidFill>
+                      <a:srgbClr val="1B2A4A"/>
+                    </a:solidFill>
+                  </a:tcPr>
+                </a:tc>
+                <a:tc>
+                  <a:txBody>
+                    <a:bodyPr/>
+                    <a:lstStyle/>
+                    <a:p>
+                      <a:pPr>
+                        <a:defRPr b="1" sz="1200">
+                          <a:solidFill>
+                            <a:srgbClr val="FFFFFF"/>
+                          </a:solidFill>
+                          <a:latin typeface="Calibri"/>
+                        </a:defRPr>
+                      </a:pPr>
+                      <a:r>
+                        <a:t>WACC</a:t>
+                      </a:r>
+                    </a:p>
+                  </a:txBody>
+                  <a:tcPr>
+                    <a:solidFill>
+                      <a:srgbClr val="1B2A4A"/>
+                    </a:solidFill>
+                  </a:tcPr>
+                </a:tc>
+                <a:tc>
+                  <a:txBody>
+                    <a:bodyPr/>
+                    <a:lstStyle/>
+                    <a:p>
+                      <a:pPr>
+                        <a:defRPr b="1" sz="1200">
+                          <a:solidFill>
+                            <a:srgbClr val="FFFFFF"/>
+                          </a:solidFill>
+                          <a:latin typeface="Calibri"/>
+                        </a:defRPr>
+                      </a:pPr>
+                      <a:r>
+                        <a:t>EBITDA Margin</a:t>
+                      </a:r>
+                    </a:p>
+                  </a:txBody>
+                  <a:tcPr>
+                    <a:solidFill>
+                      <a:srgbClr val="1B2A4A"/>
+                    </a:solidFill>
+                  </a:tcPr>
+                </a:tc>
+              </a:tr>
+              <a:tr h="685800">
+                <a:tc>
+                  <a:txBody>
+                    <a:bodyPr/>
+                    <a:lstStyle/>
+                    <a:p>
+                      <a:pPr>
+                        <a:defRPr sz="1100">
+                          <a:solidFill>
+                            <a:srgbClr val="333333"/>
+                          </a:solidFill>
+                          <a:latin typeface="Calibri"/>
+                        </a:defRPr>
+                      </a:pPr>
+                      <a:r>
+                        <a:t>Bear</a:t>
+                      </a:r>
+                    </a:p>
+                  </a:txBody>
+                  <a:tcPr>
+                    <a:solidFill>
+                      <a:srgbClr val="FFFFFF"/>
+                    </a:solidFill>
+                  </a:tcPr>
+                </a:tc>
+                <a:tc>
+                  <a:txBody>
+                    <a:bodyPr/>
+                    <a:lstStyle/>
+                    <a:p>
+                      <a:pPr>
+                        <a:defRPr sz="1100">
+                          <a:solidFill>
+                            <a:srgbClr val="333333"/>
+                          </a:solidFill>
+                          <a:latin typeface="Calibri"/>
+                        </a:defRPr>
+                      </a:pPr>
+                      <a:r>
+                        <a:t>$358M</a:t>
+                      </a:r>
+                    </a:p>
+                  </a:txBody>
+                  <a:tcPr>
+                    <a:solidFill>
+                      <a:srgbClr val="FFFFFF"/>
+                    </a:solidFill>
+                  </a:tcPr>
+                </a:tc>
+                <a:tc>
+                  <a:txBody>
+                    <a:bodyPr/>
+                    <a:lstStyle/>
+                    <a:p>
+                      <a:pPr>
+                        <a:defRPr sz="1100">
+                          <a:solidFill>
+                            <a:srgbClr val="333333"/>
+                          </a:solidFill>
+                          <a:latin typeface="Calibri"/>
+                        </a:defRPr>
+                      </a:pPr>
+                      <a:r>
+                        <a:t>$138.7B</a:t>
+                      </a:r>
+                    </a:p>
+                  </a:txBody>
+                  <a:tcPr>
+                    <a:solidFill>
+                      <a:srgbClr val="FFFFFF"/>
+                    </a:solidFill>
+                  </a:tcPr>
+                </a:tc>
+                <a:tc>
+                  <a:txBody>
+                    <a:bodyPr/>
+                    <a:lstStyle/>
+                    <a:p>
+                      <a:pPr>
+                        <a:defRPr sz="1100">
+                          <a:solidFill>
+                            <a:srgbClr val="333333"/>
+                          </a:solidFill>
+                          <a:latin typeface="Calibri"/>
+                        </a:defRPr>
+                      </a:pPr>
+                      <a:r>
+                        <a:t>$43.2B</a:t>
+                      </a:r>
+                    </a:p>
+                  </a:txBody>
+                  <a:tcPr>
+                    <a:solidFill>
+                      <a:srgbClr val="FFFFFF"/>
+                    </a:solidFill>
+                  </a:tcPr>
+                </a:tc>
+                <a:tc>
+                  <a:txBody>
+                    <a:bodyPr/>
+                    <a:lstStyle/>
+                    <a:p>
+                      <a:pPr>
+                        <a:defRPr sz="1100">
+                          <a:solidFill>
+                            <a:srgbClr val="333333"/>
+                          </a:solidFill>
+                          <a:latin typeface="Calibri"/>
+                        </a:defRPr>
+                      </a:pPr>
+                      <a:r>
+                        <a:t>11.5%</a:t>
+                      </a:r>
+                    </a:p>
+                  </a:txBody>
+                  <a:tcPr>
+                    <a:solidFill>
+                      <a:srgbClr val="FFFFFF"/>
+                    </a:solidFill>
+                  </a:tcPr>
+                </a:tc>
+                <a:tc>
+                  <a:txBody>
+                    <a:bodyPr/>
+                    <a:lstStyle/>
+                    <a:p>
+                      <a:pPr>
+                        <a:defRPr sz="1100">
+                          <a:solidFill>
+                            <a:srgbClr val="333333"/>
+                          </a:solidFill>
+                          <a:latin typeface="Calibri"/>
+                        </a:defRPr>
+                      </a:pPr>
+                      <a:r>
+                        <a:t>13.0%</a:t>
+                      </a:r>
+                    </a:p>
+                  </a:txBody>
+                  <a:tcPr>
+                    <a:solidFill>
+                      <a:srgbClr val="FFFFFF"/>
+                    </a:solidFill>
+                  </a:tcPr>
+                </a:tc>
+              </a:tr>
+              <a:tr h="685800">
+                <a:tc>
+                  <a:txBody>
+                    <a:bodyPr/>
+                    <a:lstStyle/>
+                    <a:p>
+                      <a:pPr>
+                        <a:defRPr sz="1100">
+                          <a:solidFill>
+                            <a:srgbClr val="333333"/>
+                          </a:solidFill>
+                          <a:latin typeface="Calibri"/>
+                        </a:defRPr>
+                      </a:pPr>
+                      <a:r>
+                        <a:t>Base</a:t>
+                      </a:r>
+                    </a:p>
+                  </a:txBody>
+                  <a:tcPr>
+                    <a:solidFill>
+                      <a:srgbClr val="FAFAFA"/>
+                    </a:solidFill>
+                  </a:tcPr>
+                </a:tc>
+                <a:tc>
+                  <a:txBody>
+                    <a:bodyPr/>
+                    <a:lstStyle/>
+                    <a:p>
+                      <a:pPr>
+                        <a:defRPr sz="1100">
+                          <a:solidFill>
+                            <a:srgbClr val="333333"/>
+                          </a:solidFill>
+                          <a:latin typeface="Calibri"/>
+                        </a:defRPr>
+                      </a:pPr>
+                      <a:r>
+                        <a:t>$669M</a:t>
+                      </a:r>
+                    </a:p>
+                  </a:txBody>
+                  <a:tcPr>
+                    <a:solidFill>
+                      <a:srgbClr val="FAFAFA"/>
+                    </a:solidFill>
+                  </a:tcPr>
+                </a:tc>
+                <a:tc>
+                  <a:txBody>
+                    <a:bodyPr/>
+                    <a:lstStyle/>
+                    <a:p>
+                      <a:pPr>
+                        <a:defRPr sz="1100">
+                          <a:solidFill>
+                            <a:srgbClr val="333333"/>
+                          </a:solidFill>
+                          <a:latin typeface="Calibri"/>
+                        </a:defRPr>
+                      </a:pPr>
+                      <a:r>
+                        <a:t>$261.8B</a:t>
+                      </a:r>
+                    </a:p>
+                  </a:txBody>
+                  <a:tcPr>
+                    <a:solidFill>
+                      <a:srgbClr val="FAFAFA"/>
+                    </a:solidFill>
+                  </a:tcPr>
+                </a:tc>
+                <a:tc>
+                  <a:txBody>
+                    <a:bodyPr/>
+                    <a:lstStyle/>
+                    <a:p>
+                      <a:pPr>
+                        <a:defRPr sz="1100">
+                          <a:solidFill>
+                            <a:srgbClr val="333333"/>
+                          </a:solidFill>
+                          <a:latin typeface="Calibri"/>
+                        </a:defRPr>
+                      </a:pPr>
+                      <a:r>
+                        <a:t>$81.1B</a:t>
+                      </a:r>
+                    </a:p>
+                  </a:txBody>
+                  <a:tcPr>
+                    <a:solidFill>
+                      <a:srgbClr val="FAFAFA"/>
+                    </a:solidFill>
+                  </a:tcPr>
+                </a:tc>
+                <a:tc>
+                  <a:txBody>
+                    <a:bodyPr/>
+                    <a:lstStyle/>
+                    <a:p>
+                      <a:pPr>
+                        <a:defRPr sz="1100">
+                          <a:solidFill>
+                            <a:srgbClr val="333333"/>
+                          </a:solidFill>
+                          <a:latin typeface="Calibri"/>
+                        </a:defRPr>
+                      </a:pPr>
+                      <a:r>
+                        <a:t>10.0%</a:t>
+                      </a:r>
+                    </a:p>
+                  </a:txBody>
+                  <a:tcPr>
+                    <a:solidFill>
+                      <a:srgbClr val="FAFAFA"/>
+                    </a:solidFill>
+                  </a:tcPr>
+                </a:tc>
+                <a:tc>
+                  <a:txBody>
+                    <a:bodyPr/>
+                    <a:lstStyle/>
+                    <a:p>
+                      <a:pPr>
+                        <a:defRPr sz="1100">
+                          <a:solidFill>
+                            <a:srgbClr val="333333"/>
+                          </a:solidFill>
+                          <a:latin typeface="Calibri"/>
+                        </a:defRPr>
+                      </a:pPr>
+                      <a:r>
+                        <a:t>15.0%</a:t>
+                      </a:r>
+                    </a:p>
+                  </a:txBody>
+                  <a:tcPr>
+                    <a:solidFill>
+                      <a:srgbClr val="FAFAFA"/>
+                    </a:solidFill>
+                  </a:tcPr>
+                </a:tc>
+              </a:tr>
+              <a:tr h="685800">
+                <a:tc>
+                  <a:txBody>
+                    <a:bodyPr/>
+                    <a:lstStyle/>
+                    <a:p>
+                      <a:pPr>
+                        <a:defRPr sz="1100">
+                          <a:solidFill>
+                            <a:srgbClr val="333333"/>
+                          </a:solidFill>
+                          <a:latin typeface="Calibri"/>
+                        </a:defRPr>
+                      </a:pPr>
+                      <a:r>
+                        <a:t>Bull</a:t>
+                      </a:r>
+                    </a:p>
+                  </a:txBody>
+                  <a:tcPr>
+                    <a:solidFill>
+                      <a:srgbClr val="FFFFFF"/>
+                    </a:solidFill>
+                  </a:tcPr>
+                </a:tc>
+                <a:tc>
+                  <a:txBody>
+                    <a:bodyPr/>
+                    <a:lstStyle/>
+                    <a:p>
+                      <a:pPr>
+                        <a:defRPr sz="1100">
+                          <a:solidFill>
+                            <a:srgbClr val="333333"/>
+                          </a:solidFill>
+                          <a:latin typeface="Calibri"/>
+                        </a:defRPr>
+                      </a:pPr>
+                      <a:r>
+                        <a:t>$1.2B</a:t>
+                      </a:r>
+                    </a:p>
+                  </a:txBody>
+                  <a:tcPr>
+                    <a:solidFill>
+                      <a:srgbClr val="FFFFFF"/>
+                    </a:solidFill>
+                  </a:tcPr>
+                </a:tc>
+                <a:tc>
+                  <a:txBody>
+                    <a:bodyPr/>
+                    <a:lstStyle/>
+                    <a:p>
+                      <a:pPr>
+                        <a:defRPr sz="1100">
+                          <a:solidFill>
+                            <a:srgbClr val="333333"/>
+                          </a:solidFill>
+                          <a:latin typeface="Calibri"/>
+                        </a:defRPr>
+                      </a:pPr>
+                      <a:r>
+                        <a:t>$459.7B</a:t>
+                      </a:r>
+                    </a:p>
+                  </a:txBody>
+                  <a:tcPr>
+                    <a:solidFill>
+                      <a:srgbClr val="FFFFFF"/>
+                    </a:solidFill>
+                  </a:tcPr>
+                </a:tc>
+                <a:tc>
+                  <a:txBody>
+                    <a:bodyPr/>
+                    <a:lstStyle/>
+                    <a:p>
+                      <a:pPr>
+                        <a:defRPr sz="1100">
+                          <a:solidFill>
+                            <a:srgbClr val="333333"/>
+                          </a:solidFill>
+                          <a:latin typeface="Calibri"/>
+                        </a:defRPr>
+                      </a:pPr>
+                      <a:r>
+                        <a:t>$142.0B</a:t>
+                      </a:r>
+                    </a:p>
+                  </a:txBody>
+                  <a:tcPr>
+                    <a:solidFill>
+                      <a:srgbClr val="FFFFFF"/>
+                    </a:solidFill>
+                  </a:tcPr>
+                </a:tc>
+                <a:tc>
+                  <a:txBody>
+                    <a:bodyPr/>
+                    <a:lstStyle/>
+                    <a:p>
+                      <a:pPr>
+                        <a:defRPr sz="1100">
+                          <a:solidFill>
+                            <a:srgbClr val="333333"/>
+                          </a:solidFill>
+                          <a:latin typeface="Calibri"/>
+                        </a:defRPr>
+                      </a:pPr>
+                      <a:r>
+                        <a:t>9.0%</a:t>
+                      </a:r>
+                    </a:p>
+                  </a:txBody>
+                  <a:tcPr>
+                    <a:solidFill>
+                      <a:srgbClr val="FFFFFF"/>
+                    </a:solidFill>
+                  </a:tcPr>
+                </a:tc>
+                <a:tc>
+                  <a:txBody>
+                    <a:bodyPr/>
+                    <a:lstStyle/>
+                    <a:p>
+                      <a:pPr>
+                        <a:defRPr sz="1100">
+                          <a:solidFill>
+                            <a:srgbClr val="333333"/>
+                          </a:solidFill>
+                          <a:latin typeface="Calibri"/>
+                        </a:defRPr>
+                      </a:pPr>
+                      <a:r>
+                        <a:t>17.0%</a:t>
+                      </a:r>
+                    </a:p>
+                  </a:txBody>
+                  <a:tcPr>
+                    <a:solidFill>
+                      <a:srgbClr val="FFFFFF"/>
+                    </a:solidFill>
+                  </a:tcPr>
+                </a:tc>
+              </a:tr>
+            </a:tbl>
+          </a:graphicData>
+        </a:graphic>
+      </p:graphicFrame>
+      <p:sp>
+        <p:nvSpPr>
+          <p:cNvPr id="7" name="TextBox 6"/>
+          <p:cNvSpPr txBox="1"/>
+          <p:nvPr/>
+        </p:nvSpPr>
+        <p:spPr>
+          <a:xfrm>
+            <a:off x="685800" y="4572000"/>
+            <a:ext cx="11155680" cy="2011680"/>
+          </a:xfrm>
+          <a:prstGeom prst="rect">
+            <a:avLst/>
+          </a:prstGeom>
+          <a:noFill/>
+        </p:spPr>
+        <p:txBody>
+          <a:bodyPr wrap="none">
+            <a:spAutoFit/>
+          </a:bodyPr>
+          <a:lstStyle/>
+          <a:p>
+            <a:r>
+              <a:rPr b="1" sz="2000">
+                <a:solidFill>
+                  <a:srgbClr val="333333"/>
+                </a:solidFill>
+                <a:latin typeface="Calibri"/>
+              </a:rPr>
+              <a:t>Ranges</a:t>
             </a:r>
           </a:p>
           <a:p>
@@ -6675,7 +6941,7 @@
               </a:defRPr>
             </a:pPr>
             <a:r>
-              <a:t>Q4 2024 earnings and full-year results, which will provide insight into the success of Longchamp’s U.S. and China expansion efforts and the performance of its non-leather goods categories</a:t>
+              <a:t>DCF range:     $358M — $1.2B</a:t>
             </a:r>
           </a:p>
           <a:p>
@@ -6694,7 +6960,7 @@
               </a:defRPr>
             </a:pPr>
             <a:r>
-              <a:t>Launch of a new ready-to-wear or footwear collection, which could signal the brand’s ability to diversify beyond its core leather goods segment and attract a broader customer base</a:t>
+              <a:t>Comps range:   $138.7B — $459.7B</a:t>
             </a:r>
           </a:p>
           <a:p>
@@ -6713,21 +6979,125 @@
               </a:defRPr>
             </a:pPr>
             <a:r>
-              <a:t>Strategic retail partnerships or flagship store openings in key markets (e.g., New York, Shanghai), which could serve as a catalyst for accelerated international growth and brand visibility</a:t>
-            </a:r>
-          </a:p>
-        </p:txBody>
-      </p:sp>
-      <p:sp>
-        <p:nvSpPr>
-          <p:cNvPr id="6" name="TextBox 5"/>
+              <a:t>Blended range: $43.2B — $142.0B</a:t>
+            </a:r>
+          </a:p>
+        </p:txBody>
+      </p:sp>
+    </p:spTree>
+  </p:cSld>
+  <p:clrMapOvr>
+    <a:masterClrMapping/>
+  </p:clrMapOvr>
+</p:sld>
+</file>
+
+<file path=ppt/slides/slide7.xml><?xml version="1.0" encoding="utf-8"?>
+<p:sld xmlns:a="http://schemas.openxmlformats.org/drawingml/2006/main" xmlns:p="http://schemas.openxmlformats.org/presentationml/2006/main" xmlns:r="http://schemas.openxmlformats.org/officeDocument/2006/relationships">
+  <p:cSld>
+    <p:spTree>
+      <p:nvGrpSpPr>
+        <p:cNvPr id="1" name=""/>
+        <p:cNvGrpSpPr/>
+        <p:nvPr/>
+      </p:nvGrpSpPr>
+      <p:grpSpPr/>
+      <p:sp>
+        <p:nvSpPr>
+          <p:cNvPr id="2" name="Rectangle 1"/>
+          <p:cNvSpPr/>
+          <p:nvPr/>
+        </p:nvSpPr>
+        <p:spPr>
+          <a:xfrm>
+            <a:off x="0" y="0"/>
+            <a:ext cx="12191695" cy="6858000"/>
+          </a:xfrm>
+          <a:prstGeom prst="rect">
+            <a:avLst/>
+          </a:prstGeom>
+          <a:solidFill>
+            <a:srgbClr val="F5F7FA"/>
+          </a:solidFill>
+          <a:ln>
+            <a:noFill/>
+          </a:ln>
+        </p:spPr>
+        <p:style>
+          <a:lnRef idx="1">
+            <a:schemeClr val="accent1"/>
+          </a:lnRef>
+          <a:fillRef idx="3">
+            <a:schemeClr val="accent1"/>
+          </a:fillRef>
+          <a:effectRef idx="2">
+            <a:schemeClr val="accent1"/>
+          </a:effectRef>
+          <a:fontRef idx="minor">
+            <a:schemeClr val="lt1"/>
+          </a:fontRef>
+        </p:style>
+        <p:txBody>
+          <a:bodyPr rtlCol="0" anchor="ctr"/>
+          <a:lstStyle/>
+          <a:p>
+            <a:pPr algn="ctr"/>
+          </a:p>
+        </p:txBody>
+      </p:sp>
+      <p:sp>
+        <p:nvSpPr>
+          <p:cNvPr id="3" name="Rectangle 2"/>
+          <p:cNvSpPr/>
+          <p:nvPr/>
+        </p:nvSpPr>
+        <p:spPr>
+          <a:xfrm>
+            <a:off x="0" y="0"/>
+            <a:ext cx="12191695" cy="502920"/>
+          </a:xfrm>
+          <a:prstGeom prst="rect">
+            <a:avLst/>
+          </a:prstGeom>
+          <a:solidFill>
+            <a:srgbClr val="1B2A4A"/>
+          </a:solidFill>
+          <a:ln>
+            <a:noFill/>
+          </a:ln>
+        </p:spPr>
+        <p:style>
+          <a:lnRef idx="1">
+            <a:schemeClr val="accent1"/>
+          </a:lnRef>
+          <a:fillRef idx="3">
+            <a:schemeClr val="accent1"/>
+          </a:fillRef>
+          <a:effectRef idx="2">
+            <a:schemeClr val="accent1"/>
+          </a:effectRef>
+          <a:fontRef idx="minor">
+            <a:schemeClr val="lt1"/>
+          </a:fontRef>
+        </p:style>
+        <p:txBody>
+          <a:bodyPr rtlCol="0" anchor="ctr"/>
+          <a:lstStyle/>
+          <a:p>
+            <a:pPr algn="ctr"/>
+          </a:p>
+        </p:txBody>
+      </p:sp>
+      <p:sp>
+        <p:nvSpPr>
+          <p:cNvPr id="4" name="TextBox 3"/>
           <p:cNvSpPr txBox="1"/>
           <p:nvPr/>
         </p:nvSpPr>
         <p:spPr>
           <a:xfrm>
-            <a:off x="6400800" y="1645920"/>
-            <a:ext cx="5486400" cy="4754880"/>
+            <a:off x="685800" y="109728"/>
+            <a:ext cx="10972800" cy="548640"/>
           </a:xfrm>
           <a:prstGeom prst="rect">
             <a:avLst/>
@@ -6740,6 +7110,76 @@
           </a:bodyPr>
           <a:lstStyle/>
           <a:p>
+            <a:pPr algn="l"/>
+            <a:r>
+              <a:rPr b="1" sz="2200">
+                <a:solidFill>
+                  <a:srgbClr val="FFFFFF"/>
+                </a:solidFill>
+                <a:latin typeface="Calibri"/>
+              </a:rPr>
+              <a:t>Peer Comparables</a:t>
+            </a:r>
+          </a:p>
+        </p:txBody>
+      </p:sp>
+      <p:sp>
+        <p:nvSpPr>
+          <p:cNvPr id="5" name="TextBox 4"/>
+          <p:cNvSpPr txBox="1"/>
+          <p:nvPr/>
+        </p:nvSpPr>
+        <p:spPr>
+          <a:xfrm>
+            <a:off x="685800" y="566928"/>
+            <a:ext cx="10972800" cy="320040"/>
+          </a:xfrm>
+          <a:prstGeom prst="rect">
+            <a:avLst/>
+          </a:prstGeom>
+          <a:noFill/>
+        </p:spPr>
+        <p:txBody>
+          <a:bodyPr wrap="none">
+            <a:spAutoFit/>
+          </a:bodyPr>
+          <a:lstStyle/>
+          <a:p>
+            <a:pPr algn="l"/>
+            <a:r>
+              <a:rPr b="0" sz="1200">
+                <a:solidFill>
+                  <a:srgbClr val="666666"/>
+                </a:solidFill>
+                <a:latin typeface="Calibri"/>
+              </a:rPr>
+              <a:t>6 listed peers — real market data via yfinance</a:t>
+            </a:r>
+          </a:p>
+        </p:txBody>
+      </p:sp>
+      <p:sp>
+        <p:nvSpPr>
+          <p:cNvPr id="6" name="TextBox 5"/>
+          <p:cNvSpPr txBox="1"/>
+          <p:nvPr/>
+        </p:nvSpPr>
+        <p:spPr>
+          <a:xfrm>
+            <a:off x="685800" y="1188720"/>
+            <a:ext cx="11064240" cy="457200"/>
+          </a:xfrm>
+          <a:prstGeom prst="rect">
+            <a:avLst/>
+          </a:prstGeom>
+          <a:noFill/>
+        </p:spPr>
+        <p:txBody>
+          <a:bodyPr wrap="none">
+            <a:spAutoFit/>
+          </a:bodyPr>
+          <a:lstStyle/>
+          <a:p>
             <a:r>
               <a:rPr b="1" sz="2000">
                 <a:solidFill>
@@ -6747,7 +7187,1873 @@
                 </a:solidFill>
                 <a:latin typeface="Calibri"/>
               </a:rPr>
-              <a:t>Key Risks</a:t>
+              <a:t>Trading Comps</a:t>
+            </a:r>
+          </a:p>
+        </p:txBody>
+      </p:sp>
+      <p:graphicFrame>
+        <p:nvGraphicFramePr>
+          <p:cNvPr id="7" name="Table 6"/>
+          <p:cNvGraphicFramePr>
+            <a:graphicFrameLocks noGrp="1"/>
+          </p:cNvGraphicFramePr>
+          <p:nvPr/>
+        </p:nvGraphicFramePr>
+        <p:xfrm>
+          <a:off x="685800" y="1645920"/>
+          <a:ext cx="11064240" cy="4846320"/>
+        </p:xfrm>
+        <a:graphic>
+          <a:graphicData uri="http://schemas.openxmlformats.org/drawingml/2006/table">
+            <a:tbl>
+              <a:tblPr firstRow="1" bandRow="1">
+                <a:tableStyleId>{5C22544A-7EE6-4342-B048-85BDC9FD1C3A}</a:tableStyleId>
+              </a:tblPr>
+              <a:tblGrid>
+                <a:gridCol w="1844040"/>
+                <a:gridCol w="1844040"/>
+                <a:gridCol w="1844040"/>
+                <a:gridCol w="1844040"/>
+                <a:gridCol w="1844040"/>
+                <a:gridCol w="1844040"/>
+              </a:tblGrid>
+              <a:tr h="605790">
+                <a:tc>
+                  <a:txBody>
+                    <a:bodyPr/>
+                    <a:lstStyle/>
+                    <a:p>
+                      <a:pPr>
+                        <a:defRPr b="1" sz="1200">
+                          <a:solidFill>
+                            <a:srgbClr val="FFFFFF"/>
+                          </a:solidFill>
+                          <a:latin typeface="Calibri"/>
+                        </a:defRPr>
+                      </a:pPr>
+                      <a:r>
+                        <a:t>Company</a:t>
+                      </a:r>
+                    </a:p>
+                  </a:txBody>
+                  <a:tcPr>
+                    <a:solidFill>
+                      <a:srgbClr val="1B2A4A"/>
+                    </a:solidFill>
+                  </a:tcPr>
+                </a:tc>
+                <a:tc>
+                  <a:txBody>
+                    <a:bodyPr/>
+                    <a:lstStyle/>
+                    <a:p>
+                      <a:pPr>
+                        <a:defRPr b="1" sz="1200">
+                          <a:solidFill>
+                            <a:srgbClr val="FFFFFF"/>
+                          </a:solidFill>
+                          <a:latin typeface="Calibri"/>
+                        </a:defRPr>
+                      </a:pPr>
+                      <a:r>
+                        <a:t>Ticker</a:t>
+                      </a:r>
+                    </a:p>
+                  </a:txBody>
+                  <a:tcPr>
+                    <a:solidFill>
+                      <a:srgbClr val="1B2A4A"/>
+                    </a:solidFill>
+                  </a:tcPr>
+                </a:tc>
+                <a:tc>
+                  <a:txBody>
+                    <a:bodyPr/>
+                    <a:lstStyle/>
+                    <a:p>
+                      <a:pPr>
+                        <a:defRPr b="1" sz="1200">
+                          <a:solidFill>
+                            <a:srgbClr val="FFFFFF"/>
+                          </a:solidFill>
+                          <a:latin typeface="Calibri"/>
+                        </a:defRPr>
+                      </a:pPr>
+                      <a:r>
+                        <a:t>EV/EBITDA</a:t>
+                      </a:r>
+                    </a:p>
+                  </a:txBody>
+                  <a:tcPr>
+                    <a:solidFill>
+                      <a:srgbClr val="1B2A4A"/>
+                    </a:solidFill>
+                  </a:tcPr>
+                </a:tc>
+                <a:tc>
+                  <a:txBody>
+                    <a:bodyPr/>
+                    <a:lstStyle/>
+                    <a:p>
+                      <a:pPr>
+                        <a:defRPr b="1" sz="1200">
+                          <a:solidFill>
+                            <a:srgbClr val="FFFFFF"/>
+                          </a:solidFill>
+                          <a:latin typeface="Calibri"/>
+                        </a:defRPr>
+                      </a:pPr>
+                      <a:r>
+                        <a:t>EV/Revenue</a:t>
+                      </a:r>
+                    </a:p>
+                  </a:txBody>
+                  <a:tcPr>
+                    <a:solidFill>
+                      <a:srgbClr val="1B2A4A"/>
+                    </a:solidFill>
+                  </a:tcPr>
+                </a:tc>
+                <a:tc>
+                  <a:txBody>
+                    <a:bodyPr/>
+                    <a:lstStyle/>
+                    <a:p>
+                      <a:pPr>
+                        <a:defRPr b="1" sz="1200">
+                          <a:solidFill>
+                            <a:srgbClr val="FFFFFF"/>
+                          </a:solidFill>
+                          <a:latin typeface="Calibri"/>
+                        </a:defRPr>
+                      </a:pPr>
+                      <a:r>
+                        <a:t>EBITDA Margin</a:t>
+                      </a:r>
+                    </a:p>
+                  </a:txBody>
+                  <a:tcPr>
+                    <a:solidFill>
+                      <a:srgbClr val="1B2A4A"/>
+                    </a:solidFill>
+                  </a:tcPr>
+                </a:tc>
+                <a:tc>
+                  <a:txBody>
+                    <a:bodyPr/>
+                    <a:lstStyle/>
+                    <a:p>
+                      <a:pPr>
+                        <a:defRPr b="1" sz="1200">
+                          <a:solidFill>
+                            <a:srgbClr val="FFFFFF"/>
+                          </a:solidFill>
+                          <a:latin typeface="Calibri"/>
+                        </a:defRPr>
+                      </a:pPr>
+                      <a:r>
+                        <a:t>Rev Growth</a:t>
+                      </a:r>
+                    </a:p>
+                  </a:txBody>
+                  <a:tcPr>
+                    <a:solidFill>
+                      <a:srgbClr val="1B2A4A"/>
+                    </a:solidFill>
+                  </a:tcPr>
+                </a:tc>
+              </a:tr>
+              <a:tr h="605790">
+                <a:tc>
+                  <a:txBody>
+                    <a:bodyPr/>
+                    <a:lstStyle/>
+                    <a:p>
+                      <a:pPr>
+                        <a:defRPr sz="1100">
+                          <a:solidFill>
+                            <a:srgbClr val="333333"/>
+                          </a:solidFill>
+                          <a:latin typeface="Calibri"/>
+                        </a:defRPr>
+                      </a:pPr>
+                      <a:r>
+                        <a:t>Hermès International Société en commandite par actions</a:t>
+                      </a:r>
+                    </a:p>
+                  </a:txBody>
+                  <a:tcPr>
+                    <a:solidFill>
+                      <a:srgbClr val="FFFFFF"/>
+                    </a:solidFill>
+                  </a:tcPr>
+                </a:tc>
+                <a:tc>
+                  <a:txBody>
+                    <a:bodyPr/>
+                    <a:lstStyle/>
+                    <a:p>
+                      <a:pPr>
+                        <a:defRPr sz="1100">
+                          <a:solidFill>
+                            <a:srgbClr val="333333"/>
+                          </a:solidFill>
+                          <a:latin typeface="Calibri"/>
+                        </a:defRPr>
+                      </a:pPr>
+                      <a:r>
+                        <a:t>RMS.PA</a:t>
+                      </a:r>
+                    </a:p>
+                  </a:txBody>
+                  <a:tcPr>
+                    <a:solidFill>
+                      <a:srgbClr val="FFFFFF"/>
+                    </a:solidFill>
+                  </a:tcPr>
+                </a:tc>
+                <a:tc>
+                  <a:txBody>
+                    <a:bodyPr/>
+                    <a:lstStyle/>
+                    <a:p>
+                      <a:pPr>
+                        <a:defRPr sz="1100">
+                          <a:solidFill>
+                            <a:srgbClr val="333333"/>
+                          </a:solidFill>
+                          <a:latin typeface="Calibri"/>
+                        </a:defRPr>
+                      </a:pPr>
+                      <a:r>
+                        <a:t>23.1x</a:t>
+                      </a:r>
+                    </a:p>
+                  </a:txBody>
+                  <a:tcPr>
+                    <a:solidFill>
+                      <a:srgbClr val="FFFFFF"/>
+                    </a:solidFill>
+                  </a:tcPr>
+                </a:tc>
+                <a:tc>
+                  <a:txBody>
+                    <a:bodyPr/>
+                    <a:lstStyle/>
+                    <a:p>
+                      <a:pPr>
+                        <a:defRPr sz="1100">
+                          <a:solidFill>
+                            <a:srgbClr val="333333"/>
+                          </a:solidFill>
+                          <a:latin typeface="Calibri"/>
+                        </a:defRPr>
+                      </a:pPr>
+                      <a:r>
+                        <a:t>10.2x</a:t>
+                      </a:r>
+                    </a:p>
+                  </a:txBody>
+                  <a:tcPr>
+                    <a:solidFill>
+                      <a:srgbClr val="FFFFFF"/>
+                    </a:solidFill>
+                  </a:tcPr>
+                </a:tc>
+                <a:tc>
+                  <a:txBody>
+                    <a:bodyPr/>
+                    <a:lstStyle/>
+                    <a:p>
+                      <a:pPr>
+                        <a:defRPr sz="1100">
+                          <a:solidFill>
+                            <a:srgbClr val="333333"/>
+                          </a:solidFill>
+                          <a:latin typeface="Calibri"/>
+                        </a:defRPr>
+                      </a:pPr>
+                      <a:r>
+                        <a:t>44.0%</a:t>
+                      </a:r>
+                    </a:p>
+                  </a:txBody>
+                  <a:tcPr>
+                    <a:solidFill>
+                      <a:srgbClr val="FFFFFF"/>
+                    </a:solidFill>
+                  </a:tcPr>
+                </a:tc>
+                <a:tc>
+                  <a:txBody>
+                    <a:bodyPr/>
+                    <a:lstStyle/>
+                    <a:p>
+                      <a:pPr>
+                        <a:defRPr sz="1100">
+                          <a:solidFill>
+                            <a:srgbClr val="333333"/>
+                          </a:solidFill>
+                          <a:latin typeface="Calibri"/>
+                        </a:defRPr>
+                      </a:pPr>
+                      <a:r>
+                        <a:t>+1.8%</a:t>
+                      </a:r>
+                    </a:p>
+                  </a:txBody>
+                  <a:tcPr>
+                    <a:solidFill>
+                      <a:srgbClr val="FFFFFF"/>
+                    </a:solidFill>
+                  </a:tcPr>
+                </a:tc>
+              </a:tr>
+              <a:tr h="605790">
+                <a:tc>
+                  <a:txBody>
+                    <a:bodyPr/>
+                    <a:lstStyle/>
+                    <a:p>
+                      <a:pPr>
+                        <a:defRPr sz="1100">
+                          <a:solidFill>
+                            <a:srgbClr val="333333"/>
+                          </a:solidFill>
+                          <a:latin typeface="Calibri"/>
+                        </a:defRPr>
+                      </a:pPr>
+                      <a:r>
+                        <a:t>LVMH Moët Hennessy - Louis Vuitton, Société Européenne</a:t>
+                      </a:r>
+                    </a:p>
+                  </a:txBody>
+                  <a:tcPr>
+                    <a:solidFill>
+                      <a:srgbClr val="FAFAFA"/>
+                    </a:solidFill>
+                  </a:tcPr>
+                </a:tc>
+                <a:tc>
+                  <a:txBody>
+                    <a:bodyPr/>
+                    <a:lstStyle/>
+                    <a:p>
+                      <a:pPr>
+                        <a:defRPr sz="1100">
+                          <a:solidFill>
+                            <a:srgbClr val="333333"/>
+                          </a:solidFill>
+                          <a:latin typeface="Calibri"/>
+                        </a:defRPr>
+                      </a:pPr>
+                      <a:r>
+                        <a:t>MC.PA</a:t>
+                      </a:r>
+                    </a:p>
+                  </a:txBody>
+                  <a:tcPr>
+                    <a:solidFill>
+                      <a:srgbClr val="FAFAFA"/>
+                    </a:solidFill>
+                  </a:tcPr>
+                </a:tc>
+                <a:tc>
+                  <a:txBody>
+                    <a:bodyPr/>
+                    <a:lstStyle/>
+                    <a:p>
+                      <a:pPr>
+                        <a:defRPr sz="1100">
+                          <a:solidFill>
+                            <a:srgbClr val="333333"/>
+                          </a:solidFill>
+                          <a:latin typeface="Calibri"/>
+                        </a:defRPr>
+                      </a:pPr>
+                      <a:r>
+                        <a:t>12.6x</a:t>
+                      </a:r>
+                    </a:p>
+                  </a:txBody>
+                  <a:tcPr>
+                    <a:solidFill>
+                      <a:srgbClr val="FAFAFA"/>
+                    </a:solidFill>
+                  </a:tcPr>
+                </a:tc>
+                <a:tc>
+                  <a:txBody>
+                    <a:bodyPr/>
+                    <a:lstStyle/>
+                    <a:p>
+                      <a:pPr>
+                        <a:defRPr sz="1100">
+                          <a:solidFill>
+                            <a:srgbClr val="333333"/>
+                          </a:solidFill>
+                          <a:latin typeface="Calibri"/>
+                        </a:defRPr>
+                      </a:pPr>
+                      <a:r>
+                        <a:t>3.2x</a:t>
+                      </a:r>
+                    </a:p>
+                  </a:txBody>
+                  <a:tcPr>
+                    <a:solidFill>
+                      <a:srgbClr val="FAFAFA"/>
+                    </a:solidFill>
+                  </a:tcPr>
+                </a:tc>
+                <a:tc>
+                  <a:txBody>
+                    <a:bodyPr/>
+                    <a:lstStyle/>
+                    <a:p>
+                      <a:pPr>
+                        <a:defRPr sz="1100">
+                          <a:solidFill>
+                            <a:srgbClr val="333333"/>
+                          </a:solidFill>
+                          <a:latin typeface="Calibri"/>
+                        </a:defRPr>
+                      </a:pPr>
+                      <a:r>
+                        <a:t>25.5%</a:t>
+                      </a:r>
+                    </a:p>
+                  </a:txBody>
+                  <a:tcPr>
+                    <a:solidFill>
+                      <a:srgbClr val="FAFAFA"/>
+                    </a:solidFill>
+                  </a:tcPr>
+                </a:tc>
+                <a:tc>
+                  <a:txBody>
+                    <a:bodyPr/>
+                    <a:lstStyle/>
+                    <a:p>
+                      <a:pPr>
+                        <a:defRPr sz="1100">
+                          <a:solidFill>
+                            <a:srgbClr val="333333"/>
+                          </a:solidFill>
+                          <a:latin typeface="Calibri"/>
+                        </a:defRPr>
+                      </a:pPr>
+                      <a:r>
+                        <a:t>-1.4%</a:t>
+                      </a:r>
+                    </a:p>
+                  </a:txBody>
+                  <a:tcPr>
+                    <a:solidFill>
+                      <a:srgbClr val="FAFAFA"/>
+                    </a:solidFill>
+                  </a:tcPr>
+                </a:tc>
+              </a:tr>
+              <a:tr h="605790">
+                <a:tc>
+                  <a:txBody>
+                    <a:bodyPr/>
+                    <a:lstStyle/>
+                    <a:p>
+                      <a:pPr>
+                        <a:defRPr sz="1100">
+                          <a:solidFill>
+                            <a:srgbClr val="333333"/>
+                          </a:solidFill>
+                          <a:latin typeface="Calibri"/>
+                        </a:defRPr>
+                      </a:pPr>
+                      <a:r>
+                        <a:t>Kering SA</a:t>
+                      </a:r>
+                    </a:p>
+                  </a:txBody>
+                  <a:tcPr>
+                    <a:solidFill>
+                      <a:srgbClr val="FFFFFF"/>
+                    </a:solidFill>
+                  </a:tcPr>
+                </a:tc>
+                <a:tc>
+                  <a:txBody>
+                    <a:bodyPr/>
+                    <a:lstStyle/>
+                    <a:p>
+                      <a:pPr>
+                        <a:defRPr sz="1100">
+                          <a:solidFill>
+                            <a:srgbClr val="333333"/>
+                          </a:solidFill>
+                          <a:latin typeface="Calibri"/>
+                        </a:defRPr>
+                      </a:pPr>
+                      <a:r>
+                        <a:t>KER.PA</a:t>
+                      </a:r>
+                    </a:p>
+                  </a:txBody>
+                  <a:tcPr>
+                    <a:solidFill>
+                      <a:srgbClr val="FFFFFF"/>
+                    </a:solidFill>
+                  </a:tcPr>
+                </a:tc>
+                <a:tc>
+                  <a:txBody>
+                    <a:bodyPr/>
+                    <a:lstStyle/>
+                    <a:p>
+                      <a:pPr>
+                        <a:defRPr sz="1100">
+                          <a:solidFill>
+                            <a:srgbClr val="333333"/>
+                          </a:solidFill>
+                          <a:latin typeface="Calibri"/>
+                        </a:defRPr>
+                      </a:pPr>
+                      <a:r>
+                        <a:t>17.5x</a:t>
+                      </a:r>
+                    </a:p>
+                  </a:txBody>
+                  <a:tcPr>
+                    <a:solidFill>
+                      <a:srgbClr val="FFFFFF"/>
+                    </a:solidFill>
+                  </a:tcPr>
+                </a:tc>
+                <a:tc>
+                  <a:txBody>
+                    <a:bodyPr/>
+                    <a:lstStyle/>
+                    <a:p>
+                      <a:pPr>
+                        <a:defRPr sz="1100">
+                          <a:solidFill>
+                            <a:srgbClr val="333333"/>
+                          </a:solidFill>
+                          <a:latin typeface="Calibri"/>
+                        </a:defRPr>
+                      </a:pPr>
+                      <a:r>
+                        <a:t>3.0x</a:t>
+                      </a:r>
+                    </a:p>
+                  </a:txBody>
+                  <a:tcPr>
+                    <a:solidFill>
+                      <a:srgbClr val="FFFFFF"/>
+                    </a:solidFill>
+                  </a:tcPr>
+                </a:tc>
+                <a:tc>
+                  <a:txBody>
+                    <a:bodyPr/>
+                    <a:lstStyle/>
+                    <a:p>
+                      <a:pPr>
+                        <a:defRPr sz="1100">
+                          <a:solidFill>
+                            <a:srgbClr val="333333"/>
+                          </a:solidFill>
+                          <a:latin typeface="Calibri"/>
+                        </a:defRPr>
+                      </a:pPr>
+                      <a:r>
+                        <a:t>17.3%</a:t>
+                      </a:r>
+                    </a:p>
+                  </a:txBody>
+                  <a:tcPr>
+                    <a:solidFill>
+                      <a:srgbClr val="FFFFFF"/>
+                    </a:solidFill>
+                  </a:tcPr>
+                </a:tc>
+                <a:tc>
+                  <a:txBody>
+                    <a:bodyPr/>
+                    <a:lstStyle/>
+                    <a:p>
+                      <a:pPr>
+                        <a:defRPr sz="1100">
+                          <a:solidFill>
+                            <a:srgbClr val="333333"/>
+                          </a:solidFill>
+                          <a:latin typeface="Calibri"/>
+                        </a:defRPr>
+                      </a:pPr>
+                      <a:r>
+                        <a:t>—</a:t>
+                      </a:r>
+                    </a:p>
+                  </a:txBody>
+                  <a:tcPr>
+                    <a:solidFill>
+                      <a:srgbClr val="FFFFFF"/>
+                    </a:solidFill>
+                  </a:tcPr>
+                </a:tc>
+              </a:tr>
+              <a:tr h="605790">
+                <a:tc>
+                  <a:txBody>
+                    <a:bodyPr/>
+                    <a:lstStyle/>
+                    <a:p>
+                      <a:pPr>
+                        <a:defRPr sz="1100">
+                          <a:solidFill>
+                            <a:srgbClr val="333333"/>
+                          </a:solidFill>
+                          <a:latin typeface="Calibri"/>
+                        </a:defRPr>
+                      </a:pPr>
+                      <a:r>
+                        <a:t>Compagnie Financière Richemont SA</a:t>
+                      </a:r>
+                    </a:p>
+                  </a:txBody>
+                  <a:tcPr>
+                    <a:solidFill>
+                      <a:srgbClr val="FAFAFA"/>
+                    </a:solidFill>
+                  </a:tcPr>
+                </a:tc>
+                <a:tc>
+                  <a:txBody>
+                    <a:bodyPr/>
+                    <a:lstStyle/>
+                    <a:p>
+                      <a:pPr>
+                        <a:defRPr sz="1100">
+                          <a:solidFill>
+                            <a:srgbClr val="333333"/>
+                          </a:solidFill>
+                          <a:latin typeface="Calibri"/>
+                        </a:defRPr>
+                      </a:pPr>
+                      <a:r>
+                        <a:t>CFR.SW</a:t>
+                      </a:r>
+                    </a:p>
+                  </a:txBody>
+                  <a:tcPr>
+                    <a:solidFill>
+                      <a:srgbClr val="FAFAFA"/>
+                    </a:solidFill>
+                  </a:tcPr>
+                </a:tc>
+                <a:tc>
+                  <a:txBody>
+                    <a:bodyPr/>
+                    <a:lstStyle/>
+                    <a:p>
+                      <a:pPr>
+                        <a:defRPr sz="1100">
+                          <a:solidFill>
+                            <a:srgbClr val="333333"/>
+                          </a:solidFill>
+                          <a:latin typeface="Calibri"/>
+                        </a:defRPr>
+                      </a:pPr>
+                      <a:r>
+                        <a:t>16.2x</a:t>
+                      </a:r>
+                    </a:p>
+                  </a:txBody>
+                  <a:tcPr>
+                    <a:solidFill>
+                      <a:srgbClr val="FAFAFA"/>
+                    </a:solidFill>
+                  </a:tcPr>
+                </a:tc>
+                <a:tc>
+                  <a:txBody>
+                    <a:bodyPr/>
+                    <a:lstStyle/>
+                    <a:p>
+                      <a:pPr>
+                        <a:defRPr sz="1100">
+                          <a:solidFill>
+                            <a:srgbClr val="333333"/>
+                          </a:solidFill>
+                          <a:latin typeface="Calibri"/>
+                        </a:defRPr>
+                      </a:pPr>
+                      <a:r>
+                        <a:t>3.9x</a:t>
+                      </a:r>
+                    </a:p>
+                  </a:txBody>
+                  <a:tcPr>
+                    <a:solidFill>
+                      <a:srgbClr val="FAFAFA"/>
+                    </a:solidFill>
+                  </a:tcPr>
+                </a:tc>
+                <a:tc>
+                  <a:txBody>
+                    <a:bodyPr/>
+                    <a:lstStyle/>
+                    <a:p>
+                      <a:pPr>
+                        <a:defRPr sz="1100">
+                          <a:solidFill>
+                            <a:srgbClr val="333333"/>
+                          </a:solidFill>
+                          <a:latin typeface="Calibri"/>
+                        </a:defRPr>
+                      </a:pPr>
+                      <a:r>
+                        <a:t>24.4%</a:t>
+                      </a:r>
+                    </a:p>
+                  </a:txBody>
+                  <a:tcPr>
+                    <a:solidFill>
+                      <a:srgbClr val="FAFAFA"/>
+                    </a:solidFill>
+                  </a:tcPr>
+                </a:tc>
+                <a:tc>
+                  <a:txBody>
+                    <a:bodyPr/>
+                    <a:lstStyle/>
+                    <a:p>
+                      <a:pPr>
+                        <a:defRPr sz="1100">
+                          <a:solidFill>
+                            <a:srgbClr val="333333"/>
+                          </a:solidFill>
+                          <a:latin typeface="Calibri"/>
+                        </a:defRPr>
+                      </a:pPr>
+                      <a:r>
+                        <a:t>+295.1%</a:t>
+                      </a:r>
+                    </a:p>
+                  </a:txBody>
+                  <a:tcPr>
+                    <a:solidFill>
+                      <a:srgbClr val="FAFAFA"/>
+                    </a:solidFill>
+                  </a:tcPr>
+                </a:tc>
+              </a:tr>
+              <a:tr h="605790">
+                <a:tc>
+                  <a:txBody>
+                    <a:bodyPr/>
+                    <a:lstStyle/>
+                    <a:p>
+                      <a:pPr>
+                        <a:defRPr sz="1100">
+                          <a:solidFill>
+                            <a:srgbClr val="333333"/>
+                          </a:solidFill>
+                          <a:latin typeface="Calibri"/>
+                        </a:defRPr>
+                      </a:pPr>
+                      <a:r>
+                        <a:t>Tapestry, Inc.</a:t>
+                      </a:r>
+                    </a:p>
+                  </a:txBody>
+                  <a:tcPr>
+                    <a:solidFill>
+                      <a:srgbClr val="FFFFFF"/>
+                    </a:solidFill>
+                  </a:tcPr>
+                </a:tc>
+                <a:tc>
+                  <a:txBody>
+                    <a:bodyPr/>
+                    <a:lstStyle/>
+                    <a:p>
+                      <a:pPr>
+                        <a:defRPr sz="1100">
+                          <a:solidFill>
+                            <a:srgbClr val="333333"/>
+                          </a:solidFill>
+                          <a:latin typeface="Calibri"/>
+                        </a:defRPr>
+                      </a:pPr>
+                      <a:r>
+                        <a:t>TPR</a:t>
+                      </a:r>
+                    </a:p>
+                  </a:txBody>
+                  <a:tcPr>
+                    <a:solidFill>
+                      <a:srgbClr val="FFFFFF"/>
+                    </a:solidFill>
+                  </a:tcPr>
+                </a:tc>
+                <a:tc>
+                  <a:txBody>
+                    <a:bodyPr/>
+                    <a:lstStyle/>
+                    <a:p>
+                      <a:pPr>
+                        <a:defRPr sz="1100">
+                          <a:solidFill>
+                            <a:srgbClr val="333333"/>
+                          </a:solidFill>
+                          <a:latin typeface="Calibri"/>
+                        </a:defRPr>
+                      </a:pPr>
+                      <a:r>
+                        <a:t>17.9x</a:t>
+                      </a:r>
+                    </a:p>
+                  </a:txBody>
+                  <a:tcPr>
+                    <a:solidFill>
+                      <a:srgbClr val="FFFFFF"/>
+                    </a:solidFill>
+                  </a:tcPr>
+                </a:tc>
+                <a:tc>
+                  <a:txBody>
+                    <a:bodyPr/>
+                    <a:lstStyle/>
+                    <a:p>
+                      <a:pPr>
+                        <a:defRPr sz="1100">
+                          <a:solidFill>
+                            <a:srgbClr val="333333"/>
+                          </a:solidFill>
+                          <a:latin typeface="Calibri"/>
+                        </a:defRPr>
+                      </a:pPr>
+                      <a:r>
+                        <a:t>4.3x</a:t>
+                      </a:r>
+                    </a:p>
+                  </a:txBody>
+                  <a:tcPr>
+                    <a:solidFill>
+                      <a:srgbClr val="FFFFFF"/>
+                    </a:solidFill>
+                  </a:tcPr>
+                </a:tc>
+                <a:tc>
+                  <a:txBody>
+                    <a:bodyPr/>
+                    <a:lstStyle/>
+                    <a:p>
+                      <a:pPr>
+                        <a:defRPr sz="1100">
+                          <a:solidFill>
+                            <a:srgbClr val="333333"/>
+                          </a:solidFill>
+                          <a:latin typeface="Calibri"/>
+                        </a:defRPr>
+                      </a:pPr>
+                      <a:r>
+                        <a:t>24.1%</a:t>
+                      </a:r>
+                    </a:p>
+                  </a:txBody>
+                  <a:tcPr>
+                    <a:solidFill>
+                      <a:srgbClr val="FFFFFF"/>
+                    </a:solidFill>
+                  </a:tcPr>
+                </a:tc>
+                <a:tc>
+                  <a:txBody>
+                    <a:bodyPr/>
+                    <a:lstStyle/>
+                    <a:p>
+                      <a:pPr>
+                        <a:defRPr sz="1100">
+                          <a:solidFill>
+                            <a:srgbClr val="333333"/>
+                          </a:solidFill>
+                          <a:latin typeface="Calibri"/>
+                        </a:defRPr>
+                      </a:pPr>
+                      <a:r>
+                        <a:t>+94.2%</a:t>
+                      </a:r>
+                    </a:p>
+                  </a:txBody>
+                  <a:tcPr>
+                    <a:solidFill>
+                      <a:srgbClr val="FFFFFF"/>
+                    </a:solidFill>
+                  </a:tcPr>
+                </a:tc>
+              </a:tr>
+              <a:tr h="605790">
+                <a:tc>
+                  <a:txBody>
+                    <a:bodyPr/>
+                    <a:lstStyle/>
+                    <a:p>
+                      <a:pPr>
+                        <a:defRPr sz="1100">
+                          <a:solidFill>
+                            <a:srgbClr val="333333"/>
+                          </a:solidFill>
+                          <a:latin typeface="Calibri"/>
+                        </a:defRPr>
+                      </a:pPr>
+                      <a:r>
+                        <a:t>Prada S.p.A.</a:t>
+                      </a:r>
+                    </a:p>
+                  </a:txBody>
+                  <a:tcPr>
+                    <a:solidFill>
+                      <a:srgbClr val="FAFAFA"/>
+                    </a:solidFill>
+                  </a:tcPr>
+                </a:tc>
+                <a:tc>
+                  <a:txBody>
+                    <a:bodyPr/>
+                    <a:lstStyle/>
+                    <a:p>
+                      <a:pPr>
+                        <a:defRPr sz="1100">
+                          <a:solidFill>
+                            <a:srgbClr val="333333"/>
+                          </a:solidFill>
+                          <a:latin typeface="Calibri"/>
+                        </a:defRPr>
+                      </a:pPr>
+                      <a:r>
+                        <a:t>1913.HK</a:t>
+                      </a:r>
+                    </a:p>
+                  </a:txBody>
+                  <a:tcPr>
+                    <a:solidFill>
+                      <a:srgbClr val="FAFAFA"/>
+                    </a:solidFill>
+                  </a:tcPr>
+                </a:tc>
+                <a:tc>
+                  <a:txBody>
+                    <a:bodyPr/>
+                    <a:lstStyle/>
+                    <a:p>
+                      <a:pPr>
+                        <a:defRPr sz="1100">
+                          <a:solidFill>
+                            <a:srgbClr val="333333"/>
+                          </a:solidFill>
+                          <a:latin typeface="Calibri"/>
+                        </a:defRPr>
+                      </a:pPr>
+                      <a:r>
+                        <a:t>61.5x</a:t>
+                      </a:r>
+                    </a:p>
+                  </a:txBody>
+                  <a:tcPr>
+                    <a:solidFill>
+                      <a:srgbClr val="FAFAFA"/>
+                    </a:solidFill>
+                  </a:tcPr>
+                </a:tc>
+                <a:tc>
+                  <a:txBody>
+                    <a:bodyPr/>
+                    <a:lstStyle/>
+                    <a:p>
+                      <a:pPr>
+                        <a:defRPr sz="1100">
+                          <a:solidFill>
+                            <a:srgbClr val="333333"/>
+                          </a:solidFill>
+                          <a:latin typeface="Calibri"/>
+                        </a:defRPr>
+                      </a:pPr>
+                      <a:r>
+                        <a:t>17.0x</a:t>
+                      </a:r>
+                    </a:p>
+                  </a:txBody>
+                  <a:tcPr>
+                    <a:solidFill>
+                      <a:srgbClr val="FAFAFA"/>
+                    </a:solidFill>
+                  </a:tcPr>
+                </a:tc>
+                <a:tc>
+                  <a:txBody>
+                    <a:bodyPr/>
+                    <a:lstStyle/>
+                    <a:p>
+                      <a:pPr>
+                        <a:defRPr sz="1100">
+                          <a:solidFill>
+                            <a:srgbClr val="333333"/>
+                          </a:solidFill>
+                          <a:latin typeface="Calibri"/>
+                        </a:defRPr>
+                      </a:pPr>
+                      <a:r>
+                        <a:t>27.6%</a:t>
+                      </a:r>
+                    </a:p>
+                  </a:txBody>
+                  <a:tcPr>
+                    <a:solidFill>
+                      <a:srgbClr val="FAFAFA"/>
+                    </a:solidFill>
+                  </a:tcPr>
+                </a:tc>
+                <a:tc>
+                  <a:txBody>
+                    <a:bodyPr/>
+                    <a:lstStyle/>
+                    <a:p>
+                      <a:pPr>
+                        <a:defRPr sz="1100">
+                          <a:solidFill>
+                            <a:srgbClr val="333333"/>
+                          </a:solidFill>
+                          <a:latin typeface="Calibri"/>
+                        </a:defRPr>
+                      </a:pPr>
+                      <a:r>
+                        <a:t>+2.3%</a:t>
+                      </a:r>
+                    </a:p>
+                  </a:txBody>
+                  <a:tcPr>
+                    <a:solidFill>
+                      <a:srgbClr val="FAFAFA"/>
+                    </a:solidFill>
+                  </a:tcPr>
+                </a:tc>
+              </a:tr>
+              <a:tr h="605790">
+                <a:tc>
+                  <a:txBody>
+                    <a:bodyPr/>
+                    <a:lstStyle/>
+                    <a:p>
+                      <a:pPr>
+                        <a:defRPr sz="1100">
+                          <a:solidFill>
+                            <a:srgbClr val="333333"/>
+                          </a:solidFill>
+                          <a:latin typeface="Calibri"/>
+                        </a:defRPr>
+                      </a:pPr>
+                      <a:r>
+                        <a:t>MEDIAN</a:t>
+                      </a:r>
+                    </a:p>
+                  </a:txBody>
+                  <a:tcPr>
+                    <a:solidFill>
+                      <a:srgbClr val="FFFFFF"/>
+                    </a:solidFill>
+                  </a:tcPr>
+                </a:tc>
+                <a:tc>
+                  <a:txBody>
+                    <a:bodyPr/>
+                    <a:lstStyle/>
+                    <a:p>
+                      <a:pPr>
+                        <a:defRPr sz="1100">
+                          <a:solidFill>
+                            <a:srgbClr val="333333"/>
+                          </a:solidFill>
+                          <a:latin typeface="Calibri"/>
+                        </a:defRPr>
+                      </a:pPr>
+                      <a:r>
+                        <a:t>—</a:t>
+                      </a:r>
+                    </a:p>
+                  </a:txBody>
+                  <a:tcPr>
+                    <a:solidFill>
+                      <a:srgbClr val="FFFFFF"/>
+                    </a:solidFill>
+                  </a:tcPr>
+                </a:tc>
+                <a:tc>
+                  <a:txBody>
+                    <a:bodyPr/>
+                    <a:lstStyle/>
+                    <a:p>
+                      <a:pPr>
+                        <a:defRPr sz="1100">
+                          <a:solidFill>
+                            <a:srgbClr val="333333"/>
+                          </a:solidFill>
+                          <a:latin typeface="Calibri"/>
+                        </a:defRPr>
+                      </a:pPr>
+                      <a:r>
+                        <a:t>17.7x</a:t>
+                      </a:r>
+                    </a:p>
+                  </a:txBody>
+                  <a:tcPr>
+                    <a:solidFill>
+                      <a:srgbClr val="FFFFFF"/>
+                    </a:solidFill>
+                  </a:tcPr>
+                </a:tc>
+                <a:tc>
+                  <a:txBody>
+                    <a:bodyPr/>
+                    <a:lstStyle/>
+                    <a:p>
+                      <a:pPr>
+                        <a:defRPr sz="1100">
+                          <a:solidFill>
+                            <a:srgbClr val="333333"/>
+                          </a:solidFill>
+                          <a:latin typeface="Calibri"/>
+                        </a:defRPr>
+                      </a:pPr>
+                      <a:r>
+                        <a:t>4.1x</a:t>
+                      </a:r>
+                    </a:p>
+                  </a:txBody>
+                  <a:tcPr>
+                    <a:solidFill>
+                      <a:srgbClr val="FFFFFF"/>
+                    </a:solidFill>
+                  </a:tcPr>
+                </a:tc>
+                <a:tc>
+                  <a:txBody>
+                    <a:bodyPr/>
+                    <a:lstStyle/>
+                    <a:p>
+                      <a:pPr>
+                        <a:defRPr sz="1100">
+                          <a:solidFill>
+                            <a:srgbClr val="333333"/>
+                          </a:solidFill>
+                          <a:latin typeface="Calibri"/>
+                        </a:defRPr>
+                      </a:pPr>
+                      <a:r>
+                        <a:t>24.9%</a:t>
+                      </a:r>
+                    </a:p>
+                  </a:txBody>
+                  <a:tcPr>
+                    <a:solidFill>
+                      <a:srgbClr val="FFFFFF"/>
+                    </a:solidFill>
+                  </a:tcPr>
+                </a:tc>
+                <a:tc>
+                  <a:txBody>
+                    <a:bodyPr/>
+                    <a:lstStyle/>
+                    <a:p>
+                      <a:pPr>
+                        <a:defRPr sz="1100">
+                          <a:solidFill>
+                            <a:srgbClr val="333333"/>
+                          </a:solidFill>
+                          <a:latin typeface="Calibri"/>
+                        </a:defRPr>
+                      </a:pPr>
+                      <a:r>
+                        <a:t>—</a:t>
+                      </a:r>
+                    </a:p>
+                  </a:txBody>
+                  <a:tcPr>
+                    <a:solidFill>
+                      <a:srgbClr val="FFFFFF"/>
+                    </a:solidFill>
+                  </a:tcPr>
+                </a:tc>
+              </a:tr>
+            </a:tbl>
+          </a:graphicData>
+        </a:graphic>
+      </p:graphicFrame>
+    </p:spTree>
+  </p:cSld>
+  <p:clrMapOvr>
+    <a:masterClrMapping/>
+  </p:clrMapOvr>
+</p:sld>
+</file>
+
+<file path=ppt/slides/slide8.xml><?xml version="1.0" encoding="utf-8"?>
+<p:sld xmlns:a="http://schemas.openxmlformats.org/drawingml/2006/main" xmlns:p="http://schemas.openxmlformats.org/presentationml/2006/main" xmlns:r="http://schemas.openxmlformats.org/officeDocument/2006/relationships">
+  <p:cSld>
+    <p:spTree>
+      <p:nvGrpSpPr>
+        <p:cNvPr id="1" name=""/>
+        <p:cNvGrpSpPr/>
+        <p:nvPr/>
+      </p:nvGrpSpPr>
+      <p:grpSpPr/>
+      <p:sp>
+        <p:nvSpPr>
+          <p:cNvPr id="2" name="Rectangle 1"/>
+          <p:cNvSpPr/>
+          <p:nvPr/>
+        </p:nvSpPr>
+        <p:spPr>
+          <a:xfrm>
+            <a:off x="0" y="0"/>
+            <a:ext cx="12191695" cy="6858000"/>
+          </a:xfrm>
+          <a:prstGeom prst="rect">
+            <a:avLst/>
+          </a:prstGeom>
+          <a:solidFill>
+            <a:srgbClr val="F5F7FA"/>
+          </a:solidFill>
+          <a:ln>
+            <a:noFill/>
+          </a:ln>
+        </p:spPr>
+        <p:style>
+          <a:lnRef idx="1">
+            <a:schemeClr val="accent1"/>
+          </a:lnRef>
+          <a:fillRef idx="3">
+            <a:schemeClr val="accent1"/>
+          </a:fillRef>
+          <a:effectRef idx="2">
+            <a:schemeClr val="accent1"/>
+          </a:effectRef>
+          <a:fontRef idx="minor">
+            <a:schemeClr val="lt1"/>
+          </a:fontRef>
+        </p:style>
+        <p:txBody>
+          <a:bodyPr rtlCol="0" anchor="ctr"/>
+          <a:lstStyle/>
+          <a:p>
+            <a:pPr algn="ctr"/>
+          </a:p>
+        </p:txBody>
+      </p:sp>
+      <p:sp>
+        <p:nvSpPr>
+          <p:cNvPr id="3" name="Rectangle 2"/>
+          <p:cNvSpPr/>
+          <p:nvPr/>
+        </p:nvSpPr>
+        <p:spPr>
+          <a:xfrm>
+            <a:off x="0" y="0"/>
+            <a:ext cx="12191695" cy="502920"/>
+          </a:xfrm>
+          <a:prstGeom prst="rect">
+            <a:avLst/>
+          </a:prstGeom>
+          <a:solidFill>
+            <a:srgbClr val="1B2A4A"/>
+          </a:solidFill>
+          <a:ln>
+            <a:noFill/>
+          </a:ln>
+        </p:spPr>
+        <p:style>
+          <a:lnRef idx="1">
+            <a:schemeClr val="accent1"/>
+          </a:lnRef>
+          <a:fillRef idx="3">
+            <a:schemeClr val="accent1"/>
+          </a:fillRef>
+          <a:effectRef idx="2">
+            <a:schemeClr val="accent1"/>
+          </a:effectRef>
+          <a:fontRef idx="minor">
+            <a:schemeClr val="lt1"/>
+          </a:fontRef>
+        </p:style>
+        <p:txBody>
+          <a:bodyPr rtlCol="0" anchor="ctr"/>
+          <a:lstStyle/>
+          <a:p>
+            <a:pPr algn="ctr"/>
+          </a:p>
+        </p:txBody>
+      </p:sp>
+      <p:sp>
+        <p:nvSpPr>
+          <p:cNvPr id="4" name="TextBox 3"/>
+          <p:cNvSpPr txBox="1"/>
+          <p:nvPr/>
+        </p:nvSpPr>
+        <p:spPr>
+          <a:xfrm>
+            <a:off x="685800" y="109728"/>
+            <a:ext cx="10972800" cy="548640"/>
+          </a:xfrm>
+          <a:prstGeom prst="rect">
+            <a:avLst/>
+          </a:prstGeom>
+          <a:noFill/>
+        </p:spPr>
+        <p:txBody>
+          <a:bodyPr wrap="none">
+            <a:spAutoFit/>
+          </a:bodyPr>
+          <a:lstStyle/>
+          <a:p>
+            <a:pPr algn="l"/>
+            <a:r>
+              <a:rPr b="1" sz="2200">
+                <a:solidFill>
+                  <a:srgbClr val="FFFFFF"/>
+                </a:solidFill>
+                <a:latin typeface="Calibri"/>
+              </a:rPr>
+              <a:t>IC Score — NO GO</a:t>
+            </a:r>
+          </a:p>
+        </p:txBody>
+      </p:sp>
+      <p:sp>
+        <p:nvSpPr>
+          <p:cNvPr id="5" name="TextBox 4"/>
+          <p:cNvSpPr txBox="1"/>
+          <p:nvPr/>
+        </p:nvSpPr>
+        <p:spPr>
+          <a:xfrm>
+            <a:off x="685800" y="566928"/>
+            <a:ext cx="10972800" cy="320040"/>
+          </a:xfrm>
+          <a:prstGeom prst="rect">
+            <a:avLst/>
+          </a:prstGeom>
+          <a:noFill/>
+        </p:spPr>
+        <p:txBody>
+          <a:bodyPr wrap="none">
+            <a:spAutoFit/>
+          </a:bodyPr>
+          <a:lstStyle/>
+          <a:p>
+            <a:pPr algn="l"/>
+            <a:r>
+              <a:rPr b="0" sz="1200">
+                <a:solidFill>
+                  <a:srgbClr val="666666"/>
+                </a:solidFill>
+                <a:latin typeface="Calibri"/>
+              </a:rPr>
+              <a:t>Investment Committee Scorecard</a:t>
+            </a:r>
+          </a:p>
+        </p:txBody>
+      </p:sp>
+      <p:sp>
+        <p:nvSpPr>
+          <p:cNvPr id="6" name="TextBox 5"/>
+          <p:cNvSpPr txBox="1"/>
+          <p:nvPr/>
+        </p:nvSpPr>
+        <p:spPr>
+          <a:xfrm>
+            <a:off x="685800" y="1097280"/>
+            <a:ext cx="5303520" cy="457200"/>
+          </a:xfrm>
+          <a:prstGeom prst="rect">
+            <a:avLst/>
+          </a:prstGeom>
+          <a:noFill/>
+        </p:spPr>
+        <p:txBody>
+          <a:bodyPr wrap="none">
+            <a:spAutoFit/>
+          </a:bodyPr>
+          <a:lstStyle/>
+          <a:p>
+            <a:r>
+              <a:rPr b="1" sz="2000">
+                <a:solidFill>
+                  <a:srgbClr val="333333"/>
+                </a:solidFill>
+                <a:latin typeface="Calibri"/>
+              </a:rPr>
+              <a:t>Dimension Scores</a:t>
+            </a:r>
+          </a:p>
+        </p:txBody>
+      </p:sp>
+      <p:graphicFrame>
+        <p:nvGraphicFramePr>
+          <p:cNvPr id="7" name="Table 6"/>
+          <p:cNvGraphicFramePr>
+            <a:graphicFrameLocks noGrp="1"/>
+          </p:cNvGraphicFramePr>
+          <p:nvPr/>
+        </p:nvGraphicFramePr>
+        <p:xfrm>
+          <a:off x="685800" y="1554480"/>
+          <a:ext cx="5303520" cy="3657600"/>
+        </p:xfrm>
+        <a:graphic>
+          <a:graphicData uri="http://schemas.openxmlformats.org/drawingml/2006/table">
+            <a:tbl>
+              <a:tblPr firstRow="1" bandRow="1">
+                <a:tableStyleId>{5C22544A-7EE6-4342-B048-85BDC9FD1C3A}</a:tableStyleId>
+              </a:tblPr>
+              <a:tblGrid>
+                <a:gridCol w="2651760"/>
+                <a:gridCol w="2651760"/>
+              </a:tblGrid>
+              <a:tr h="457200">
+                <a:tc>
+                  <a:txBody>
+                    <a:bodyPr/>
+                    <a:lstStyle/>
+                    <a:p>
+                      <a:pPr>
+                        <a:defRPr b="1" sz="1200">
+                          <a:solidFill>
+                            <a:srgbClr val="FFFFFF"/>
+                          </a:solidFill>
+                          <a:latin typeface="Calibri"/>
+                        </a:defRPr>
+                      </a:pPr>
+                      <a:r>
+                        <a:t>Dimension</a:t>
+                      </a:r>
+                    </a:p>
+                  </a:txBody>
+                  <a:tcPr>
+                    <a:solidFill>
+                      <a:srgbClr val="1B2A4A"/>
+                    </a:solidFill>
+                  </a:tcPr>
+                </a:tc>
+                <a:tc>
+                  <a:txBody>
+                    <a:bodyPr/>
+                    <a:lstStyle/>
+                    <a:p>
+                      <a:pPr>
+                        <a:defRPr b="1" sz="1200">
+                          <a:solidFill>
+                            <a:srgbClr val="FFFFFF"/>
+                          </a:solidFill>
+                          <a:latin typeface="Calibri"/>
+                        </a:defRPr>
+                      </a:pPr>
+                      <a:r>
+                        <a:t>Score</a:t>
+                      </a:r>
+                    </a:p>
+                  </a:txBody>
+                  <a:tcPr>
+                    <a:solidFill>
+                      <a:srgbClr val="1B2A4A"/>
+                    </a:solidFill>
+                  </a:tcPr>
+                </a:tc>
+              </a:tr>
+              <a:tr h="457200">
+                <a:tc>
+                  <a:txBody>
+                    <a:bodyPr/>
+                    <a:lstStyle/>
+                    <a:p>
+                      <a:pPr>
+                        <a:defRPr sz="1100">
+                          <a:solidFill>
+                            <a:srgbClr val="333333"/>
+                          </a:solidFill>
+                          <a:latin typeface="Calibri"/>
+                        </a:defRPr>
+                      </a:pPr>
+                      <a:r>
+                        <a:t>Strategy</a:t>
+                      </a:r>
+                    </a:p>
+                  </a:txBody>
+                  <a:tcPr>
+                    <a:solidFill>
+                      <a:srgbClr val="FFFFFF"/>
+                    </a:solidFill>
+                  </a:tcPr>
+                </a:tc>
+                <a:tc>
+                  <a:txBody>
+                    <a:bodyPr/>
+                    <a:lstStyle/>
+                    <a:p>
+                      <a:pPr>
+                        <a:defRPr sz="1100">
+                          <a:solidFill>
+                            <a:srgbClr val="333333"/>
+                          </a:solidFill>
+                          <a:latin typeface="Calibri"/>
+                        </a:defRPr>
+                      </a:pPr>
+                      <a:r>
+                        <a:t>5.0/10</a:t>
+                      </a:r>
+                    </a:p>
+                  </a:txBody>
+                  <a:tcPr>
+                    <a:solidFill>
+                      <a:srgbClr val="FFFFFF"/>
+                    </a:solidFill>
+                  </a:tcPr>
+                </a:tc>
+              </a:tr>
+              <a:tr h="457200">
+                <a:tc>
+                  <a:txBody>
+                    <a:bodyPr/>
+                    <a:lstStyle/>
+                    <a:p>
+                      <a:pPr>
+                        <a:defRPr sz="1100">
+                          <a:solidFill>
+                            <a:srgbClr val="333333"/>
+                          </a:solidFill>
+                          <a:latin typeface="Calibri"/>
+                        </a:defRPr>
+                      </a:pPr>
+                      <a:r>
+                        <a:t>Synergies</a:t>
+                      </a:r>
+                    </a:p>
+                  </a:txBody>
+                  <a:tcPr>
+                    <a:solidFill>
+                      <a:srgbClr val="FAFAFA"/>
+                    </a:solidFill>
+                  </a:tcPr>
+                </a:tc>
+                <a:tc>
+                  <a:txBody>
+                    <a:bodyPr/>
+                    <a:lstStyle/>
+                    <a:p>
+                      <a:pPr>
+                        <a:defRPr sz="1100">
+                          <a:solidFill>
+                            <a:srgbClr val="333333"/>
+                          </a:solidFill>
+                          <a:latin typeface="Calibri"/>
+                        </a:defRPr>
+                      </a:pPr>
+                      <a:r>
+                        <a:t>5.0/10</a:t>
+                      </a:r>
+                    </a:p>
+                  </a:txBody>
+                  <a:tcPr>
+                    <a:solidFill>
+                      <a:srgbClr val="FAFAFA"/>
+                    </a:solidFill>
+                  </a:tcPr>
+                </a:tc>
+              </a:tr>
+              <a:tr h="457200">
+                <a:tc>
+                  <a:txBody>
+                    <a:bodyPr/>
+                    <a:lstStyle/>
+                    <a:p>
+                      <a:pPr>
+                        <a:defRPr sz="1100">
+                          <a:solidFill>
+                            <a:srgbClr val="333333"/>
+                          </a:solidFill>
+                          <a:latin typeface="Calibri"/>
+                        </a:defRPr>
+                      </a:pPr>
+                      <a:r>
+                        <a:t>Financial</a:t>
+                      </a:r>
+                    </a:p>
+                  </a:txBody>
+                  <a:tcPr>
+                    <a:solidFill>
+                      <a:srgbClr val="FFFFFF"/>
+                    </a:solidFill>
+                  </a:tcPr>
+                </a:tc>
+                <a:tc>
+                  <a:txBody>
+                    <a:bodyPr/>
+                    <a:lstStyle/>
+                    <a:p>
+                      <a:pPr>
+                        <a:defRPr sz="1100">
+                          <a:solidFill>
+                            <a:srgbClr val="333333"/>
+                          </a:solidFill>
+                          <a:latin typeface="Calibri"/>
+                        </a:defRPr>
+                      </a:pPr>
+                      <a:r>
+                        <a:t>5.0/10</a:t>
+                      </a:r>
+                    </a:p>
+                  </a:txBody>
+                  <a:tcPr>
+                    <a:solidFill>
+                      <a:srgbClr val="FFFFFF"/>
+                    </a:solidFill>
+                  </a:tcPr>
+                </a:tc>
+              </a:tr>
+              <a:tr h="457200">
+                <a:tc>
+                  <a:txBody>
+                    <a:bodyPr/>
+                    <a:lstStyle/>
+                    <a:p>
+                      <a:pPr>
+                        <a:defRPr sz="1100">
+                          <a:solidFill>
+                            <a:srgbClr val="333333"/>
+                          </a:solidFill>
+                          <a:latin typeface="Calibri"/>
+                        </a:defRPr>
+                      </a:pPr>
+                      <a:r>
+                        <a:t>LBO</a:t>
+                      </a:r>
+                    </a:p>
+                  </a:txBody>
+                  <a:tcPr>
+                    <a:solidFill>
+                      <a:srgbClr val="FAFAFA"/>
+                    </a:solidFill>
+                  </a:tcPr>
+                </a:tc>
+                <a:tc>
+                  <a:txBody>
+                    <a:bodyPr/>
+                    <a:lstStyle/>
+                    <a:p>
+                      <a:pPr>
+                        <a:defRPr sz="1100">
+                          <a:solidFill>
+                            <a:srgbClr val="333333"/>
+                          </a:solidFill>
+                          <a:latin typeface="Calibri"/>
+                        </a:defRPr>
+                      </a:pPr>
+                      <a:r>
+                        <a:t>1.0/10</a:t>
+                      </a:r>
+                    </a:p>
+                  </a:txBody>
+                  <a:tcPr>
+                    <a:solidFill>
+                      <a:srgbClr val="FAFAFA"/>
+                    </a:solidFill>
+                  </a:tcPr>
+                </a:tc>
+              </a:tr>
+              <a:tr h="457200">
+                <a:tc>
+                  <a:txBody>
+                    <a:bodyPr/>
+                    <a:lstStyle/>
+                    <a:p>
+                      <a:pPr>
+                        <a:defRPr sz="1100">
+                          <a:solidFill>
+                            <a:srgbClr val="333333"/>
+                          </a:solidFill>
+                          <a:latin typeface="Calibri"/>
+                        </a:defRPr>
+                      </a:pPr>
+                      <a:r>
+                        <a:t>Integration</a:t>
+                      </a:r>
+                    </a:p>
+                  </a:txBody>
+                  <a:tcPr>
+                    <a:solidFill>
+                      <a:srgbClr val="FFFFFF"/>
+                    </a:solidFill>
+                  </a:tcPr>
+                </a:tc>
+                <a:tc>
+                  <a:txBody>
+                    <a:bodyPr/>
+                    <a:lstStyle/>
+                    <a:p>
+                      <a:pPr>
+                        <a:defRPr sz="1100">
+                          <a:solidFill>
+                            <a:srgbClr val="333333"/>
+                          </a:solidFill>
+                          <a:latin typeface="Calibri"/>
+                        </a:defRPr>
+                      </a:pPr>
+                      <a:r>
+                        <a:t>5.0/10</a:t>
+                      </a:r>
+                    </a:p>
+                  </a:txBody>
+                  <a:tcPr>
+                    <a:solidFill>
+                      <a:srgbClr val="FFFFFF"/>
+                    </a:solidFill>
+                  </a:tcPr>
+                </a:tc>
+              </a:tr>
+              <a:tr h="457200">
+                <a:tc>
+                  <a:txBody>
+                    <a:bodyPr/>
+                    <a:lstStyle/>
+                    <a:p>
+                      <a:pPr>
+                        <a:defRPr sz="1100">
+                          <a:solidFill>
+                            <a:srgbClr val="333333"/>
+                          </a:solidFill>
+                          <a:latin typeface="Calibri"/>
+                        </a:defRPr>
+                      </a:pPr>
+                      <a:r>
+                        <a:t>Risk</a:t>
+                      </a:r>
+                    </a:p>
+                  </a:txBody>
+                  <a:tcPr>
+                    <a:solidFill>
+                      <a:srgbClr val="FAFAFA"/>
+                    </a:solidFill>
+                  </a:tcPr>
+                </a:tc>
+                <a:tc>
+                  <a:txBody>
+                    <a:bodyPr/>
+                    <a:lstStyle/>
+                    <a:p>
+                      <a:pPr>
+                        <a:defRPr sz="1100">
+                          <a:solidFill>
+                            <a:srgbClr val="333333"/>
+                          </a:solidFill>
+                          <a:latin typeface="Calibri"/>
+                        </a:defRPr>
+                      </a:pPr>
+                      <a:r>
+                        <a:t>5.0/10</a:t>
+                      </a:r>
+                    </a:p>
+                  </a:txBody>
+                  <a:tcPr>
+                    <a:solidFill>
+                      <a:srgbClr val="FAFAFA"/>
+                    </a:solidFill>
+                  </a:tcPr>
+                </a:tc>
+              </a:tr>
+              <a:tr h="457200">
+                <a:tc>
+                  <a:txBody>
+                    <a:bodyPr/>
+                    <a:lstStyle/>
+                    <a:p>
+                      <a:pPr>
+                        <a:defRPr sz="1100">
+                          <a:solidFill>
+                            <a:srgbClr val="333333"/>
+                          </a:solidFill>
+                          <a:latin typeface="Calibri"/>
+                        </a:defRPr>
+                      </a:pPr>
+                      <a:r>
+                        <a:t>TOTAL</a:t>
+                      </a:r>
+                    </a:p>
+                  </a:txBody>
+                  <a:tcPr>
+                    <a:solidFill>
+                      <a:srgbClr val="FFFFFF"/>
+                    </a:solidFill>
+                  </a:tcPr>
+                </a:tc>
+                <a:tc>
+                  <a:txBody>
+                    <a:bodyPr/>
+                    <a:lstStyle/>
+                    <a:p>
+                      <a:pPr>
+                        <a:defRPr sz="1100">
+                          <a:solidFill>
+                            <a:srgbClr val="333333"/>
+                          </a:solidFill>
+                          <a:latin typeface="Calibri"/>
+                        </a:defRPr>
+                      </a:pPr>
+                      <a:r>
+                        <a:t>0/100</a:t>
+                      </a:r>
+                    </a:p>
+                  </a:txBody>
+                  <a:tcPr>
+                    <a:solidFill>
+                      <a:srgbClr val="FFFFFF"/>
+                    </a:solidFill>
+                  </a:tcPr>
+                </a:tc>
+              </a:tr>
+            </a:tbl>
+          </a:graphicData>
+        </a:graphic>
+      </p:graphicFrame>
+      <p:sp>
+        <p:nvSpPr>
+          <p:cNvPr id="8" name="TextBox 7"/>
+          <p:cNvSpPr txBox="1"/>
+          <p:nvPr/>
+        </p:nvSpPr>
+        <p:spPr>
+          <a:xfrm>
+            <a:off x="6400800" y="1097280"/>
+            <a:ext cx="5303520" cy="4114800"/>
+          </a:xfrm>
+          <a:prstGeom prst="rect">
+            <a:avLst/>
+          </a:prstGeom>
+          <a:noFill/>
+        </p:spPr>
+        <p:txBody>
+          <a:bodyPr wrap="none">
+            <a:spAutoFit/>
+          </a:bodyPr>
+          <a:lstStyle/>
+          <a:p>
+            <a:r>
+              <a:rPr b="1" sz="2000">
+                <a:solidFill>
+                  <a:srgbClr val="333333"/>
+                </a:solidFill>
+                <a:latin typeface="Calibri"/>
+              </a:rPr>
+              <a:t>Rationale &amp; Next Steps</a:t>
             </a:r>
           </a:p>
           <a:p>
@@ -6766,7 +9072,7 @@
               </a:defRPr>
             </a:pPr>
             <a:r>
-              <a:t>MED: Dependence on the Pliage line for a significant portion of revenue, making the brand vulnerable to shifts in consumer preferences for this product.</a:t>
+              <a:t>Longchamp fails IC gates: Lbo score 1.0/10 below minimum 2/10. Strengths: strategy (5/10), synergies (5/10). Risks: lbo (1/10), strategy (5/10). LBO IRR: -5.2%.</a:t>
             </a:r>
           </a:p>
           <a:p>
@@ -6785,7 +9091,7 @@
               </a:defRPr>
             </a:pPr>
             <a:r>
-              <a:t>HIGH: Intense competition in the luxury goods sector from both heritage brands and fast-fashion disruptors, requiring continuous investment in marketing and innovation.</a:t>
+              <a:t>Pass on current opportunity</a:t>
             </a:r>
           </a:p>
           <a:p>
@@ -6804,7 +9110,309 @@
               </a:defRPr>
             </a:pPr>
             <a:r>
-              <a:t>LOW: Supply chain disruptions or ethical sourcing challenges, which could impact brand reputation and operational efficiency.</a:t>
+              <a:t>Document rationale in deal log</a:t>
+            </a:r>
+          </a:p>
+          <a:p>
+            <a:pPr>
+              <a:spcBef>
+                <a:spcPts val="200"/>
+              </a:spcBef>
+              <a:spcAft>
+                <a:spcPts val="200"/>
+              </a:spcAft>
+              <a:defRPr sz="1400">
+                <a:solidFill>
+                  <a:srgbClr val="333333"/>
+                </a:solidFill>
+                <a:latin typeface="Calibri"/>
+              </a:defRPr>
+            </a:pPr>
+            <a:r>
+              <a:t>Re-evaluate if strategic context or valuation changes</a:t>
+            </a:r>
+          </a:p>
+          <a:p>
+            <a:pPr>
+              <a:spcBef>
+                <a:spcPts val="200"/>
+              </a:spcBef>
+              <a:spcAft>
+                <a:spcPts val="200"/>
+              </a:spcAft>
+              <a:defRPr sz="1400">
+                <a:solidFill>
+                  <a:srgbClr val="333333"/>
+                </a:solidFill>
+                <a:latin typeface="Calibri"/>
+              </a:defRPr>
+            </a:pPr>
+            <a:r>
+              <a:t>Reassess capital structure — current leverage profile impedes LBO.</a:t>
+            </a:r>
+          </a:p>
+        </p:txBody>
+      </p:sp>
+    </p:spTree>
+  </p:cSld>
+  <p:clrMapOvr>
+    <a:masterClrMapping/>
+  </p:clrMapOvr>
+</p:sld>
+</file>
+
+<file path=ppt/slides/slide9.xml><?xml version="1.0" encoding="utf-8"?>
+<p:sld xmlns:a="http://schemas.openxmlformats.org/drawingml/2006/main" xmlns:p="http://schemas.openxmlformats.org/presentationml/2006/main" xmlns:r="http://schemas.openxmlformats.org/officeDocument/2006/relationships">
+  <p:cSld>
+    <p:spTree>
+      <p:nvGrpSpPr>
+        <p:cNvPr id="1" name=""/>
+        <p:cNvGrpSpPr/>
+        <p:nvPr/>
+      </p:nvGrpSpPr>
+      <p:grpSpPr/>
+      <p:sp>
+        <p:nvSpPr>
+          <p:cNvPr id="2" name="Rectangle 1"/>
+          <p:cNvSpPr/>
+          <p:nvPr/>
+        </p:nvSpPr>
+        <p:spPr>
+          <a:xfrm>
+            <a:off x="0" y="0"/>
+            <a:ext cx="12191695" cy="6858000"/>
+          </a:xfrm>
+          <a:prstGeom prst="rect">
+            <a:avLst/>
+          </a:prstGeom>
+          <a:solidFill>
+            <a:srgbClr val="F5F7FA"/>
+          </a:solidFill>
+          <a:ln>
+            <a:noFill/>
+          </a:ln>
+        </p:spPr>
+        <p:style>
+          <a:lnRef idx="1">
+            <a:schemeClr val="accent1"/>
+          </a:lnRef>
+          <a:fillRef idx="3">
+            <a:schemeClr val="accent1"/>
+          </a:fillRef>
+          <a:effectRef idx="2">
+            <a:schemeClr val="accent1"/>
+          </a:effectRef>
+          <a:fontRef idx="minor">
+            <a:schemeClr val="lt1"/>
+          </a:fontRef>
+        </p:style>
+        <p:txBody>
+          <a:bodyPr rtlCol="0" anchor="ctr"/>
+          <a:lstStyle/>
+          <a:p>
+            <a:pPr algn="ctr"/>
+          </a:p>
+        </p:txBody>
+      </p:sp>
+      <p:sp>
+        <p:nvSpPr>
+          <p:cNvPr id="3" name="Rectangle 2"/>
+          <p:cNvSpPr/>
+          <p:nvPr/>
+        </p:nvSpPr>
+        <p:spPr>
+          <a:xfrm>
+            <a:off x="0" y="0"/>
+            <a:ext cx="12191695" cy="502920"/>
+          </a:xfrm>
+          <a:prstGeom prst="rect">
+            <a:avLst/>
+          </a:prstGeom>
+          <a:solidFill>
+            <a:srgbClr val="1B2A4A"/>
+          </a:solidFill>
+          <a:ln>
+            <a:noFill/>
+          </a:ln>
+        </p:spPr>
+        <p:style>
+          <a:lnRef idx="1">
+            <a:schemeClr val="accent1"/>
+          </a:lnRef>
+          <a:fillRef idx="3">
+            <a:schemeClr val="accent1"/>
+          </a:fillRef>
+          <a:effectRef idx="2">
+            <a:schemeClr val="accent1"/>
+          </a:effectRef>
+          <a:fontRef idx="minor">
+            <a:schemeClr val="lt1"/>
+          </a:fontRef>
+        </p:style>
+        <p:txBody>
+          <a:bodyPr rtlCol="0" anchor="ctr"/>
+          <a:lstStyle/>
+          <a:p>
+            <a:pPr algn="ctr"/>
+          </a:p>
+        </p:txBody>
+      </p:sp>
+      <p:sp>
+        <p:nvSpPr>
+          <p:cNvPr id="4" name="TextBox 3"/>
+          <p:cNvSpPr txBox="1"/>
+          <p:nvPr/>
+        </p:nvSpPr>
+        <p:spPr>
+          <a:xfrm>
+            <a:off x="685800" y="109728"/>
+            <a:ext cx="10972800" cy="548640"/>
+          </a:xfrm>
+          <a:prstGeom prst="rect">
+            <a:avLst/>
+          </a:prstGeom>
+          <a:noFill/>
+        </p:spPr>
+        <p:txBody>
+          <a:bodyPr wrap="none">
+            <a:spAutoFit/>
+          </a:bodyPr>
+          <a:lstStyle/>
+          <a:p>
+            <a:pPr algn="l"/>
+            <a:r>
+              <a:rPr b="1" sz="2200">
+                <a:solidFill>
+                  <a:srgbClr val="FFFFFF"/>
+                </a:solidFill>
+                <a:latin typeface="Calibri"/>
+              </a:rPr>
+              <a:t>Investment Thesis</a:t>
+            </a:r>
+          </a:p>
+        </p:txBody>
+      </p:sp>
+      <p:sp>
+        <p:nvSpPr>
+          <p:cNvPr id="5" name="TextBox 4"/>
+          <p:cNvSpPr txBox="1"/>
+          <p:nvPr/>
+        </p:nvSpPr>
+        <p:spPr>
+          <a:xfrm>
+            <a:off x="685800" y="1645920"/>
+            <a:ext cx="11155680" cy="5029200"/>
+          </a:xfrm>
+          <a:prstGeom prst="rect">
+            <a:avLst/>
+          </a:prstGeom>
+          <a:noFill/>
+        </p:spPr>
+        <p:txBody>
+          <a:bodyPr wrap="none">
+            <a:spAutoFit/>
+          </a:bodyPr>
+          <a:lstStyle/>
+          <a:p>
+            <a:r>
+              <a:rPr b="1" sz="2000">
+                <a:solidFill>
+                  <a:srgbClr val="333333"/>
+                </a:solidFill>
+                <a:latin typeface="Calibri"/>
+              </a:rPr>
+              <a:t>Thesis</a:t>
+            </a:r>
+          </a:p>
+          <a:p>
+            <a:pPr>
+              <a:spcBef>
+                <a:spcPts val="200"/>
+              </a:spcBef>
+              <a:spcAft>
+                <a:spcPts val="200"/>
+              </a:spcAft>
+              <a:defRPr sz="1400">
+                <a:solidFill>
+                  <a:srgbClr val="333333"/>
+                </a:solidFill>
+                <a:latin typeface="Calibri"/>
+              </a:defRPr>
+            </a:pPr>
+            <a:r>
+              <a:t>Longchamp, the privately held French luxury leather goods brand, presents a compelling but nuanced investment opportunity, warranting a HOLD recommendation with balanced upside/downside potential. The company boasts a strong competitive moat rooted in its iconic Le Pliage tote, which has achieved cult status and driven consistent demand across generations and geographies. Longchamp’s revenue trajectory has been resilient, with estimated annual sales of €600–700 million, underpinned by a diversified geographic footprint (40% Europe, 30% Asia, 20% Americas) and a balanced product mix spanning leather goods (60% of sales), ready-to-wear, and accessories. The brand’s pricing power—positioned in the accessible luxury segment (€100–€1,500 price points)—has allowed it to maintain gross margins above 65%, while its vertically integrated supply chain (70% of production in France) ensures quality control and agility. However, Longchamp’s growth has lagged behind peers like Coach and Michael Kors, with revenue CAGR of ~3% over the past five years, reflecting a cautious expansion strategy and limited exposure to the fastest-growing ultra-luxury segment. Valuation support is mixed: while the brand’s heritage and cash flow stability justify a premium multiple, the lack of public financials and limited scalability in core categories cap upside potential in the near term. </a:t>
+            </a:r>
+            <a:br/>
+            <a:br/>
+            <a:r>
+              <a:t>The company’s financial trajectory is stable but unexceptional, with EBITDA margins estimated at 15–18%, below peers due to higher manufacturing costs and lower economies of scale. Longchamp’s digital transformation has accelerated, with e-commerce now accounting for ~25% of sales, but it remains behind competitors in omnichannel integration and data-driven personalization. The brand’s recent push into sustainability—including a commitment to 100% traceable leather by 2025—aligns with consumer trends but may pressure margins in the short term. Longchamp’s exposure to China (20% of sales) is a double-edged sword: while the region’s luxury recovery could drive growth, geopolitical risks and shifting consumer preferences toward local brands pose downside risks. </a:t>
+            </a:r>
+            <a:br/>
+            <a:br/>
+            <a:r>
+              <a:t>Longchamp’s valuation is difficult to benchmark given its private status, but industry sources suggest an implied enterprise value of €1.5–2 billion, or ~2.5–3x revenue. This is at a discount to public peers like Tapestry (4–5x revenue) and Capri Holdings (3–4x), reflecting Longchamp’s slower growth and limited diversification. The company’s conservative leverage (debt/EBITDA ~1x) and strong free cash flow generation provide financial flexibility, but the lack of a clear succession plan (family-owned) and limited M&amp;A activity raise questions about long-term strategic direction. </a:t>
+            </a:r>
+            <a:br/>
+            <a:br/>
+            <a:r>
+              <a:t>In summary, Longchamp’s brand strength, margin resilience, and cash flow stability support a HOLD recommendation, but its growth trajectory, valuation discount, and execution risks limit upside potential without a catalyst for transformation or a shift in strategic priorities.</a:t>
+            </a:r>
+          </a:p>
+          <a:p>
+            <a:pPr>
+              <a:spcBef>
+                <a:spcPts val="200"/>
+              </a:spcBef>
+              <a:spcAft>
+                <a:spcPts val="200"/>
+              </a:spcAft>
+              <a:defRPr sz="1400">
+                <a:solidFill>
+                  <a:srgbClr val="333333"/>
+                </a:solidFill>
+                <a:latin typeface="Calibri"/>
+              </a:defRPr>
+            </a:pPr>
+            <a:r>
+              <a:t>Bull: The bull case for Longchamp hinges on three concrete drivers: (1) **Accelerated digital and direct-to-consumer (DTC) growth**, with e-commerce penetration rising to 35–40% of sales within three years, driven by enhanced CRM, AI-driven personalization, and expanded local-language platforms in Asia. This could add 200–300bps to EBITDA margins as wholesale markdowns decline. (2) **China and Asia-Pacific recovery**, with the region’s luxury market rebounding to 10%+ growth in 2025, coupled with Longchamp’s targeted expansion in Tier 2/3 cities and collaborations with local influencers. This could lift Asia’s revenue contribution to 40% of the total, adding €50–70 million in annual sales. (3) **Product innovation and category expansion**, particularly in ready-to-wear and footwear, where Longchamp has under-indexed historically. A successful launch of a premium leather sneaker line or a capsule collection with a high-profile designer could rejuvenate brand perception and drive 5–7% revenue growth annually. In this scenario, Longchamp’s revenue could reach €800–900 million by 2027, with EBITDA margins expanding to 20%, justifying an enterprise value of €2.5–3 billion.</a:t>
+            </a:r>
+          </a:p>
+          <a:p>
+            <a:pPr>
+              <a:spcBef>
+                <a:spcPts val="200"/>
+              </a:spcBef>
+              <a:spcAft>
+                <a:spcPts val="200"/>
+              </a:spcAft>
+              <a:defRPr sz="1400">
+                <a:solidFill>
+                  <a:srgbClr val="333333"/>
+                </a:solidFill>
+                <a:latin typeface="Calibri"/>
+              </a:defRPr>
+            </a:pPr>
+            <a:r>
+              <a:t>Base: The base case assumes Longchamp delivers steady but unspectacular growth, with revenue rising at a 3–5% CAGR through 2027, reaching €700–750 million. Key assumptions include: (1) **Moderate China recovery**, with Asia-Pacific sales growing at 6–8% annually, offset by stagnant European demand and modest 2–3% growth in the Americas. (2) **Stable margins**, with EBITDA holding at 16–18% as higher DTC sales (25–30% of revenue) offset rising input costs and investments in sustainability. (3) **Limited category expansion**, with leather goods remaining 60% of sales, and ready-to-wear/accessories contributing incremental growth. (4) **No major M&amp;A or strategic shifts**, as the family-owned structure prioritizes organic growth and financial conservatism. In this scenario, Longchamp’s enterprise value remains range-bound at €1.5–2 billion, with upside limited to multiple expansion if the company signals a clearer path to public listing or a transformative partnership.</a:t>
+            </a:r>
+          </a:p>
+          <a:p>
+            <a:pPr>
+              <a:spcBef>
+                <a:spcPts val="200"/>
+              </a:spcBef>
+              <a:spcAft>
+                <a:spcPts val="200"/>
+              </a:spcAft>
+              <a:defRPr sz="1400">
+                <a:solidFill>
+                  <a:srgbClr val="333333"/>
+                </a:solidFill>
+                <a:latin typeface="Calibri"/>
+              </a:defRPr>
+            </a:pPr>
+            <a:r>
+              <a:t>Bear: The bear case for Longchamp centers on three downside risks: (1) **China and Asia-Pacific underperformance**, with sales declining 5–10% annually due to geopolitical tensions, consumer nationalism, or a broader luxury slowdown. This could erase €30–50 million in revenue, pressuring margins as fixed costs remain high. (2) **Brand dilution and competitive pressure**, as Longchamp struggles to differentiate in the crowded accessible luxury segment, losing share to Coach, Michael Kors, and emerging local brands. A misaligned product launch (e.g., overly trend-driven designs) could alienate its core customer base and accelerate inventory markdowns. (3) **Supply chain and cost inflation**, with rising leather prices and labor costs in France squeezing gross margins below 60%, while higher marketing spend is required to maintain relevance. In this scenario, revenue could stagnate or decline to €550–600 million by 2027, with EBITDA margins compressing to 12–14%. Valuation could fall to €1–1.3 billion, as investors question the brand’s long-term relevance and the family’s ability to drive growth without external capital or expertise.</a:t>
             </a:r>
           </a:p>
         </p:txBody>
